--- a/presentations/03_Brokerage_Partner_Program_Detailed_EN.pptx
+++ b/presentations/03_Brokerage_Partner_Program_Detailed_EN.pptx
@@ -134,20 +134,20 @@
   <p:extLst>
     <p:ext uri="{521415D9-36F7-43E2-AB2F-B90AF26B5E84}">
       <p14:sectionLst xmlns:p14="http://schemas.microsoft.com/office/powerpoint/2010/main">
-        <p14:section name="Introduction" id="{d88ae448-9314-03ef-d2a3-80605304b045}">
+        <p14:section name="Introduction" id="{39c71a4c-04a3-87d8-47ed-cb7fca59295a}">
           <p14:sldIdLst>
             <p14:sldId id="256"/>
             <p14:sldId id="257"/>
           </p14:sldIdLst>
         </p14:section>
-        <p14:section name="Who we are" id="{64785e5d-8d8f-50bc-8f8a-6e9ce9834155}">
+        <p14:section name="Who we are" id="{36fc9dee-cc08-3982-f85f-43df95d1ab3f}">
           <p14:sldIdLst>
             <p14:sldId id="258"/>
             <p14:sldId id="259"/>
             <p14:sldId id="260"/>
           </p14:sldIdLst>
         </p14:section>
-        <p14:section name="The service" id="{d4226788-d5f4-78d0-2fb9-fe9e26ff7e29}">
+        <p14:section name="The service" id="{fe39d8f4-9f8c-4713-e4cb-6cd338b2cc44}">
           <p14:sldIdLst>
             <p14:sldId id="261"/>
             <p14:sldId id="262"/>
@@ -156,7 +156,7 @@
             <p14:sldId id="265"/>
           </p14:sldIdLst>
         </p14:section>
-        <p14:section name="Partnership" id="{6c20724d-3763-64cf-f30d-054c06578aaf}">
+        <p14:section name="Partnership" id="{6a605777-9a80-3bc5-ca6e-629ca580b156}">
           <p14:sldIdLst>
             <p14:sldId id="266"/>
             <p14:sldId id="267"/>
@@ -164,7 +164,7 @@
             <p14:sldId id="269"/>
           </p14:sldIdLst>
         </p14:section>
-        <p14:section name="Introducing" id="{8a67cfb8-0348-57c4-5500-9063db9f9505}">
+        <p14:section name="Introducing" id="{39597cc3-18c2-b6a3-837c-780965e1c866}">
           <p14:sldIdLst>
             <p14:sldId id="270"/>
             <p14:sldId id="271"/>
@@ -173,7 +173,7 @@
             <p14:sldId id="274"/>
           </p14:sldIdLst>
         </p14:section>
-        <p14:section name="Workflow" id="{9ed83496-8d40-9e2e-6b67-7cceda2ded1e}">
+        <p14:section name="Workflow" id="{be67749c-1152-0e70-0c78-6e5ebec26e37}">
           <p14:sldIdLst>
             <p14:sldId id="275"/>
             <p14:sldId id="276"/>
@@ -181,7 +181,7 @@
             <p14:sldId id="278"/>
           </p14:sldIdLst>
         </p14:section>
-        <p14:section name="Marketing" id="{e37e9907-c90d-a6ae-ea4b-6d2bf688d458}">
+        <p14:section name="Marketing" id="{0bcc920b-ada9-249e-4e40-e513e5590dd8}">
           <p14:sldIdLst>
             <p14:sldId id="279"/>
             <p14:sldId id="280"/>
@@ -3048,7 +3048,7 @@
     <p:bg>
       <p:bgPr>
         <a:solidFill>
-          <a:srgbClr val="0B0B0B"/>
+          <a:srgbClr val="0E2238"/>
         </a:solidFill>
       </p:bgPr>
     </p:bg>
@@ -3066,106 +3066,30 @@
           <a:chExt cx="0" cy="0"/>
         </a:xfrm>
       </p:grpSpPr>
-      <p:sp>
-        <p:nvSpPr>
-          <p:cNvPr id="2" name="Shape 0"/>
-          <p:cNvSpPr/>
-          <p:nvPr/>
-        </p:nvSpPr>
-        <p:spPr>
-          <a:xfrm>
-            <a:off x="365760" y="4626864"/>
-            <a:ext cx="384048" cy="384048"/>
-          </a:xfrm>
-          <a:prstGeom prst="rect">
-            <a:avLst/>
-          </a:prstGeom>
-          <a:solidFill>
-            <a:srgbClr val="0B0B0B"/>
-          </a:solidFill>
-          <a:ln w="9525">
-            <a:solidFill>
-              <a:srgbClr val="B08D57"/>
-            </a:solidFill>
-            <a:prstDash val="solid"/>
-          </a:ln>
-        </p:spPr>
-      </p:sp>
-      <p:sp>
-        <p:nvSpPr>
-          <p:cNvPr id="3" name="Text 1"/>
-          <p:cNvSpPr/>
-          <p:nvPr/>
-        </p:nvSpPr>
-        <p:spPr>
-          <a:xfrm>
-            <a:off x="365760" y="4626864"/>
-            <a:ext cx="384048" cy="384048"/>
-          </a:xfrm>
-          <a:prstGeom prst="rect">
-            <a:avLst/>
-          </a:prstGeom>
-          <a:noFill/>
-          <a:ln/>
-        </p:spPr>
-        <p:txBody>
-          <a:bodyPr wrap="square" lIns="0" tIns="0" rIns="0" bIns="0" rtlCol="0" anchor="ctr"/>
-          <a:lstStyle/>
-          <a:p>
-            <a:pPr algn="ctr" indent="0" marL="0">
-              <a:buNone/>
-            </a:pPr>
-            <a:r>
-              <a:rPr lang="en-US" sz="1000" b="1" dirty="0">
-                <a:solidFill>
-                  <a:srgbClr val="B08D57"/>
-                </a:solidFill>
-                <a:latin typeface="Cambria" pitchFamily="34" charset="0"/>
-                <a:ea typeface="Cambria" pitchFamily="34" charset="-122"/>
-                <a:cs typeface="Cambria" pitchFamily="34" charset="-120"/>
-              </a:rPr>
-              <a:t>RK</a:t>
-            </a:r>
-            <a:endParaRPr lang="en-US" sz="1000" dirty="0"/>
-          </a:p>
-        </p:txBody>
-      </p:sp>
-      <p:sp>
-        <p:nvSpPr>
-          <p:cNvPr id="4" name="Text 2"/>
-          <p:cNvSpPr/>
-          <p:nvPr/>
-        </p:nvSpPr>
-        <p:spPr>
-          <a:xfrm>
-            <a:off x="822960" y="4626864"/>
-            <a:ext cx="5120640" cy="384048"/>
-          </a:xfrm>
-          <a:prstGeom prst="rect">
-            <a:avLst/>
-          </a:prstGeom>
-          <a:noFill/>
-          <a:ln/>
-        </p:spPr>
-        <p:txBody>
-          <a:bodyPr wrap="square" lIns="0" tIns="0" rIns="0" bIns="0" rtlCol="0" anchor="ctr"/>
-          <a:lstStyle/>
-          <a:p>
-            <a:pPr algn="l" indent="0" marL="0">
-              <a:buNone/>
-            </a:pPr>
-            <a:r>
-              <a:rPr lang="en-US" sz="900" dirty="0">
-                <a:solidFill>
-                  <a:srgbClr val="D8C39A"/>
-                </a:solidFill>
-              </a:rPr>
-              <a:t>Rashid Alkaitoob Advocates &amp; Legal Consultants</a:t>
-            </a:r>
-            <a:endParaRPr lang="en-US" sz="900" dirty="0"/>
-          </a:p>
-        </p:txBody>
-      </p:sp>
+      <p:pic>
+        <p:nvPicPr>
+          <p:cNvPr id="2" name="Image 0" descr="/tmp/claude-0/-home-user-aa/b81485da-2e22-5d10-878f-01904e6d5dc6/scratchpad/rk/logo_dark.png">    </p:cNvPr>
+          <p:cNvPicPr>
+            <a:picLocks noChangeAspect="1"/>
+          </p:cNvPicPr>
+          <p:nvPr/>
+        </p:nvPicPr>
+        <p:blipFill>
+          <a:blip r:embed="rId1"/>
+          <a:stretch>
+            <a:fillRect/>
+          </a:stretch>
+        </p:blipFill>
+        <p:spPr>
+          <a:xfrm>
+            <a:off x="365760" y="4681728"/>
+            <a:ext cx="1675417" cy="274320"/>
+          </a:xfrm>
+          <a:prstGeom prst="rect">
+            <a:avLst/>
+          </a:prstGeom>
+        </p:spPr>
+      </p:pic>
       <p:sp>
         <p:nvSpPr>
           <p:cNvPr id="25" name="Slide Number Placeholder 0"/>
@@ -3196,7 +3120,7 @@
             <a:lvl1pPr>
               <a:defRPr sz="900">
                 <a:solidFill>
-                  <a:srgbClr val="D8C39A"/>
+                  <a:srgbClr val="D9B38C"/>
                 </a:solidFill>
               </a:defRPr>
             </a:lvl1pPr>
@@ -3243,118 +3167,42 @@
           <a:chExt cx="0" cy="0"/>
         </a:xfrm>
       </p:grpSpPr>
-      <p:sp>
-        <p:nvSpPr>
-          <p:cNvPr id="2" name="Shape 0"/>
-          <p:cNvSpPr/>
-          <p:nvPr/>
-        </p:nvSpPr>
-        <p:spPr>
-          <a:xfrm>
-            <a:off x="365760" y="4626864"/>
-            <a:ext cx="384048" cy="384048"/>
-          </a:xfrm>
-          <a:prstGeom prst="rect">
-            <a:avLst/>
-          </a:prstGeom>
-          <a:solidFill>
-            <a:srgbClr val="FFFFFF"/>
-          </a:solidFill>
-          <a:ln w="9525">
-            <a:solidFill>
-              <a:srgbClr val="B08D57"/>
-            </a:solidFill>
-            <a:prstDash val="solid"/>
-          </a:ln>
-        </p:spPr>
-      </p:sp>
-      <p:sp>
-        <p:nvSpPr>
-          <p:cNvPr id="3" name="Text 1"/>
-          <p:cNvSpPr/>
-          <p:nvPr/>
-        </p:nvSpPr>
-        <p:spPr>
-          <a:xfrm>
-            <a:off x="365760" y="4626864"/>
-            <a:ext cx="384048" cy="384048"/>
-          </a:xfrm>
-          <a:prstGeom prst="rect">
-            <a:avLst/>
-          </a:prstGeom>
-          <a:noFill/>
-          <a:ln/>
-        </p:spPr>
-        <p:txBody>
-          <a:bodyPr wrap="square" lIns="0" tIns="0" rIns="0" bIns="0" rtlCol="0" anchor="ctr"/>
-          <a:lstStyle/>
-          <a:p>
-            <a:pPr algn="ctr" indent="0" marL="0">
-              <a:buNone/>
-            </a:pPr>
-            <a:r>
-              <a:rPr lang="en-US" sz="1000" b="1" dirty="0">
-                <a:solidFill>
-                  <a:srgbClr val="B08D57"/>
-                </a:solidFill>
-                <a:latin typeface="Cambria" pitchFamily="34" charset="0"/>
-                <a:ea typeface="Cambria" pitchFamily="34" charset="-122"/>
-                <a:cs typeface="Cambria" pitchFamily="34" charset="-120"/>
-              </a:rPr>
-              <a:t>RK</a:t>
-            </a:r>
-            <a:endParaRPr lang="en-US" sz="1000" dirty="0"/>
-          </a:p>
-        </p:txBody>
-      </p:sp>
-      <p:sp>
-        <p:nvSpPr>
-          <p:cNvPr id="4" name="Text 2"/>
-          <p:cNvSpPr/>
-          <p:nvPr/>
-        </p:nvSpPr>
-        <p:spPr>
-          <a:xfrm>
-            <a:off x="822960" y="4626864"/>
-            <a:ext cx="5120640" cy="384048"/>
-          </a:xfrm>
-          <a:prstGeom prst="rect">
-            <a:avLst/>
-          </a:prstGeom>
-          <a:noFill/>
-          <a:ln/>
-        </p:spPr>
-        <p:txBody>
-          <a:bodyPr wrap="square" lIns="0" tIns="0" rIns="0" bIns="0" rtlCol="0" anchor="ctr"/>
-          <a:lstStyle/>
-          <a:p>
-            <a:pPr algn="l" indent="0" marL="0">
-              <a:buNone/>
-            </a:pPr>
-            <a:r>
-              <a:rPr lang="en-US" sz="900" dirty="0">
-                <a:solidFill>
-                  <a:srgbClr val="6B6F76"/>
-                </a:solidFill>
-              </a:rPr>
-              <a:t>Rashid Alkaitoob Advocates &amp; Legal Consultants</a:t>
-            </a:r>
-            <a:endParaRPr lang="en-US" sz="900" dirty="0"/>
-          </a:p>
-        </p:txBody>
-      </p:sp>
-      <p:sp>
-        <p:nvSpPr>
-          <p:cNvPr id="5" name="Text 3"/>
+      <p:pic>
+        <p:nvPicPr>
+          <p:cNvPr id="2" name="Image 0" descr="/tmp/claude-0/-home-user-aa/b81485da-2e22-5d10-878f-01904e6d5dc6/scratchpad/rk/logo_light.png">    </p:cNvPr>
+          <p:cNvPicPr>
+            <a:picLocks noChangeAspect="1"/>
+          </p:cNvPicPr>
+          <p:nvPr/>
+        </p:nvPicPr>
+        <p:blipFill>
+          <a:blip r:embed="rId1"/>
+          <a:stretch>
+            <a:fillRect/>
+          </a:stretch>
+        </p:blipFill>
+        <p:spPr>
+          <a:xfrm>
+            <a:off x="365760" y="4681728"/>
+            <a:ext cx="1675417" cy="274320"/>
+          </a:xfrm>
+          <a:prstGeom prst="rect">
+            <a:avLst/>
+          </a:prstGeom>
+        </p:spPr>
+      </p:pic>
+      <p:sp>
+        <p:nvSpPr>
+          <p:cNvPr id="3" name="Text 0"/>
           <p:cNvSpPr/>
           <p:nvPr>
-            <p:ph idx="103" type="title" hasCustomPrompt="1"/>
+            <p:ph idx="101" type="title" hasCustomPrompt="1"/>
           </p:nvPr>
         </p:nvSpPr>
         <p:spPr>
           <a:xfrm>
-            <a:off x="457200" y="347472"/>
-            <a:ext cx="8229600" cy="685800"/>
+            <a:off x="457200" y="420624"/>
+            <a:ext cx="8229600" cy="731520"/>
           </a:xfrm>
           <a:prstGeom prst="rect">
             <a:avLst/>
@@ -3369,7 +3217,7 @@
               <a:buNone/>
               <a:defRPr lang="en-US" sz="2600" b="1" dirty="0">
                 <a:solidFill>
-                  <a:srgbClr val="0B0B0B"/>
+                  <a:srgbClr val="0E2238"/>
                 </a:solidFill>
               </a:defRPr>
             </a:lvl1pPr>
@@ -3412,7 +3260,7 @@
             <a:lvl1pPr>
               <a:defRPr sz="900">
                 <a:solidFill>
-                  <a:srgbClr val="6B6F76"/>
+                  <a:srgbClr val="6E7B88"/>
                 </a:solidFill>
               </a:defRPr>
             </a:lvl1pPr>
@@ -3441,7 +3289,7 @@
     <p:bg>
       <p:bgPr>
         <a:solidFill>
-          <a:srgbClr val="0B0B0B"/>
+          <a:srgbClr val="0E2238"/>
         </a:solidFill>
       </p:bgPr>
     </p:bg>
@@ -3514,7 +3362,7 @@
             <a:lvl1pPr>
               <a:defRPr sz="900">
                 <a:solidFill>
-                  <a:srgbClr val="D8C39A"/>
+                  <a:srgbClr val="D9B38C"/>
                 </a:solidFill>
               </a:defRPr>
             </a:lvl1pPr>
@@ -3825,47 +3673,46 @@
           </a:prstGeom>
           <a:ln w="9525">
             <a:solidFill>
-              <a:srgbClr val="B08D57"/>
+              <a:srgbClr val="B5723B"/>
             </a:solidFill>
             <a:prstDash val="solid"/>
           </a:ln>
         </p:spPr>
       </p:sp>
-      <p:sp>
-        <p:nvSpPr>
-          <p:cNvPr id="3" name="Shape 1"/>
-          <p:cNvSpPr/>
-          <p:nvPr/>
-        </p:nvSpPr>
+      <p:pic>
+        <p:nvPicPr>
+          <p:cNvPr id="3" name="Image 0" descr="/tmp/claude-0/-home-user-aa/b81485da-2e22-5d10-878f-01904e6d5dc6/scratchpad/rk/logo_dark.png">    </p:cNvPr>
+          <p:cNvPicPr>
+            <a:picLocks noChangeAspect="1"/>
+          </p:cNvPicPr>
+          <p:nvPr/>
+        </p:nvPicPr>
+        <p:blipFill>
+          <a:blip r:embed="rId1"/>
+          <a:stretch>
+            <a:fillRect/>
+          </a:stretch>
+        </p:blipFill>
         <p:spPr>
           <a:xfrm>
             <a:off x="868680" y="868680"/>
-            <a:ext cx="822960" cy="822960"/>
-          </a:xfrm>
-          <a:prstGeom prst="rect">
-            <a:avLst/>
-          </a:prstGeom>
-          <a:solidFill>
-            <a:srgbClr val="0B0B0B"/>
-          </a:solidFill>
-          <a:ln w="12700">
-            <a:solidFill>
-              <a:srgbClr val="B08D57"/>
-            </a:solidFill>
-            <a:prstDash val="solid"/>
-          </a:ln>
-        </p:spPr>
-      </p:sp>
-      <p:sp>
-        <p:nvSpPr>
-          <p:cNvPr id="4" name="Text 2"/>
+            <a:ext cx="4021000" cy="658368"/>
+          </a:xfrm>
+          <a:prstGeom prst="rect">
+            <a:avLst/>
+          </a:prstGeom>
+        </p:spPr>
+      </p:pic>
+      <p:sp>
+        <p:nvSpPr>
+          <p:cNvPr id="4" name="Text 1"/>
           <p:cNvSpPr txBox="1"/>
           <p:nvPr/>
         </p:nvSpPr>
         <p:spPr>
           <a:xfrm>
-            <a:off x="868680" y="868680"/>
-            <a:ext cx="822960" cy="822960"/>
+            <a:off x="868680" y="1965960"/>
+            <a:ext cx="7406640" cy="1371600"/>
           </a:xfrm>
           <a:prstGeom prst="rect">
             <a:avLst/>
@@ -3877,93 +3724,18 @@
           <a:bodyPr wrap="square" lIns="0" tIns="0" rIns="0" bIns="0" rtlCol="0" anchor="ctr"/>
           <a:lstStyle/>
           <a:p>
-            <a:pPr algn="ctr" indent="0" marL="0">
-              <a:buNone/>
-            </a:pPr>
-            <a:r>
-              <a:rPr lang="en-US" sz="2400" b="1" dirty="0">
-                <a:solidFill>
-                  <a:schemeClr val="accent1"/>
+            <a:pPr algn="l" indent="0" marL="0">
+              <a:buNone/>
+            </a:pPr>
+            <a:r>
+              <a:rPr lang="en-US" altLang="en-US" sz="3000" b="1" dirty="0">
+                <a:solidFill>
+                  <a:schemeClr val="bg1"/>
                 </a:solidFill>
                 <a:latin typeface="Cambria" pitchFamily="34" charset="0"/>
                 <a:ea typeface="Cambria" pitchFamily="34" charset="-122"/>
                 <a:cs typeface="Cambria" pitchFamily="34" charset="-120"/>
               </a:rPr>
-              <a:t>RK</a:t>
-            </a:r>
-            <a:endParaRPr lang="en-US" sz="2400" dirty="0"/>
-          </a:p>
-        </p:txBody>
-      </p:sp>
-      <p:sp>
-        <p:nvSpPr>
-          <p:cNvPr id="5" name="Text 3"/>
-          <p:cNvSpPr txBox="1"/>
-          <p:nvPr/>
-        </p:nvSpPr>
-        <p:spPr>
-          <a:xfrm>
-            <a:off x="1874520" y="868680"/>
-            <a:ext cx="5943600" cy="822960"/>
-          </a:xfrm>
-          <a:prstGeom prst="rect">
-            <a:avLst/>
-          </a:prstGeom>
-          <a:noFill/>
-          <a:ln/>
-        </p:spPr>
-        <p:txBody>
-          <a:bodyPr wrap="square" lIns="0" tIns="0" rIns="0" bIns="0" rtlCol="0" anchor="ctr"/>
-          <a:lstStyle/>
-          <a:p>
-            <a:pPr algn="l" indent="0" marL="0">
-              <a:buNone/>
-            </a:pPr>
-            <a:r>
-              <a:rPr lang="en-US" altLang="en-US" sz="1200" dirty="0">
-                <a:solidFill>
-                  <a:schemeClr val="accent2"/>
-                </a:solidFill>
-              </a:rPr>
-              <a:t>Rashid Alkaitoob Advocates &amp; Legal Consultants</a:t>
-            </a:r>
-            <a:endParaRPr lang="en-US" sz="1200" dirty="0"/>
-          </a:p>
-        </p:txBody>
-      </p:sp>
-      <p:sp>
-        <p:nvSpPr>
-          <p:cNvPr id="6" name="Text 4"/>
-          <p:cNvSpPr txBox="1"/>
-          <p:nvPr/>
-        </p:nvSpPr>
-        <p:spPr>
-          <a:xfrm>
-            <a:off x="868680" y="1965960"/>
-            <a:ext cx="7406640" cy="1371600"/>
-          </a:xfrm>
-          <a:prstGeom prst="rect">
-            <a:avLst/>
-          </a:prstGeom>
-          <a:noFill/>
-          <a:ln/>
-        </p:spPr>
-        <p:txBody>
-          <a:bodyPr wrap="square" lIns="0" tIns="0" rIns="0" bIns="0" rtlCol="0" anchor="ctr"/>
-          <a:lstStyle/>
-          <a:p>
-            <a:pPr algn="l" indent="0" marL="0">
-              <a:buNone/>
-            </a:pPr>
-            <a:r>
-              <a:rPr lang="en-US" altLang="en-US" sz="3000" b="1" dirty="0">
-                <a:solidFill>
-                  <a:schemeClr val="bg1"/>
-                </a:solidFill>
-                <a:latin typeface="Cambria" pitchFamily="34" charset="0"/>
-                <a:ea typeface="Cambria" pitchFamily="34" charset="-122"/>
-                <a:cs typeface="Cambria" pitchFamily="34" charset="-120"/>
-              </a:rPr>
               <a:t>Investor Legal Protection Program</a:t>
             </a:r>
             <a:endParaRPr lang="en-US" sz="3000" dirty="0"/>
@@ -3972,7 +3744,7 @@
       </p:sp>
       <p:sp>
         <p:nvSpPr>
-          <p:cNvPr id="7" name="Text 5"/>
+          <p:cNvPr id="5" name="Text 2"/>
           <p:cNvSpPr txBox="1"/>
           <p:nvPr/>
         </p:nvSpPr>
@@ -4008,7 +3780,7 @@
       </p:sp>
       <p:sp>
         <p:nvSpPr>
-          <p:cNvPr id="8" name="Text 6"/>
+          <p:cNvPr id="6" name="Text 3"/>
           <p:cNvSpPr txBox="1"/>
           <p:nvPr/>
         </p:nvSpPr>
@@ -4072,7 +3844,7 @@
             <a:lvl1pPr>
               <a:defRPr sz="900">
                 <a:solidFill>
-                  <a:srgbClr val="D8C39A"/>
+                  <a:srgbClr val="D9B38C"/>
                 </a:solidFill>
               </a:defRPr>
             </a:lvl1pPr>
@@ -4114,16 +3886,14 @@
       </p:grpSpPr>
       <p:sp>
         <p:nvSpPr>
-          <p:cNvPr id="2" name="Text 3"/>
-          <p:cNvSpPr/>
-          <p:nvPr>
-            <p:ph idx="103" type="title" hasCustomPrompt="1"/>
-          </p:nvPr>
-        </p:nvSpPr>
-        <p:spPr>
-          <a:xfrm>
-            <a:off x="457200" y="347472"/>
-            <a:ext cx="8229600" cy="685800"/>
+          <p:cNvPr id="2" name="Text 0"/>
+          <p:cNvSpPr txBox="1"/>
+          <p:nvPr/>
+        </p:nvSpPr>
+        <p:spPr>
+          <a:xfrm>
+            <a:off x="457200" y="402336"/>
+            <a:ext cx="8229600" cy="749808"/>
           </a:xfrm>
           <a:prstGeom prst="rect">
             <a:avLst/>
@@ -4132,17 +3902,20 @@
           <a:ln/>
         </p:spPr>
         <p:txBody>
-          <a:bodyPr wrap="square" lIns="0" tIns="0" rIns="0" bIns="0" rtlCol="0" anchor="ctr"/>
-          <a:lstStyle/>
-          <a:p>
-            <a:pPr algn="l" indent="0" marL="0">
-              <a:buNone/>
-            </a:pPr>
-            <a:r>
-              <a:rPr lang="en-US" sz="2600" b="1" dirty="0">
-                <a:solidFill>
-                  <a:srgbClr val="0B0B0B"/>
-                </a:solidFill>
+          <a:bodyPr wrap="square" lIns="0" tIns="0" rIns="0" bIns="0" rtlCol="0" anchor="t"/>
+          <a:lstStyle/>
+          <a:p>
+            <a:pPr algn="l" indent="0" marL="0">
+              <a:buNone/>
+            </a:pPr>
+            <a:r>
+              <a:rPr lang="en-US" altLang="en-US" sz="2600" b="1" dirty="0">
+                <a:solidFill>
+                  <a:schemeClr val="tx1"/>
+                </a:solidFill>
+                <a:latin typeface="Cambria" pitchFamily="34" charset="0"/>
+                <a:ea typeface="Cambria" pitchFamily="34" charset="-122"/>
+                <a:cs typeface="Cambria" pitchFamily="34" charset="-120"/>
               </a:rPr>
               <a:t>A concierge-level legal service</a:t>
             </a:r>
@@ -4201,11 +3974,11 @@
             <a:avLst/>
           </a:prstGeom>
           <a:solidFill>
-            <a:srgbClr val="F4F1EA"/>
+            <a:srgbClr val="F4F1EB"/>
           </a:solidFill>
           <a:ln w="12700">
             <a:solidFill>
-              <a:srgbClr val="F4F1EA"/>
+              <a:srgbClr val="F4F1EB"/>
             </a:solidFill>
             <a:prstDash val="solid"/>
           </a:ln>
@@ -4306,11 +4079,11 @@
             <a:avLst/>
           </a:prstGeom>
           <a:solidFill>
-            <a:srgbClr val="F4F1EA"/>
+            <a:srgbClr val="F4F1EB"/>
           </a:solidFill>
           <a:ln w="12700">
             <a:solidFill>
-              <a:srgbClr val="F4F1EA"/>
+              <a:srgbClr val="F4F1EB"/>
             </a:solidFill>
             <a:prstDash val="solid"/>
           </a:ln>
@@ -4411,11 +4184,11 @@
             <a:avLst/>
           </a:prstGeom>
           <a:solidFill>
-            <a:srgbClr val="F4F1EA"/>
+            <a:srgbClr val="F4F1EB"/>
           </a:solidFill>
           <a:ln w="12700">
             <a:solidFill>
-              <a:srgbClr val="F4F1EA"/>
+              <a:srgbClr val="F4F1EB"/>
             </a:solidFill>
             <a:prstDash val="solid"/>
           </a:ln>
@@ -4516,11 +4289,11 @@
             <a:avLst/>
           </a:prstGeom>
           <a:solidFill>
-            <a:srgbClr val="F4F1EA"/>
+            <a:srgbClr val="F4F1EB"/>
           </a:solidFill>
           <a:ln w="12700">
             <a:solidFill>
-              <a:srgbClr val="F4F1EA"/>
+              <a:srgbClr val="F4F1EB"/>
             </a:solidFill>
             <a:prstDash val="solid"/>
           </a:ln>
@@ -4621,11 +4394,11 @@
             <a:avLst/>
           </a:prstGeom>
           <a:solidFill>
-            <a:srgbClr val="F4F1EA"/>
+            <a:srgbClr val="F4F1EB"/>
           </a:solidFill>
           <a:ln w="12700">
             <a:solidFill>
-              <a:srgbClr val="F4F1EA"/>
+              <a:srgbClr val="F4F1EB"/>
             </a:solidFill>
             <a:prstDash val="solid"/>
           </a:ln>
@@ -4713,6 +4486,36 @@
       </p:sp>
       <p:sp>
         <p:nvSpPr>
+          <p:cNvPr id="19" name="Text 0"/>
+          <p:cNvSpPr/>
+          <p:nvPr>
+            <p:ph idx="101" type="title" hasCustomPrompt="1"/>
+          </p:nvPr>
+        </p:nvSpPr>
+        <p:spPr>
+          <a:xfrm>
+            <a:off x="457200" y="420624"/>
+            <a:ext cx="8229600" cy="731520"/>
+          </a:xfrm>
+          <a:prstGeom prst="rect">
+            <a:avLst/>
+          </a:prstGeom>
+          <a:noFill/>
+          <a:ln/>
+        </p:spPr>
+        <p:txBody>
+          <a:bodyPr wrap="square" lIns="0" tIns="0" rIns="0" bIns="0" rtlCol="0" anchor="t"/>
+          <a:lstStyle/>
+          <a:p>
+            <a:pPr algn="l" indent="0" marL="0">
+              <a:buNone/>
+            </a:pPr>
+            <a:endParaRPr lang="en-US" sz="2600" dirty="0"/>
+          </a:p>
+        </p:txBody>
+      </p:sp>
+      <p:sp>
+        <p:nvSpPr>
           <p:cNvPr id="25" name="Slide Number Placeholder 0"/>
           <p:cNvSpPr>
             <a:spLocks noGrp="1"/>
@@ -4741,7 +4544,7 @@
             <a:lvl1pPr>
               <a:defRPr sz="900">
                 <a:solidFill>
-                  <a:srgbClr val="6B6F76"/>
+                  <a:srgbClr val="6E7B88"/>
                 </a:solidFill>
               </a:defRPr>
             </a:lvl1pPr>
@@ -4828,8 +4631,8 @@
         </p:nvSpPr>
         <p:spPr>
           <a:xfrm>
-            <a:off x="457200" y="2834640"/>
-            <a:ext cx="7772400" cy="731520"/>
+            <a:off x="457200" y="2743200"/>
+            <a:ext cx="7772400" cy="868680"/>
           </a:xfrm>
           <a:prstGeom prst="rect">
             <a:avLst/>
@@ -4838,7 +4641,7 @@
           <a:ln/>
         </p:spPr>
         <p:txBody>
-          <a:bodyPr wrap="square" lIns="0" tIns="0" rIns="0" bIns="0" rtlCol="0" anchor="t"/>
+          <a:bodyPr wrap="square" lIns="0" tIns="0" rIns="0" bIns="0" rtlCol="0" anchor="b"/>
           <a:lstStyle/>
           <a:p>
             <a:pPr algn="l" indent="0" marL="0">
@@ -4867,8 +4670,8 @@
         </p:nvSpPr>
         <p:spPr>
           <a:xfrm>
-            <a:off x="457200" y="3566160"/>
-            <a:ext cx="7772400" cy="548640"/>
+            <a:off x="457200" y="3675888"/>
+            <a:ext cx="7772400" cy="502920"/>
           </a:xfrm>
           <a:prstGeom prst="rect">
             <a:avLst/>
@@ -4877,7 +4680,7 @@
           <a:ln/>
         </p:spPr>
         <p:txBody>
-          <a:bodyPr wrap="square" lIns="0" tIns="0" rIns="0" bIns="0" rtlCol="0" anchor="ctr"/>
+          <a:bodyPr wrap="square" lIns="0" tIns="0" rIns="0" bIns="0" rtlCol="0" anchor="t"/>
           <a:lstStyle/>
           <a:p>
             <a:pPr algn="l" indent="0" marL="0">
@@ -4925,7 +4728,7 @@
             <a:lvl1pPr>
               <a:defRPr sz="900">
                 <a:solidFill>
-                  <a:srgbClr val="D8C39A"/>
+                  <a:srgbClr val="D9B38C"/>
                 </a:solidFill>
               </a:defRPr>
             </a:lvl1pPr>
@@ -4967,16 +4770,14 @@
       </p:grpSpPr>
       <p:sp>
         <p:nvSpPr>
-          <p:cNvPr id="2" name="Text 3"/>
-          <p:cNvSpPr/>
-          <p:nvPr>
-            <p:ph idx="103" type="title" hasCustomPrompt="1"/>
-          </p:nvPr>
-        </p:nvSpPr>
-        <p:spPr>
-          <a:xfrm>
-            <a:off x="457200" y="347472"/>
-            <a:ext cx="8229600" cy="685800"/>
+          <p:cNvPr id="2" name="Text 0"/>
+          <p:cNvSpPr txBox="1"/>
+          <p:nvPr/>
+        </p:nvSpPr>
+        <p:spPr>
+          <a:xfrm>
+            <a:off x="457200" y="402336"/>
+            <a:ext cx="8229600" cy="749808"/>
           </a:xfrm>
           <a:prstGeom prst="rect">
             <a:avLst/>
@@ -4985,17 +4786,20 @@
           <a:ln/>
         </p:spPr>
         <p:txBody>
-          <a:bodyPr wrap="square" lIns="0" tIns="0" rIns="0" bIns="0" rtlCol="0" anchor="ctr"/>
-          <a:lstStyle/>
-          <a:p>
-            <a:pPr algn="l" indent="0" marL="0">
-              <a:buNone/>
-            </a:pPr>
-            <a:r>
-              <a:rPr lang="en-US" sz="2600" b="1" dirty="0">
-                <a:solidFill>
-                  <a:srgbClr val="0B0B0B"/>
-                </a:solidFill>
+          <a:bodyPr wrap="square" lIns="0" tIns="0" rIns="0" bIns="0" rtlCol="0" anchor="t"/>
+          <a:lstStyle/>
+          <a:p>
+            <a:pPr algn="l" indent="0" marL="0">
+              <a:buNone/>
+            </a:pPr>
+            <a:r>
+              <a:rPr lang="en-US" altLang="en-US" sz="2600" b="1" dirty="0">
+                <a:solidFill>
+                  <a:schemeClr val="tx1"/>
+                </a:solidFill>
+                <a:latin typeface="Cambria" pitchFamily="34" charset="0"/>
+                <a:ea typeface="Cambria" pitchFamily="34" charset="-122"/>
+                <a:cs typeface="Cambria" pitchFamily="34" charset="-120"/>
               </a:rPr>
               <a:t>Division of roles</a:t>
             </a:r>
@@ -5054,11 +4858,11 @@
             <a:avLst/>
           </a:prstGeom>
           <a:solidFill>
-            <a:srgbClr val="0B0B0B"/>
+            <a:srgbClr val="0E2238"/>
           </a:solidFill>
           <a:ln w="12700">
             <a:solidFill>
-              <a:srgbClr val="0B0B0B"/>
+              <a:srgbClr val="0E2238"/>
             </a:solidFill>
             <a:prstDash val="solid"/>
           </a:ln>
@@ -5115,11 +4919,11 @@
             <a:avLst/>
           </a:prstGeom>
           <a:solidFill>
-            <a:srgbClr val="F4F1EA"/>
+            <a:srgbClr val="F4F1EB"/>
           </a:solidFill>
           <a:ln w="12700">
             <a:solidFill>
-              <a:srgbClr val="F4F1EA"/>
+              <a:srgbClr val="F4F1EB"/>
             </a:solidFill>
             <a:prstDash val="solid"/>
           </a:ln>
@@ -5252,11 +5056,11 @@
             <a:avLst/>
           </a:prstGeom>
           <a:solidFill>
-            <a:srgbClr val="B08D57"/>
+            <a:srgbClr val="B5723B"/>
           </a:solidFill>
           <a:ln w="12700">
             <a:solidFill>
-              <a:srgbClr val="B08D57"/>
+              <a:srgbClr val="B5723B"/>
             </a:solidFill>
             <a:prstDash val="solid"/>
           </a:ln>
@@ -5313,11 +5117,11 @@
             <a:avLst/>
           </a:prstGeom>
           <a:solidFill>
-            <a:srgbClr val="F4F1EA"/>
+            <a:srgbClr val="F4F1EB"/>
           </a:solidFill>
           <a:ln w="12700">
             <a:solidFill>
-              <a:srgbClr val="F4F1EA"/>
+              <a:srgbClr val="F4F1EB"/>
             </a:solidFill>
             <a:prstDash val="solid"/>
           </a:ln>
@@ -5432,6 +5236,36 @@
               <a:t>Shields the partner from any legal liability</a:t>
             </a:r>
             <a:endParaRPr lang="en-US" sz="1100" dirty="0"/>
+          </a:p>
+        </p:txBody>
+      </p:sp>
+      <p:sp>
+        <p:nvSpPr>
+          <p:cNvPr id="12" name="Text 0"/>
+          <p:cNvSpPr/>
+          <p:nvPr>
+            <p:ph idx="101" type="title" hasCustomPrompt="1"/>
+          </p:nvPr>
+        </p:nvSpPr>
+        <p:spPr>
+          <a:xfrm>
+            <a:off x="457200" y="420624"/>
+            <a:ext cx="8229600" cy="731520"/>
+          </a:xfrm>
+          <a:prstGeom prst="rect">
+            <a:avLst/>
+          </a:prstGeom>
+          <a:noFill/>
+          <a:ln/>
+        </p:spPr>
+        <p:txBody>
+          <a:bodyPr wrap="square" lIns="0" tIns="0" rIns="0" bIns="0" rtlCol="0" anchor="t"/>
+          <a:lstStyle/>
+          <a:p>
+            <a:pPr algn="l" indent="0" marL="0">
+              <a:buNone/>
+            </a:pPr>
+            <a:endParaRPr lang="en-US" sz="2600" dirty="0"/>
           </a:p>
         </p:txBody>
       </p:sp>
@@ -5465,7 +5299,7 @@
             <a:lvl1pPr>
               <a:defRPr sz="900">
                 <a:solidFill>
-                  <a:srgbClr val="6B6F76"/>
+                  <a:srgbClr val="6E7B88"/>
                 </a:solidFill>
               </a:defRPr>
             </a:lvl1pPr>
@@ -5507,16 +5341,14 @@
       </p:grpSpPr>
       <p:sp>
         <p:nvSpPr>
-          <p:cNvPr id="2" name="Text 3"/>
-          <p:cNvSpPr/>
-          <p:nvPr>
-            <p:ph idx="103" type="title" hasCustomPrompt="1"/>
-          </p:nvPr>
-        </p:nvSpPr>
-        <p:spPr>
-          <a:xfrm>
-            <a:off x="457200" y="347472"/>
-            <a:ext cx="8229600" cy="685800"/>
+          <p:cNvPr id="2" name="Text 0"/>
+          <p:cNvSpPr txBox="1"/>
+          <p:nvPr/>
+        </p:nvSpPr>
+        <p:spPr>
+          <a:xfrm>
+            <a:off x="457200" y="402336"/>
+            <a:ext cx="8229600" cy="749808"/>
           </a:xfrm>
           <a:prstGeom prst="rect">
             <a:avLst/>
@@ -5525,17 +5357,20 @@
           <a:ln/>
         </p:spPr>
         <p:txBody>
-          <a:bodyPr wrap="square" lIns="0" tIns="0" rIns="0" bIns="0" rtlCol="0" anchor="ctr"/>
-          <a:lstStyle/>
-          <a:p>
-            <a:pPr algn="l" indent="0" marL="0">
-              <a:buNone/>
-            </a:pPr>
-            <a:r>
-              <a:rPr lang="en-US" sz="2600" b="1" dirty="0">
-                <a:solidFill>
-                  <a:srgbClr val="0B0B0B"/>
-                </a:solidFill>
+          <a:bodyPr wrap="square" lIns="0" tIns="0" rIns="0" bIns="0" rtlCol="0" anchor="t"/>
+          <a:lstStyle/>
+          <a:p>
+            <a:pPr algn="l" indent="0" marL="0">
+              <a:buNone/>
+            </a:pPr>
+            <a:r>
+              <a:rPr lang="en-US" altLang="en-US" sz="2600" b="1" dirty="0">
+                <a:solidFill>
+                  <a:schemeClr val="tx1"/>
+                </a:solidFill>
+                <a:latin typeface="Cambria" pitchFamily="34" charset="0"/>
+                <a:ea typeface="Cambria" pitchFamily="34" charset="-122"/>
+                <a:cs typeface="Cambria" pitchFamily="34" charset="-120"/>
               </a:rPr>
               <a:t>The referral and cooperation agreement</a:t>
             </a:r>
@@ -5594,11 +5429,11 @@
             <a:avLst/>
           </a:prstGeom>
           <a:solidFill>
-            <a:srgbClr val="F4F1EA"/>
+            <a:srgbClr val="F4F1EB"/>
           </a:solidFill>
           <a:ln w="12700">
             <a:solidFill>
-              <a:srgbClr val="F4F1EA"/>
+              <a:srgbClr val="F4F1EB"/>
             </a:solidFill>
             <a:prstDash val="solid"/>
           </a:ln>
@@ -5699,11 +5534,11 @@
             <a:avLst/>
           </a:prstGeom>
           <a:solidFill>
-            <a:srgbClr val="F4F1EA"/>
+            <a:srgbClr val="F4F1EB"/>
           </a:solidFill>
           <a:ln w="12700">
             <a:solidFill>
-              <a:srgbClr val="F4F1EA"/>
+              <a:srgbClr val="F4F1EB"/>
             </a:solidFill>
             <a:prstDash val="solid"/>
           </a:ln>
@@ -5804,11 +5639,11 @@
             <a:avLst/>
           </a:prstGeom>
           <a:solidFill>
-            <a:srgbClr val="F4F1EA"/>
+            <a:srgbClr val="F4F1EB"/>
           </a:solidFill>
           <a:ln w="12700">
             <a:solidFill>
-              <a:srgbClr val="F4F1EA"/>
+              <a:srgbClr val="F4F1EB"/>
             </a:solidFill>
             <a:prstDash val="solid"/>
           </a:ln>
@@ -5909,11 +5744,11 @@
             <a:avLst/>
           </a:prstGeom>
           <a:solidFill>
-            <a:srgbClr val="F4F1EA"/>
+            <a:srgbClr val="F4F1EB"/>
           </a:solidFill>
           <a:ln w="12700">
             <a:solidFill>
-              <a:srgbClr val="F4F1EA"/>
+              <a:srgbClr val="F4F1EB"/>
             </a:solidFill>
             <a:prstDash val="solid"/>
           </a:ln>
@@ -6014,11 +5849,11 @@
             <a:avLst/>
           </a:prstGeom>
           <a:solidFill>
-            <a:srgbClr val="F4F1EA"/>
+            <a:srgbClr val="F4F1EB"/>
           </a:solidFill>
           <a:ln w="12700">
             <a:solidFill>
-              <a:srgbClr val="F4F1EA"/>
+              <a:srgbClr val="F4F1EB"/>
             </a:solidFill>
             <a:prstDash val="solid"/>
           </a:ln>
@@ -6106,6 +5941,36 @@
       </p:sp>
       <p:sp>
         <p:nvSpPr>
+          <p:cNvPr id="19" name="Text 0"/>
+          <p:cNvSpPr/>
+          <p:nvPr>
+            <p:ph idx="101" type="title" hasCustomPrompt="1"/>
+          </p:nvPr>
+        </p:nvSpPr>
+        <p:spPr>
+          <a:xfrm>
+            <a:off x="457200" y="420624"/>
+            <a:ext cx="8229600" cy="731520"/>
+          </a:xfrm>
+          <a:prstGeom prst="rect">
+            <a:avLst/>
+          </a:prstGeom>
+          <a:noFill/>
+          <a:ln/>
+        </p:spPr>
+        <p:txBody>
+          <a:bodyPr wrap="square" lIns="0" tIns="0" rIns="0" bIns="0" rtlCol="0" anchor="t"/>
+          <a:lstStyle/>
+          <a:p>
+            <a:pPr algn="l" indent="0" marL="0">
+              <a:buNone/>
+            </a:pPr>
+            <a:endParaRPr lang="en-US" sz="2600" dirty="0"/>
+          </a:p>
+        </p:txBody>
+      </p:sp>
+      <p:sp>
+        <p:nvSpPr>
           <p:cNvPr id="25" name="Slide Number Placeholder 0"/>
           <p:cNvSpPr>
             <a:spLocks noGrp="1"/>
@@ -6134,7 +5999,7 @@
             <a:lvl1pPr>
               <a:defRPr sz="900">
                 <a:solidFill>
-                  <a:srgbClr val="6B6F76"/>
+                  <a:srgbClr val="6E7B88"/>
                 </a:solidFill>
               </a:defRPr>
             </a:lvl1pPr>
@@ -6176,16 +6041,14 @@
       </p:grpSpPr>
       <p:sp>
         <p:nvSpPr>
-          <p:cNvPr id="2" name="Text 3"/>
-          <p:cNvSpPr/>
-          <p:nvPr>
-            <p:ph idx="103" type="title" hasCustomPrompt="1"/>
-          </p:nvPr>
-        </p:nvSpPr>
-        <p:spPr>
-          <a:xfrm>
-            <a:off x="457200" y="347472"/>
-            <a:ext cx="8229600" cy="685800"/>
+          <p:cNvPr id="2" name="Text 0"/>
+          <p:cNvSpPr txBox="1"/>
+          <p:nvPr/>
+        </p:nvSpPr>
+        <p:spPr>
+          <a:xfrm>
+            <a:off x="457200" y="402336"/>
+            <a:ext cx="8229600" cy="749808"/>
           </a:xfrm>
           <a:prstGeom prst="rect">
             <a:avLst/>
@@ -6194,17 +6057,20 @@
           <a:ln/>
         </p:spPr>
         <p:txBody>
-          <a:bodyPr wrap="square" lIns="0" tIns="0" rIns="0" bIns="0" rtlCol="0" anchor="ctr"/>
-          <a:lstStyle/>
-          <a:p>
-            <a:pPr algn="l" indent="0" marL="0">
-              <a:buNone/>
-            </a:pPr>
-            <a:r>
-              <a:rPr lang="en-US" sz="2600" b="1" dirty="0">
-                <a:solidFill>
-                  <a:srgbClr val="0B0B0B"/>
-                </a:solidFill>
+          <a:bodyPr wrap="square" lIns="0" tIns="0" rIns="0" bIns="0" rtlCol="0" anchor="t"/>
+          <a:lstStyle/>
+          <a:p>
+            <a:pPr algn="l" indent="0" marL="0">
+              <a:buNone/>
+            </a:pPr>
+            <a:r>
+              <a:rPr lang="en-US" altLang="en-US" sz="2600" b="1" dirty="0">
+                <a:solidFill>
+                  <a:schemeClr val="tx1"/>
+                </a:solidFill>
+                <a:latin typeface="Cambria" pitchFamily="34" charset="0"/>
+                <a:ea typeface="Cambria" pitchFamily="34" charset="-122"/>
+                <a:cs typeface="Cambria" pitchFamily="34" charset="-120"/>
               </a:rPr>
               <a:t>Commercial model</a:t>
             </a:r>
@@ -6263,11 +6129,11 @@
             <a:avLst/>
           </a:prstGeom>
           <a:solidFill>
-            <a:srgbClr val="F4F1EA"/>
+            <a:srgbClr val="F4F1EB"/>
           </a:solidFill>
           <a:ln w="12700">
             <a:solidFill>
-              <a:srgbClr val="F4F1EA"/>
+              <a:srgbClr val="F4F1EB"/>
             </a:solidFill>
             <a:prstDash val="solid"/>
           </a:ln>
@@ -6383,11 +6249,11 @@
             <a:avLst/>
           </a:prstGeom>
           <a:solidFill>
-            <a:srgbClr val="F4F1EA"/>
+            <a:srgbClr val="F4F1EB"/>
           </a:solidFill>
           <a:ln w="12700">
             <a:solidFill>
-              <a:srgbClr val="F4F1EA"/>
+              <a:srgbClr val="F4F1EB"/>
             </a:solidFill>
             <a:prstDash val="solid"/>
           </a:ln>
@@ -6503,11 +6369,11 @@
             <a:avLst/>
           </a:prstGeom>
           <a:solidFill>
-            <a:srgbClr val="F4F1EA"/>
+            <a:srgbClr val="F4F1EB"/>
           </a:solidFill>
           <a:ln w="12700">
             <a:solidFill>
-              <a:srgbClr val="F4F1EA"/>
+              <a:srgbClr val="F4F1EB"/>
             </a:solidFill>
             <a:prstDash val="solid"/>
           </a:ln>
@@ -6605,6 +6471,36 @@
               <a:t>After the will: company formation, ownership transfer, tax structuring, family office, contracts, disputes. The partner stays the original referrer.</a:t>
             </a:r>
             <a:endParaRPr lang="en-US" sz="1400" dirty="0"/>
+          </a:p>
+        </p:txBody>
+      </p:sp>
+      <p:sp>
+        <p:nvSpPr>
+          <p:cNvPr id="13" name="Text 0"/>
+          <p:cNvSpPr/>
+          <p:nvPr>
+            <p:ph idx="101" type="title" hasCustomPrompt="1"/>
+          </p:nvPr>
+        </p:nvSpPr>
+        <p:spPr>
+          <a:xfrm>
+            <a:off x="457200" y="420624"/>
+            <a:ext cx="8229600" cy="731520"/>
+          </a:xfrm>
+          <a:prstGeom prst="rect">
+            <a:avLst/>
+          </a:prstGeom>
+          <a:noFill/>
+          <a:ln/>
+        </p:spPr>
+        <p:txBody>
+          <a:bodyPr wrap="square" lIns="0" tIns="0" rIns="0" bIns="0" rtlCol="0" anchor="t"/>
+          <a:lstStyle/>
+          <a:p>
+            <a:pPr algn="l" indent="0" marL="0">
+              <a:buNone/>
+            </a:pPr>
+            <a:endParaRPr lang="en-US" sz="2600" dirty="0"/>
           </a:p>
         </p:txBody>
       </p:sp>
@@ -6638,7 +6534,7 @@
             <a:lvl1pPr>
               <a:defRPr sz="900">
                 <a:solidFill>
-                  <a:srgbClr val="6B6F76"/>
+                  <a:srgbClr val="6E7B88"/>
                 </a:solidFill>
               </a:defRPr>
             </a:lvl1pPr>
@@ -6725,8 +6621,8 @@
         </p:nvSpPr>
         <p:spPr>
           <a:xfrm>
-            <a:off x="457200" y="2834640"/>
-            <a:ext cx="7772400" cy="731520"/>
+            <a:off x="457200" y="2743200"/>
+            <a:ext cx="7772400" cy="868680"/>
           </a:xfrm>
           <a:prstGeom prst="rect">
             <a:avLst/>
@@ -6735,14 +6631,14 @@
           <a:ln/>
         </p:spPr>
         <p:txBody>
-          <a:bodyPr wrap="square" lIns="0" tIns="0" rIns="0" bIns="0" rtlCol="0" anchor="t"/>
-          <a:lstStyle/>
-          <a:p>
-            <a:pPr algn="l" indent="0" marL="0">
-              <a:buNone/>
-            </a:pPr>
-            <a:r>
-              <a:rPr lang="en-US" altLang="en-US" sz="3000" b="1" dirty="0">
+          <a:bodyPr wrap="square" lIns="0" tIns="0" rIns="0" bIns="0" rtlCol="0" anchor="b"/>
+          <a:lstStyle/>
+          <a:p>
+            <a:pPr algn="l" indent="0" marL="0">
+              <a:buNone/>
+            </a:pPr>
+            <a:r>
+              <a:rPr lang="en-US" altLang="en-US" sz="2400" b="1" dirty="0">
                 <a:solidFill>
                   <a:schemeClr val="bg1"/>
                 </a:solidFill>
@@ -6752,7 +6648,7 @@
               </a:rPr>
               <a:t>How to introduce the service to the client</a:t>
             </a:r>
-            <a:endParaRPr lang="en-US" sz="3000" dirty="0"/>
+            <a:endParaRPr lang="en-US" sz="2400" dirty="0"/>
           </a:p>
         </p:txBody>
       </p:sp>
@@ -6764,8 +6660,8 @@
         </p:nvSpPr>
         <p:spPr>
           <a:xfrm>
-            <a:off x="457200" y="3566160"/>
-            <a:ext cx="7772400" cy="548640"/>
+            <a:off x="457200" y="3675888"/>
+            <a:ext cx="7772400" cy="502920"/>
           </a:xfrm>
           <a:prstGeom prst="rect">
             <a:avLst/>
@@ -6774,7 +6670,7 @@
           <a:ln/>
         </p:spPr>
         <p:txBody>
-          <a:bodyPr wrap="square" lIns="0" tIns="0" rIns="0" bIns="0" rtlCol="0" anchor="ctr"/>
+          <a:bodyPr wrap="square" lIns="0" tIns="0" rIns="0" bIns="0" rtlCol="0" anchor="t"/>
           <a:lstStyle/>
           <a:p>
             <a:pPr algn="l" indent="0" marL="0">
@@ -6822,7 +6718,7 @@
             <a:lvl1pPr>
               <a:defRPr sz="900">
                 <a:solidFill>
-                  <a:srgbClr val="D8C39A"/>
+                  <a:srgbClr val="D9B38C"/>
                 </a:solidFill>
               </a:defRPr>
             </a:lvl1pPr>
@@ -6864,16 +6760,14 @@
       </p:grpSpPr>
       <p:sp>
         <p:nvSpPr>
-          <p:cNvPr id="2" name="Text 3"/>
-          <p:cNvSpPr/>
-          <p:nvPr>
-            <p:ph idx="103" type="title" hasCustomPrompt="1"/>
-          </p:nvPr>
-        </p:nvSpPr>
-        <p:spPr>
-          <a:xfrm>
-            <a:off x="457200" y="347472"/>
-            <a:ext cx="8229600" cy="685800"/>
+          <p:cNvPr id="2" name="Text 0"/>
+          <p:cNvSpPr txBox="1"/>
+          <p:nvPr/>
+        </p:nvSpPr>
+        <p:spPr>
+          <a:xfrm>
+            <a:off x="457200" y="402336"/>
+            <a:ext cx="8229600" cy="749808"/>
           </a:xfrm>
           <a:prstGeom prst="rect">
             <a:avLst/>
@@ -6882,17 +6776,20 @@
           <a:ln/>
         </p:spPr>
         <p:txBody>
-          <a:bodyPr wrap="square" lIns="0" tIns="0" rIns="0" bIns="0" rtlCol="0" anchor="ctr"/>
-          <a:lstStyle/>
-          <a:p>
-            <a:pPr algn="l" indent="0" marL="0">
-              <a:buNone/>
-            </a:pPr>
-            <a:r>
-              <a:rPr lang="en-US" sz="2600" b="1" dirty="0">
-                <a:solidFill>
-                  <a:srgbClr val="0B0B0B"/>
-                </a:solidFill>
+          <a:bodyPr wrap="square" lIns="0" tIns="0" rIns="0" bIns="0" rtlCol="0" anchor="t"/>
+          <a:lstStyle/>
+          <a:p>
+            <a:pPr algn="l" indent="0" marL="0">
+              <a:buNone/>
+            </a:pPr>
+            <a:r>
+              <a:rPr lang="en-US" altLang="en-US" sz="2600" b="1" dirty="0">
+                <a:solidFill>
+                  <a:schemeClr val="tx1"/>
+                </a:solidFill>
+                <a:latin typeface="Cambria" pitchFamily="34" charset="0"/>
+                <a:ea typeface="Cambria" pitchFamily="34" charset="-122"/>
+                <a:cs typeface="Cambria" pitchFamily="34" charset="-120"/>
               </a:rPr>
               <a:t>The best moments to raise it</a:t>
             </a:r>
@@ -6953,7 +6850,7 @@
           <a:noFill/>
           <a:ln w="9525">
             <a:solidFill>
-              <a:srgbClr val="D8C39A"/>
+              <a:srgbClr val="D9B38C"/>
             </a:solidFill>
             <a:prstDash val="solid"/>
           </a:ln>
@@ -6974,11 +6871,11 @@
             <a:avLst/>
           </a:prstGeom>
           <a:solidFill>
-            <a:srgbClr val="0B0B0B"/>
+            <a:srgbClr val="0E2238"/>
           </a:solidFill>
           <a:ln w="12700">
             <a:solidFill>
-              <a:srgbClr val="B08D57"/>
+              <a:srgbClr val="B5723B"/>
             </a:solidFill>
             <a:prstDash val="solid"/>
           </a:ln>
@@ -7110,11 +7007,11 @@
             <a:avLst/>
           </a:prstGeom>
           <a:solidFill>
-            <a:srgbClr val="0B0B0B"/>
+            <a:srgbClr val="0E2238"/>
           </a:solidFill>
           <a:ln w="12700">
             <a:solidFill>
-              <a:srgbClr val="B08D57"/>
+              <a:srgbClr val="B5723B"/>
             </a:solidFill>
             <a:prstDash val="solid"/>
           </a:ln>
@@ -7246,11 +7143,11 @@
             <a:avLst/>
           </a:prstGeom>
           <a:solidFill>
-            <a:srgbClr val="0B0B0B"/>
+            <a:srgbClr val="0E2238"/>
           </a:solidFill>
           <a:ln w="12700">
             <a:solidFill>
-              <a:srgbClr val="B08D57"/>
+              <a:srgbClr val="B5723B"/>
             </a:solidFill>
             <a:prstDash val="solid"/>
           </a:ln>
@@ -7382,11 +7279,11 @@
             <a:avLst/>
           </a:prstGeom>
           <a:solidFill>
-            <a:srgbClr val="0B0B0B"/>
+            <a:srgbClr val="0E2238"/>
           </a:solidFill>
           <a:ln w="12700">
             <a:solidFill>
-              <a:srgbClr val="B08D57"/>
+              <a:srgbClr val="B5723B"/>
             </a:solidFill>
             <a:prstDash val="solid"/>
           </a:ln>
@@ -7500,6 +7397,36 @@
               <a:t>Protection is part of investment planning, not of thinking about death.</a:t>
             </a:r>
             <a:endParaRPr lang="en-US" sz="1050" dirty="0"/>
+          </a:p>
+        </p:txBody>
+      </p:sp>
+      <p:sp>
+        <p:nvSpPr>
+          <p:cNvPr id="21" name="Text 0"/>
+          <p:cNvSpPr/>
+          <p:nvPr>
+            <p:ph idx="101" type="title" hasCustomPrompt="1"/>
+          </p:nvPr>
+        </p:nvSpPr>
+        <p:spPr>
+          <a:xfrm>
+            <a:off x="457200" y="420624"/>
+            <a:ext cx="8229600" cy="731520"/>
+          </a:xfrm>
+          <a:prstGeom prst="rect">
+            <a:avLst/>
+          </a:prstGeom>
+          <a:noFill/>
+          <a:ln/>
+        </p:spPr>
+        <p:txBody>
+          <a:bodyPr wrap="square" lIns="0" tIns="0" rIns="0" bIns="0" rtlCol="0" anchor="t"/>
+          <a:lstStyle/>
+          <a:p>
+            <a:pPr algn="l" indent="0" marL="0">
+              <a:buNone/>
+            </a:pPr>
+            <a:endParaRPr lang="en-US" sz="2600" dirty="0"/>
           </a:p>
         </p:txBody>
       </p:sp>
@@ -7533,7 +7460,7 @@
             <a:lvl1pPr>
               <a:defRPr sz="900">
                 <a:solidFill>
-                  <a:srgbClr val="6B6F76"/>
+                  <a:srgbClr val="6E7B88"/>
                 </a:solidFill>
               </a:defRPr>
             </a:lvl1pPr>
@@ -7575,16 +7502,14 @@
       </p:grpSpPr>
       <p:sp>
         <p:nvSpPr>
-          <p:cNvPr id="2" name="Text 3"/>
-          <p:cNvSpPr/>
-          <p:nvPr>
-            <p:ph idx="103" type="title" hasCustomPrompt="1"/>
-          </p:nvPr>
-        </p:nvSpPr>
-        <p:spPr>
-          <a:xfrm>
-            <a:off x="457200" y="347472"/>
-            <a:ext cx="8229600" cy="685800"/>
+          <p:cNvPr id="2" name="Text 0"/>
+          <p:cNvSpPr txBox="1"/>
+          <p:nvPr/>
+        </p:nvSpPr>
+        <p:spPr>
+          <a:xfrm>
+            <a:off x="457200" y="402336"/>
+            <a:ext cx="8229600" cy="749808"/>
           </a:xfrm>
           <a:prstGeom prst="rect">
             <a:avLst/>
@@ -7593,17 +7518,20 @@
           <a:ln/>
         </p:spPr>
         <p:txBody>
-          <a:bodyPr wrap="square" lIns="0" tIns="0" rIns="0" bIns="0" rtlCol="0" anchor="ctr"/>
-          <a:lstStyle/>
-          <a:p>
-            <a:pPr algn="l" indent="0" marL="0">
-              <a:buNone/>
-            </a:pPr>
-            <a:r>
-              <a:rPr lang="en-US" sz="2600" b="1" dirty="0">
-                <a:solidFill>
-                  <a:srgbClr val="0B0B0B"/>
-                </a:solidFill>
+          <a:bodyPr wrap="square" lIns="0" tIns="0" rIns="0" bIns="0" rtlCol="0" anchor="t"/>
+          <a:lstStyle/>
+          <a:p>
+            <a:pPr algn="l" indent="0" marL="0">
+              <a:buNone/>
+            </a:pPr>
+            <a:r>
+              <a:rPr lang="en-US" altLang="en-US" sz="2600" b="1" dirty="0">
+                <a:solidFill>
+                  <a:schemeClr val="tx1"/>
+                </a:solidFill>
+                <a:latin typeface="Cambria" pitchFamily="34" charset="0"/>
+                <a:ea typeface="Cambria" pitchFamily="34" charset="-122"/>
+                <a:cs typeface="Cambria" pitchFamily="34" charset="-120"/>
               </a:rPr>
               <a:t>The broker's script with the client</a:t>
             </a:r>
@@ -7662,11 +7590,11 @@
             <a:avLst/>
           </a:prstGeom>
           <a:solidFill>
-            <a:srgbClr val="0B0B0B"/>
+            <a:srgbClr val="0E2238"/>
           </a:solidFill>
           <a:ln w="12700">
             <a:solidFill>
-              <a:srgbClr val="0B0B0B"/>
+              <a:srgbClr val="0E2238"/>
             </a:solidFill>
             <a:prstDash val="solid"/>
           </a:ln>
@@ -7705,7 +7633,7 @@
         <p:spPr>
           <a:xfrm>
             <a:off x="777240" y="2103120"/>
-            <a:ext cx="2651760" cy="914400"/>
+            <a:ext cx="2651760" cy="713232"/>
           </a:xfrm>
           <a:prstGeom prst="rect">
             <a:avLst/>
@@ -7743,8 +7671,8 @@
         </p:nvSpPr>
         <p:spPr>
           <a:xfrm>
-            <a:off x="777240" y="3017520"/>
-            <a:ext cx="2651760" cy="1280160"/>
+            <a:off x="777240" y="2862072"/>
+            <a:ext cx="2651760" cy="1481328"/>
           </a:xfrm>
           <a:prstGeom prst="rect">
             <a:avLst/>
@@ -7760,14 +7688,14 @@
               <a:buNone/>
             </a:pPr>
             <a:r>
-              <a:rPr lang="en-US" altLang="en-US" sz="1150" dirty="0">
+              <a:rPr lang="en-US" altLang="en-US" sz="1100" dirty="0">
                 <a:solidFill>
                   <a:schemeClr val="bg2"/>
                 </a:solidFill>
               </a:rPr>
               <a:t>“Since you own property in the UAE, it is very important to protect your assets and your family legally. We work with a specialist law firm that can help you prepare a will compliant with UAE law.”</a:t>
             </a:r>
-            <a:endParaRPr lang="en-US" sz="1150" dirty="0"/>
+            <a:endParaRPr lang="en-US" sz="1100" dirty="0"/>
           </a:p>
         </p:txBody>
       </p:sp>
@@ -7927,6 +7855,36 @@
               <a:t>“Of course. Most clients prefer to arrange it right after the purchase, while the procedures are easiest and the documents are ready.”</a:t>
             </a:r>
             <a:endParaRPr lang="en-US" sz="1300" dirty="0"/>
+          </a:p>
+        </p:txBody>
+      </p:sp>
+      <p:sp>
+        <p:nvSpPr>
+          <p:cNvPr id="9" name="Text 0"/>
+          <p:cNvSpPr/>
+          <p:nvPr>
+            <p:ph idx="101" type="title" hasCustomPrompt="1"/>
+          </p:nvPr>
+        </p:nvSpPr>
+        <p:spPr>
+          <a:xfrm>
+            <a:off x="457200" y="420624"/>
+            <a:ext cx="8229600" cy="731520"/>
+          </a:xfrm>
+          <a:prstGeom prst="rect">
+            <a:avLst/>
+          </a:prstGeom>
+          <a:noFill/>
+          <a:ln/>
+        </p:spPr>
+        <p:txBody>
+          <a:bodyPr wrap="square" lIns="0" tIns="0" rIns="0" bIns="0" rtlCol="0" anchor="t"/>
+          <a:lstStyle/>
+          <a:p>
+            <a:pPr algn="l" indent="0" marL="0">
+              <a:buNone/>
+            </a:pPr>
+            <a:endParaRPr lang="en-US" sz="2600" dirty="0"/>
           </a:p>
         </p:txBody>
       </p:sp>
@@ -7960,7 +7918,7 @@
             <a:lvl1pPr>
               <a:defRPr sz="900">
                 <a:solidFill>
-                  <a:srgbClr val="6B6F76"/>
+                  <a:srgbClr val="6E7B88"/>
                 </a:solidFill>
               </a:defRPr>
             </a:lvl1pPr>
@@ -8002,16 +7960,14 @@
       </p:grpSpPr>
       <p:sp>
         <p:nvSpPr>
-          <p:cNvPr id="2" name="Text 3"/>
-          <p:cNvSpPr/>
-          <p:nvPr>
-            <p:ph idx="103" type="title" hasCustomPrompt="1"/>
-          </p:nvPr>
-        </p:nvSpPr>
-        <p:spPr>
-          <a:xfrm>
-            <a:off x="457200" y="347472"/>
-            <a:ext cx="8229600" cy="685800"/>
+          <p:cNvPr id="2" name="Text 0"/>
+          <p:cNvSpPr txBox="1"/>
+          <p:nvPr/>
+        </p:nvSpPr>
+        <p:spPr>
+          <a:xfrm>
+            <a:off x="457200" y="402336"/>
+            <a:ext cx="8229600" cy="749808"/>
           </a:xfrm>
           <a:prstGeom prst="rect">
             <a:avLst/>
@@ -8020,17 +7976,20 @@
           <a:ln/>
         </p:spPr>
         <p:txBody>
-          <a:bodyPr wrap="square" lIns="0" tIns="0" rIns="0" bIns="0" rtlCol="0" anchor="ctr"/>
-          <a:lstStyle/>
-          <a:p>
-            <a:pPr algn="l" indent="0" marL="0">
-              <a:buNone/>
-            </a:pPr>
-            <a:r>
-              <a:rPr lang="en-US" sz="2600" b="1" dirty="0">
-                <a:solidFill>
-                  <a:srgbClr val="0B0B0B"/>
-                </a:solidFill>
+          <a:bodyPr wrap="square" lIns="0" tIns="0" rIns="0" bIns="0" rtlCol="0" anchor="t"/>
+          <a:lstStyle/>
+          <a:p>
+            <a:pPr algn="l" indent="0" marL="0">
+              <a:buNone/>
+            </a:pPr>
+            <a:r>
+              <a:rPr lang="en-US" altLang="en-US" sz="2600" b="1" dirty="0">
+                <a:solidFill>
+                  <a:schemeClr val="tx1"/>
+                </a:solidFill>
+                <a:latin typeface="Cambria" pitchFamily="34" charset="0"/>
+                <a:ea typeface="Cambria" pitchFamily="34" charset="-122"/>
+                <a:cs typeface="Cambria" pitchFamily="34" charset="-120"/>
               </a:rPr>
               <a:t>What to say and what never to say</a:t>
             </a:r>
@@ -8089,11 +8048,11 @@
             <a:avLst/>
           </a:prstGeom>
           <a:solidFill>
-            <a:srgbClr val="B08D57"/>
+            <a:srgbClr val="B5723B"/>
           </a:solidFill>
           <a:ln w="12700">
             <a:solidFill>
-              <a:srgbClr val="B08D57"/>
+              <a:srgbClr val="B5723B"/>
             </a:solidFill>
             <a:prstDash val="solid"/>
           </a:ln>
@@ -8150,11 +8109,11 @@
             <a:avLst/>
           </a:prstGeom>
           <a:solidFill>
-            <a:srgbClr val="F4F1EA"/>
+            <a:srgbClr val="F4F1EB"/>
           </a:solidFill>
           <a:ln w="12700">
             <a:solidFill>
-              <a:srgbClr val="F4F1EA"/>
+              <a:srgbClr val="F4F1EB"/>
             </a:solidFill>
             <a:prstDash val="solid"/>
           </a:ln>
@@ -8287,11 +8246,11 @@
             <a:avLst/>
           </a:prstGeom>
           <a:solidFill>
-            <a:srgbClr val="0B0B0B"/>
+            <a:srgbClr val="0E2238"/>
           </a:solidFill>
           <a:ln w="12700">
             <a:solidFill>
-              <a:srgbClr val="0B0B0B"/>
+              <a:srgbClr val="0E2238"/>
             </a:solidFill>
             <a:prstDash val="solid"/>
           </a:ln>
@@ -8348,11 +8307,11 @@
             <a:avLst/>
           </a:prstGeom>
           <a:solidFill>
-            <a:srgbClr val="F4F1EA"/>
+            <a:srgbClr val="F4F1EB"/>
           </a:solidFill>
           <a:ln w="12700">
             <a:solidFill>
-              <a:srgbClr val="F4F1EA"/>
+              <a:srgbClr val="F4F1EB"/>
             </a:solidFill>
             <a:prstDash val="solid"/>
           </a:ln>
@@ -8467,6 +8426,36 @@
               <a:t>Any opinion on Sharia, foreign law or fees</a:t>
             </a:r>
             <a:endParaRPr lang="en-US" sz="1100" dirty="0"/>
+          </a:p>
+        </p:txBody>
+      </p:sp>
+      <p:sp>
+        <p:nvSpPr>
+          <p:cNvPr id="12" name="Text 0"/>
+          <p:cNvSpPr/>
+          <p:nvPr>
+            <p:ph idx="101" type="title" hasCustomPrompt="1"/>
+          </p:nvPr>
+        </p:nvSpPr>
+        <p:spPr>
+          <a:xfrm>
+            <a:off x="457200" y="420624"/>
+            <a:ext cx="8229600" cy="731520"/>
+          </a:xfrm>
+          <a:prstGeom prst="rect">
+            <a:avLst/>
+          </a:prstGeom>
+          <a:noFill/>
+          <a:ln/>
+        </p:spPr>
+        <p:txBody>
+          <a:bodyPr wrap="square" lIns="0" tIns="0" rIns="0" bIns="0" rtlCol="0" anchor="t"/>
+          <a:lstStyle/>
+          <a:p>
+            <a:pPr algn="l" indent="0" marL="0">
+              <a:buNone/>
+            </a:pPr>
+            <a:endParaRPr lang="en-US" sz="2600" dirty="0"/>
           </a:p>
         </p:txBody>
       </p:sp>
@@ -8500,7 +8489,7 @@
             <a:lvl1pPr>
               <a:defRPr sz="900">
                 <a:solidFill>
-                  <a:srgbClr val="6B6F76"/>
+                  <a:srgbClr val="6E7B88"/>
                 </a:solidFill>
               </a:defRPr>
             </a:lvl1pPr>
@@ -8542,16 +8531,14 @@
       </p:grpSpPr>
       <p:sp>
         <p:nvSpPr>
-          <p:cNvPr id="2" name="Text 3"/>
-          <p:cNvSpPr/>
-          <p:nvPr>
-            <p:ph idx="103" type="title" hasCustomPrompt="1"/>
-          </p:nvPr>
-        </p:nvSpPr>
-        <p:spPr>
-          <a:xfrm>
-            <a:off x="457200" y="347472"/>
-            <a:ext cx="8229600" cy="685800"/>
+          <p:cNvPr id="2" name="Text 0"/>
+          <p:cNvSpPr txBox="1"/>
+          <p:nvPr/>
+        </p:nvSpPr>
+        <p:spPr>
+          <a:xfrm>
+            <a:off x="457200" y="402336"/>
+            <a:ext cx="8229600" cy="749808"/>
           </a:xfrm>
           <a:prstGeom prst="rect">
             <a:avLst/>
@@ -8560,17 +8547,20 @@
           <a:ln/>
         </p:spPr>
         <p:txBody>
-          <a:bodyPr wrap="square" lIns="0" tIns="0" rIns="0" bIns="0" rtlCol="0" anchor="ctr"/>
-          <a:lstStyle/>
-          <a:p>
-            <a:pPr algn="l" indent="0" marL="0">
-              <a:buNone/>
-            </a:pPr>
-            <a:r>
-              <a:rPr lang="en-US" sz="2600" b="1" dirty="0">
-                <a:solidFill>
-                  <a:srgbClr val="0B0B0B"/>
-                </a:solidFill>
+          <a:bodyPr wrap="square" lIns="0" tIns="0" rIns="0" bIns="0" rtlCol="0" anchor="t"/>
+          <a:lstStyle/>
+          <a:p>
+            <a:pPr algn="l" indent="0" marL="0">
+              <a:buNone/>
+            </a:pPr>
+            <a:r>
+              <a:rPr lang="en-US" altLang="en-US" sz="2600" b="1" dirty="0">
+                <a:solidFill>
+                  <a:schemeClr val="tx1"/>
+                </a:solidFill>
+                <a:latin typeface="Cambria" pitchFamily="34" charset="0"/>
+                <a:ea typeface="Cambria" pitchFamily="34" charset="-122"/>
+                <a:cs typeface="Cambria" pitchFamily="34" charset="-120"/>
               </a:rPr>
               <a:t>The questions you will hear</a:t>
             </a:r>
@@ -8629,11 +8619,11 @@
             <a:avLst/>
           </a:prstGeom>
           <a:solidFill>
-            <a:srgbClr val="F4F1EA"/>
+            <a:srgbClr val="F4F1EB"/>
           </a:solidFill>
           <a:ln w="12700">
             <a:solidFill>
-              <a:srgbClr val="F4F1EA"/>
+              <a:srgbClr val="F4F1EB"/>
             </a:solidFill>
             <a:prstDash val="solid"/>
           </a:ln>
@@ -8734,11 +8724,11 @@
             <a:avLst/>
           </a:prstGeom>
           <a:solidFill>
-            <a:srgbClr val="F4F1EA"/>
+            <a:srgbClr val="F4F1EB"/>
           </a:solidFill>
           <a:ln w="12700">
             <a:solidFill>
-              <a:srgbClr val="F4F1EA"/>
+              <a:srgbClr val="F4F1EB"/>
             </a:solidFill>
             <a:prstDash val="solid"/>
           </a:ln>
@@ -8839,11 +8829,11 @@
             <a:avLst/>
           </a:prstGeom>
           <a:solidFill>
-            <a:srgbClr val="F4F1EA"/>
+            <a:srgbClr val="F4F1EB"/>
           </a:solidFill>
           <a:ln w="12700">
             <a:solidFill>
-              <a:srgbClr val="F4F1EA"/>
+              <a:srgbClr val="F4F1EB"/>
             </a:solidFill>
             <a:prstDash val="solid"/>
           </a:ln>
@@ -8944,11 +8934,11 @@
             <a:avLst/>
           </a:prstGeom>
           <a:solidFill>
-            <a:srgbClr val="F4F1EA"/>
+            <a:srgbClr val="F4F1EB"/>
           </a:solidFill>
           <a:ln w="12700">
             <a:solidFill>
-              <a:srgbClr val="F4F1EA"/>
+              <a:srgbClr val="F4F1EB"/>
             </a:solidFill>
             <a:prstDash val="solid"/>
           </a:ln>
@@ -9049,11 +9039,11 @@
             <a:avLst/>
           </a:prstGeom>
           <a:solidFill>
-            <a:srgbClr val="F4F1EA"/>
+            <a:srgbClr val="F4F1EB"/>
           </a:solidFill>
           <a:ln w="12700">
             <a:solidFill>
-              <a:srgbClr val="F4F1EA"/>
+              <a:srgbClr val="F4F1EB"/>
             </a:solidFill>
             <a:prstDash val="solid"/>
           </a:ln>
@@ -9141,6 +9131,36 @@
       </p:sp>
       <p:sp>
         <p:nvSpPr>
+          <p:cNvPr id="19" name="Text 0"/>
+          <p:cNvSpPr/>
+          <p:nvPr>
+            <p:ph idx="101" type="title" hasCustomPrompt="1"/>
+          </p:nvPr>
+        </p:nvSpPr>
+        <p:spPr>
+          <a:xfrm>
+            <a:off x="457200" y="420624"/>
+            <a:ext cx="8229600" cy="731520"/>
+          </a:xfrm>
+          <a:prstGeom prst="rect">
+            <a:avLst/>
+          </a:prstGeom>
+          <a:noFill/>
+          <a:ln/>
+        </p:spPr>
+        <p:txBody>
+          <a:bodyPr wrap="square" lIns="0" tIns="0" rIns="0" bIns="0" rtlCol="0" anchor="t"/>
+          <a:lstStyle/>
+          <a:p>
+            <a:pPr algn="l" indent="0" marL="0">
+              <a:buNone/>
+            </a:pPr>
+            <a:endParaRPr lang="en-US" sz="2600" dirty="0"/>
+          </a:p>
+        </p:txBody>
+      </p:sp>
+      <p:sp>
+        <p:nvSpPr>
           <p:cNvPr id="25" name="Slide Number Placeholder 0"/>
           <p:cNvSpPr>
             <a:spLocks noGrp="1"/>
@@ -9169,7 +9189,7 @@
             <a:lvl1pPr>
               <a:defRPr sz="900">
                 <a:solidFill>
-                  <a:srgbClr val="6B6F76"/>
+                  <a:srgbClr val="6E7B88"/>
                 </a:solidFill>
               </a:defRPr>
             </a:lvl1pPr>
@@ -9211,16 +9231,14 @@
       </p:grpSpPr>
       <p:sp>
         <p:nvSpPr>
-          <p:cNvPr id="2" name="Text 3"/>
-          <p:cNvSpPr/>
-          <p:nvPr>
-            <p:ph idx="103" type="title" hasCustomPrompt="1"/>
-          </p:nvPr>
-        </p:nvSpPr>
-        <p:spPr>
-          <a:xfrm>
-            <a:off x="457200" y="347472"/>
-            <a:ext cx="8229600" cy="685800"/>
+          <p:cNvPr id="2" name="Text 0"/>
+          <p:cNvSpPr txBox="1"/>
+          <p:nvPr/>
+        </p:nvSpPr>
+        <p:spPr>
+          <a:xfrm>
+            <a:off x="457200" y="402336"/>
+            <a:ext cx="8229600" cy="749808"/>
           </a:xfrm>
           <a:prstGeom prst="rect">
             <a:avLst/>
@@ -9229,57 +9247,60 @@
           <a:ln/>
         </p:spPr>
         <p:txBody>
-          <a:bodyPr wrap="square" lIns="0" tIns="0" rIns="0" bIns="0" rtlCol="0" anchor="ctr"/>
-          <a:lstStyle/>
-          <a:p>
-            <a:pPr algn="l" indent="0" marL="0">
-              <a:buNone/>
-            </a:pPr>
-            <a:r>
-              <a:rPr lang="en-US" sz="2600" b="1" dirty="0">
-                <a:solidFill>
-                  <a:srgbClr val="0B0B0B"/>
-                </a:solidFill>
-              </a:rPr>
-              <a:t>Contents</a:t>
-            </a:r>
-            <a:endParaRPr lang="en-US" sz="2600" dirty="0"/>
-          </a:p>
-        </p:txBody>
-      </p:sp>
-      <p:sp>
-        <p:nvSpPr>
-          <p:cNvPr id="3" name="Text 1"/>
-          <p:cNvSpPr txBox="1"/>
-          <p:nvPr/>
-        </p:nvSpPr>
-        <p:spPr>
-          <a:xfrm>
-            <a:off x="457200" y="1234440"/>
-            <a:ext cx="457200" cy="530352"/>
-          </a:xfrm>
-          <a:prstGeom prst="rect">
-            <a:avLst/>
-          </a:prstGeom>
-          <a:noFill/>
-          <a:ln/>
-        </p:spPr>
-        <p:txBody>
-          <a:bodyPr wrap="square" lIns="0" tIns="0" rIns="0" bIns="0" rtlCol="0" anchor="ctr"/>
-          <a:lstStyle/>
-          <a:p>
-            <a:pPr algn="l" indent="0" marL="0">
-              <a:buNone/>
-            </a:pPr>
-            <a:r>
-              <a:rPr lang="en-US" sz="1800" b="1" dirty="0">
-                <a:solidFill>
-                  <a:schemeClr val="accent1"/>
+          <a:bodyPr wrap="square" lIns="0" tIns="0" rIns="0" bIns="0" rtlCol="0" anchor="t"/>
+          <a:lstStyle/>
+          <a:p>
+            <a:pPr algn="l" indent="0" marL="0">
+              <a:buNone/>
+            </a:pPr>
+            <a:r>
+              <a:rPr lang="en-US" altLang="en-US" sz="2600" b="1" dirty="0">
+                <a:solidFill>
+                  <a:schemeClr val="tx1"/>
                 </a:solidFill>
                 <a:latin typeface="Cambria" pitchFamily="34" charset="0"/>
                 <a:ea typeface="Cambria" pitchFamily="34" charset="-122"/>
                 <a:cs typeface="Cambria" pitchFamily="34" charset="-120"/>
               </a:rPr>
+              <a:t>Contents</a:t>
+            </a:r>
+            <a:endParaRPr lang="en-US" sz="2600" dirty="0"/>
+          </a:p>
+        </p:txBody>
+      </p:sp>
+      <p:sp>
+        <p:nvSpPr>
+          <p:cNvPr id="3" name="Text 1"/>
+          <p:cNvSpPr txBox="1"/>
+          <p:nvPr/>
+        </p:nvSpPr>
+        <p:spPr>
+          <a:xfrm>
+            <a:off x="457200" y="1234440"/>
+            <a:ext cx="457200" cy="530352"/>
+          </a:xfrm>
+          <a:prstGeom prst="rect">
+            <a:avLst/>
+          </a:prstGeom>
+          <a:noFill/>
+          <a:ln/>
+        </p:spPr>
+        <p:txBody>
+          <a:bodyPr wrap="square" lIns="0" tIns="0" rIns="0" bIns="0" rtlCol="0" anchor="ctr"/>
+          <a:lstStyle/>
+          <a:p>
+            <a:pPr algn="l" indent="0" marL="0">
+              <a:buNone/>
+            </a:pPr>
+            <a:r>
+              <a:rPr lang="en-US" sz="1800" b="1" dirty="0">
+                <a:solidFill>
+                  <a:schemeClr val="accent1"/>
+                </a:solidFill>
+                <a:latin typeface="Cambria" pitchFamily="34" charset="0"/>
+                <a:ea typeface="Cambria" pitchFamily="34" charset="-122"/>
+                <a:cs typeface="Cambria" pitchFamily="34" charset="-120"/>
+              </a:rPr>
               <a:t>01</a:t>
             </a:r>
             <a:endParaRPr lang="en-US" sz="1800" dirty="0"/>
@@ -9339,7 +9360,7 @@
           <a:noFill/>
           <a:ln w="6350">
             <a:solidFill>
-              <a:srgbClr val="E9E4DA"/>
+              <a:srgbClr val="E6E1D8"/>
             </a:solidFill>
             <a:prstDash val="solid"/>
           </a:ln>
@@ -9437,7 +9458,7 @@
           <a:noFill/>
           <a:ln w="6350">
             <a:solidFill>
-              <a:srgbClr val="E9E4DA"/>
+              <a:srgbClr val="E6E1D8"/>
             </a:solidFill>
             <a:prstDash val="solid"/>
           </a:ln>
@@ -9535,7 +9556,7 @@
           <a:noFill/>
           <a:ln w="6350">
             <a:solidFill>
-              <a:srgbClr val="E9E4DA"/>
+              <a:srgbClr val="E6E1D8"/>
             </a:solidFill>
             <a:prstDash val="solid"/>
           </a:ln>
@@ -9633,7 +9654,7 @@
           <a:noFill/>
           <a:ln w="6350">
             <a:solidFill>
-              <a:srgbClr val="E9E4DA"/>
+              <a:srgbClr val="E6E1D8"/>
             </a:solidFill>
             <a:prstDash val="solid"/>
           </a:ln>
@@ -9731,7 +9752,7 @@
           <a:noFill/>
           <a:ln w="6350">
             <a:solidFill>
-              <a:srgbClr val="E9E4DA"/>
+              <a:srgbClr val="E6E1D8"/>
             </a:solidFill>
             <a:prstDash val="solid"/>
           </a:ln>
@@ -9829,7 +9850,7 @@
           <a:noFill/>
           <a:ln w="6350">
             <a:solidFill>
-              <a:srgbClr val="E9E4DA"/>
+              <a:srgbClr val="E6E1D8"/>
             </a:solidFill>
             <a:prstDash val="solid"/>
           </a:ln>
@@ -9927,11 +9948,41 @@
           <a:noFill/>
           <a:ln w="6350">
             <a:solidFill>
-              <a:srgbClr val="E9E4DA"/>
+              <a:srgbClr val="E6E1D8"/>
             </a:solidFill>
             <a:prstDash val="solid"/>
           </a:ln>
         </p:spPr>
+      </p:sp>
+      <p:sp>
+        <p:nvSpPr>
+          <p:cNvPr id="24" name="Text 0"/>
+          <p:cNvSpPr/>
+          <p:nvPr>
+            <p:ph idx="101" type="title" hasCustomPrompt="1"/>
+          </p:nvPr>
+        </p:nvSpPr>
+        <p:spPr>
+          <a:xfrm>
+            <a:off x="457200" y="420624"/>
+            <a:ext cx="8229600" cy="731520"/>
+          </a:xfrm>
+          <a:prstGeom prst="rect">
+            <a:avLst/>
+          </a:prstGeom>
+          <a:noFill/>
+          <a:ln/>
+        </p:spPr>
+        <p:txBody>
+          <a:bodyPr wrap="square" lIns="0" tIns="0" rIns="0" bIns="0" rtlCol="0" anchor="t"/>
+          <a:lstStyle/>
+          <a:p>
+            <a:pPr algn="l" indent="0" marL="0">
+              <a:buNone/>
+            </a:pPr>
+            <a:endParaRPr lang="en-US" sz="2600" dirty="0"/>
+          </a:p>
+        </p:txBody>
       </p:sp>
       <p:sp>
         <p:nvSpPr>
@@ -9963,7 +10014,7 @@
             <a:lvl1pPr>
               <a:defRPr sz="900">
                 <a:solidFill>
-                  <a:srgbClr val="6B6F76"/>
+                  <a:srgbClr val="6E7B88"/>
                 </a:solidFill>
               </a:defRPr>
             </a:lvl1pPr>
@@ -10050,8 +10101,8 @@
         </p:nvSpPr>
         <p:spPr>
           <a:xfrm>
-            <a:off x="457200" y="2834640"/>
-            <a:ext cx="7772400" cy="731520"/>
+            <a:off x="457200" y="2743200"/>
+            <a:ext cx="7772400" cy="868680"/>
           </a:xfrm>
           <a:prstGeom prst="rect">
             <a:avLst/>
@@ -10060,7 +10111,7 @@
           <a:ln/>
         </p:spPr>
         <p:txBody>
-          <a:bodyPr wrap="square" lIns="0" tIns="0" rIns="0" bIns="0" rtlCol="0" anchor="t"/>
+          <a:bodyPr wrap="square" lIns="0" tIns="0" rIns="0" bIns="0" rtlCol="0" anchor="b"/>
           <a:lstStyle/>
           <a:p>
             <a:pPr algn="l" indent="0" marL="0">
@@ -10089,8 +10140,8 @@
         </p:nvSpPr>
         <p:spPr>
           <a:xfrm>
-            <a:off x="457200" y="3566160"/>
-            <a:ext cx="7772400" cy="548640"/>
+            <a:off x="457200" y="3675888"/>
+            <a:ext cx="7772400" cy="502920"/>
           </a:xfrm>
           <a:prstGeom prst="rect">
             <a:avLst/>
@@ -10099,7 +10150,7 @@
           <a:ln/>
         </p:spPr>
         <p:txBody>
-          <a:bodyPr wrap="square" lIns="0" tIns="0" rIns="0" bIns="0" rtlCol="0" anchor="ctr"/>
+          <a:bodyPr wrap="square" lIns="0" tIns="0" rIns="0" bIns="0" rtlCol="0" anchor="t"/>
           <a:lstStyle/>
           <a:p>
             <a:pPr algn="l" indent="0" marL="0">
@@ -10147,7 +10198,7 @@
             <a:lvl1pPr>
               <a:defRPr sz="900">
                 <a:solidFill>
-                  <a:srgbClr val="D8C39A"/>
+                  <a:srgbClr val="D9B38C"/>
                 </a:solidFill>
               </a:defRPr>
             </a:lvl1pPr>
@@ -10189,16 +10240,14 @@
       </p:grpSpPr>
       <p:sp>
         <p:nvSpPr>
-          <p:cNvPr id="2" name="Text 3"/>
-          <p:cNvSpPr/>
-          <p:nvPr>
-            <p:ph idx="103" type="title" hasCustomPrompt="1"/>
-          </p:nvPr>
-        </p:nvSpPr>
-        <p:spPr>
-          <a:xfrm>
-            <a:off x="457200" y="347472"/>
-            <a:ext cx="8229600" cy="685800"/>
+          <p:cNvPr id="2" name="Text 0"/>
+          <p:cNvSpPr txBox="1"/>
+          <p:nvPr/>
+        </p:nvSpPr>
+        <p:spPr>
+          <a:xfrm>
+            <a:off x="457200" y="402336"/>
+            <a:ext cx="8229600" cy="749808"/>
           </a:xfrm>
           <a:prstGeom prst="rect">
             <a:avLst/>
@@ -10207,17 +10256,20 @@
           <a:ln/>
         </p:spPr>
         <p:txBody>
-          <a:bodyPr wrap="square" lIns="0" tIns="0" rIns="0" bIns="0" rtlCol="0" anchor="ctr"/>
-          <a:lstStyle/>
-          <a:p>
-            <a:pPr algn="l" indent="0" marL="0">
-              <a:buNone/>
-            </a:pPr>
-            <a:r>
-              <a:rPr lang="en-US" sz="2600" b="1" dirty="0">
-                <a:solidFill>
-                  <a:srgbClr val="0B0B0B"/>
-                </a:solidFill>
+          <a:bodyPr wrap="square" lIns="0" tIns="0" rIns="0" bIns="0" rtlCol="0" anchor="t"/>
+          <a:lstStyle/>
+          <a:p>
+            <a:pPr algn="l" indent="0" marL="0">
+              <a:buNone/>
+            </a:pPr>
+            <a:r>
+              <a:rPr lang="en-US" altLang="en-US" sz="2600" b="1" dirty="0">
+                <a:solidFill>
+                  <a:schemeClr val="tx1"/>
+                </a:solidFill>
+                <a:latin typeface="Cambria" pitchFamily="34" charset="0"/>
+                <a:ea typeface="Cambria" pitchFamily="34" charset="-122"/>
+                <a:cs typeface="Cambria" pitchFamily="34" charset="-120"/>
               </a:rPr>
               <a:t>The referral workflow step by step</a:t>
             </a:r>
@@ -10278,7 +10330,7 @@
           <a:noFill/>
           <a:ln w="9525">
             <a:solidFill>
-              <a:srgbClr val="D8C39A"/>
+              <a:srgbClr val="D9B38C"/>
             </a:solidFill>
             <a:prstDash val="solid"/>
           </a:ln>
@@ -10299,11 +10351,11 @@
             <a:avLst/>
           </a:prstGeom>
           <a:solidFill>
-            <a:srgbClr val="0B0B0B"/>
+            <a:srgbClr val="0E2238"/>
           </a:solidFill>
           <a:ln w="12700">
             <a:solidFill>
-              <a:srgbClr val="B08D57"/>
+              <a:srgbClr val="B5723B"/>
             </a:solidFill>
             <a:prstDash val="solid"/>
           </a:ln>
@@ -10435,11 +10487,11 @@
             <a:avLst/>
           </a:prstGeom>
           <a:solidFill>
-            <a:srgbClr val="0B0B0B"/>
+            <a:srgbClr val="0E2238"/>
           </a:solidFill>
           <a:ln w="12700">
             <a:solidFill>
-              <a:srgbClr val="B08D57"/>
+              <a:srgbClr val="B5723B"/>
             </a:solidFill>
             <a:prstDash val="solid"/>
           </a:ln>
@@ -10571,11 +10623,11 @@
             <a:avLst/>
           </a:prstGeom>
           <a:solidFill>
-            <a:srgbClr val="0B0B0B"/>
+            <a:srgbClr val="0E2238"/>
           </a:solidFill>
           <a:ln w="12700">
             <a:solidFill>
-              <a:srgbClr val="B08D57"/>
+              <a:srgbClr val="B5723B"/>
             </a:solidFill>
             <a:prstDash val="solid"/>
           </a:ln>
@@ -10707,11 +10759,11 @@
             <a:avLst/>
           </a:prstGeom>
           <a:solidFill>
-            <a:srgbClr val="0B0B0B"/>
+            <a:srgbClr val="0E2238"/>
           </a:solidFill>
           <a:ln w="12700">
             <a:solidFill>
-              <a:srgbClr val="B08D57"/>
+              <a:srgbClr val="B5723B"/>
             </a:solidFill>
             <a:prstDash val="solid"/>
           </a:ln>
@@ -10843,11 +10895,11 @@
             <a:avLst/>
           </a:prstGeom>
           <a:solidFill>
-            <a:srgbClr val="0B0B0B"/>
+            <a:srgbClr val="0E2238"/>
           </a:solidFill>
           <a:ln w="12700">
             <a:solidFill>
-              <a:srgbClr val="B08D57"/>
+              <a:srgbClr val="B5723B"/>
             </a:solidFill>
             <a:prstDash val="solid"/>
           </a:ln>
@@ -10979,11 +11031,11 @@
             <a:avLst/>
           </a:prstGeom>
           <a:solidFill>
-            <a:srgbClr val="0B0B0B"/>
+            <a:srgbClr val="0E2238"/>
           </a:solidFill>
           <a:ln w="12700">
             <a:solidFill>
-              <a:srgbClr val="B08D57"/>
+              <a:srgbClr val="B5723B"/>
             </a:solidFill>
             <a:prstDash val="solid"/>
           </a:ln>
@@ -11097,6 +11149,36 @@
               <a:t>An update at each stage, and a monthly report with commission settlement.</a:t>
             </a:r>
             <a:endParaRPr lang="en-US" sz="1050" dirty="0"/>
+          </a:p>
+        </p:txBody>
+      </p:sp>
+      <p:sp>
+        <p:nvSpPr>
+          <p:cNvPr id="29" name="Text 0"/>
+          <p:cNvSpPr/>
+          <p:nvPr>
+            <p:ph idx="101" type="title" hasCustomPrompt="1"/>
+          </p:nvPr>
+        </p:nvSpPr>
+        <p:spPr>
+          <a:xfrm>
+            <a:off x="457200" y="420624"/>
+            <a:ext cx="8229600" cy="731520"/>
+          </a:xfrm>
+          <a:prstGeom prst="rect">
+            <a:avLst/>
+          </a:prstGeom>
+          <a:noFill/>
+          <a:ln/>
+        </p:spPr>
+        <p:txBody>
+          <a:bodyPr wrap="square" lIns="0" tIns="0" rIns="0" bIns="0" rtlCol="0" anchor="t"/>
+          <a:lstStyle/>
+          <a:p>
+            <a:pPr algn="l" indent="0" marL="0">
+              <a:buNone/>
+            </a:pPr>
+            <a:endParaRPr lang="en-US" sz="2600" dirty="0"/>
           </a:p>
         </p:txBody>
       </p:sp>
@@ -11130,7 +11212,7 @@
             <a:lvl1pPr>
               <a:defRPr sz="900">
                 <a:solidFill>
-                  <a:srgbClr val="6B6F76"/>
+                  <a:srgbClr val="6E7B88"/>
                 </a:solidFill>
               </a:defRPr>
             </a:lvl1pPr>
@@ -11172,16 +11254,14 @@
       </p:grpSpPr>
       <p:sp>
         <p:nvSpPr>
-          <p:cNvPr id="2" name="Text 3"/>
-          <p:cNvSpPr/>
-          <p:nvPr>
-            <p:ph idx="103" type="title" hasCustomPrompt="1"/>
-          </p:nvPr>
-        </p:nvSpPr>
-        <p:spPr>
-          <a:xfrm>
-            <a:off x="457200" y="347472"/>
-            <a:ext cx="8229600" cy="685800"/>
+          <p:cNvPr id="2" name="Text 0"/>
+          <p:cNvSpPr txBox="1"/>
+          <p:nvPr/>
+        </p:nvSpPr>
+        <p:spPr>
+          <a:xfrm>
+            <a:off x="457200" y="402336"/>
+            <a:ext cx="8229600" cy="749808"/>
           </a:xfrm>
           <a:prstGeom prst="rect">
             <a:avLst/>
@@ -11190,17 +11270,20 @@
           <a:ln/>
         </p:spPr>
         <p:txBody>
-          <a:bodyPr wrap="square" lIns="0" tIns="0" rIns="0" bIns="0" rtlCol="0" anchor="ctr"/>
-          <a:lstStyle/>
-          <a:p>
-            <a:pPr algn="l" indent="0" marL="0">
-              <a:buNone/>
-            </a:pPr>
-            <a:r>
-              <a:rPr lang="en-US" sz="2600" b="1" dirty="0">
-                <a:solidFill>
-                  <a:srgbClr val="0B0B0B"/>
-                </a:solidFill>
+          <a:bodyPr wrap="square" lIns="0" tIns="0" rIns="0" bIns="0" rtlCol="0" anchor="t"/>
+          <a:lstStyle/>
+          <a:p>
+            <a:pPr algn="l" indent="0" marL="0">
+              <a:buNone/>
+            </a:pPr>
+            <a:r>
+              <a:rPr lang="en-US" altLang="en-US" sz="2600" b="1" dirty="0">
+                <a:solidFill>
+                  <a:schemeClr val="tx1"/>
+                </a:solidFill>
+                <a:latin typeface="Cambria" pitchFamily="34" charset="0"/>
+                <a:ea typeface="Cambria" pitchFamily="34" charset="-122"/>
+                <a:cs typeface="Cambria" pitchFamily="34" charset="-120"/>
               </a:rPr>
               <a:t>The service level we commit to</a:t>
             </a:r>
@@ -11282,7 +11365,7 @@
                       <a:r>
                         <a:rPr lang="en-US" sz="1100" b="1" dirty="0">
                           <a:solidFill>
-                            <a:srgbClr val="D8C39A"/>
+                            <a:srgbClr val="D9B38C"/>
                           </a:solidFill>
                           <a:latin typeface="+mn-lt" pitchFamily="34" charset="0"/>
                           <a:ea typeface="+mn-lt" pitchFamily="34" charset="-122"/>
@@ -11300,7 +11383,7 @@
                   <a:tcPr marL="91440" marR="91440" marT="45720" marB="45720" anchor="ctr">
                     <a:lnL w="6350" cap="flat" cmpd="sng" algn="ctr">
                       <a:solidFill>
-                        <a:srgbClr val="E9E4DA"/>
+                        <a:srgbClr val="E6E1D8"/>
                       </a:solidFill>
                       <a:prstDash val="solid"/>
                       <a:round/>
@@ -11309,7 +11392,7 @@
                     </a:lnL>
                     <a:lnR w="6350" cap="flat" cmpd="sng" algn="ctr">
                       <a:solidFill>
-                        <a:srgbClr val="E9E4DA"/>
+                        <a:srgbClr val="E6E1D8"/>
                       </a:solidFill>
                       <a:prstDash val="solid"/>
                       <a:round/>
@@ -11318,7 +11401,7 @@
                     </a:lnR>
                     <a:lnT w="6350" cap="flat" cmpd="sng" algn="ctr">
                       <a:solidFill>
-                        <a:srgbClr val="E9E4DA"/>
+                        <a:srgbClr val="E6E1D8"/>
                       </a:solidFill>
                       <a:prstDash val="solid"/>
                       <a:round/>
@@ -11327,7 +11410,7 @@
                     </a:lnT>
                     <a:lnB w="6350" cap="flat" cmpd="sng" algn="ctr">
                       <a:solidFill>
-                        <a:srgbClr val="E9E4DA"/>
+                        <a:srgbClr val="E6E1D8"/>
                       </a:solidFill>
                       <a:prstDash val="solid"/>
                       <a:round/>
@@ -11335,7 +11418,7 @@
                       <a:tailEnd type="none" w="med" len="med"/>
                     </a:lnB>
                     <a:solidFill>
-                      <a:srgbClr val="0B0B0B"/>
+                      <a:srgbClr val="0E2238"/>
                     </a:solidFill>
                   </a:tcPr>
                 </a:tc>
@@ -11350,7 +11433,7 @@
                       <a:r>
                         <a:rPr lang="en-US" sz="1100" b="1" dirty="0">
                           <a:solidFill>
-                            <a:srgbClr val="D8C39A"/>
+                            <a:srgbClr val="D9B38C"/>
                           </a:solidFill>
                           <a:latin typeface="+mn-lt" pitchFamily="34" charset="0"/>
                           <a:ea typeface="+mn-lt" pitchFamily="34" charset="-122"/>
@@ -11368,7 +11451,7 @@
                   <a:tcPr marL="91440" marR="91440" marT="45720" marB="45720" anchor="ctr">
                     <a:lnL w="6350" cap="flat" cmpd="sng" algn="ctr">
                       <a:solidFill>
-                        <a:srgbClr val="E9E4DA"/>
+                        <a:srgbClr val="E6E1D8"/>
                       </a:solidFill>
                       <a:prstDash val="solid"/>
                       <a:round/>
@@ -11377,7 +11460,7 @@
                     </a:lnL>
                     <a:lnR w="6350" cap="flat" cmpd="sng" algn="ctr">
                       <a:solidFill>
-                        <a:srgbClr val="E9E4DA"/>
+                        <a:srgbClr val="E6E1D8"/>
                       </a:solidFill>
                       <a:prstDash val="solid"/>
                       <a:round/>
@@ -11386,7 +11469,7 @@
                     </a:lnR>
                     <a:lnT w="6350" cap="flat" cmpd="sng" algn="ctr">
                       <a:solidFill>
-                        <a:srgbClr val="E9E4DA"/>
+                        <a:srgbClr val="E6E1D8"/>
                       </a:solidFill>
                       <a:prstDash val="solid"/>
                       <a:round/>
@@ -11395,7 +11478,7 @@
                     </a:lnT>
                     <a:lnB w="6350" cap="flat" cmpd="sng" algn="ctr">
                       <a:solidFill>
-                        <a:srgbClr val="E9E4DA"/>
+                        <a:srgbClr val="E6E1D8"/>
                       </a:solidFill>
                       <a:prstDash val="solid"/>
                       <a:round/>
@@ -11403,7 +11486,7 @@
                       <a:tailEnd type="none" w="med" len="med"/>
                     </a:lnB>
                     <a:solidFill>
-                      <a:srgbClr val="0B0B0B"/>
+                      <a:srgbClr val="0E2238"/>
                     </a:solidFill>
                   </a:tcPr>
                 </a:tc>
@@ -11420,7 +11503,7 @@
                       <a:r>
                         <a:rPr lang="en-US" sz="1050" b="1" dirty="0">
                           <a:solidFill>
-                            <a:srgbClr val="0B0B0B"/>
+                            <a:srgbClr val="0E2238"/>
                           </a:solidFill>
                           <a:latin typeface="+mn-lt" pitchFamily="34" charset="0"/>
                           <a:ea typeface="+mn-lt" pitchFamily="34" charset="-122"/>
@@ -11438,7 +11521,7 @@
                   <a:tcPr marL="91440" marR="91440" marT="45720" marB="45720" anchor="ctr">
                     <a:lnL w="6350" cap="flat" cmpd="sng" algn="ctr">
                       <a:solidFill>
-                        <a:srgbClr val="E9E4DA"/>
+                        <a:srgbClr val="E6E1D8"/>
                       </a:solidFill>
                       <a:prstDash val="solid"/>
                       <a:round/>
@@ -11447,7 +11530,7 @@
                     </a:lnL>
                     <a:lnR w="6350" cap="flat" cmpd="sng" algn="ctr">
                       <a:solidFill>
-                        <a:srgbClr val="E9E4DA"/>
+                        <a:srgbClr val="E6E1D8"/>
                       </a:solidFill>
                       <a:prstDash val="solid"/>
                       <a:round/>
@@ -11456,7 +11539,7 @@
                     </a:lnR>
                     <a:lnT w="6350" cap="flat" cmpd="sng" algn="ctr">
                       <a:solidFill>
-                        <a:srgbClr val="E9E4DA"/>
+                        <a:srgbClr val="E6E1D8"/>
                       </a:solidFill>
                       <a:prstDash val="solid"/>
                       <a:round/>
@@ -11465,7 +11548,7 @@
                     </a:lnT>
                     <a:lnB w="6350" cap="flat" cmpd="sng" algn="ctr">
                       <a:solidFill>
-                        <a:srgbClr val="E9E4DA"/>
+                        <a:srgbClr val="E6E1D8"/>
                       </a:solidFill>
                       <a:prstDash val="solid"/>
                       <a:round/>
@@ -11473,7 +11556,7 @@
                       <a:tailEnd type="none" w="med" len="med"/>
                     </a:lnB>
                     <a:solidFill>
-                      <a:srgbClr val="F4F1EA"/>
+                      <a:srgbClr val="F4F1EB"/>
                     </a:solidFill>
                   </a:tcPr>
                 </a:tc>
@@ -11488,7 +11571,7 @@
                       <a:r>
                         <a:rPr lang="en-US" sz="1050" dirty="0">
                           <a:solidFill>
-                            <a:srgbClr val="2A2D33"/>
+                            <a:srgbClr val="1F3A52"/>
                           </a:solidFill>
                           <a:latin typeface="+mn-lt" pitchFamily="34" charset="0"/>
                           <a:ea typeface="+mn-lt" pitchFamily="34" charset="-122"/>
@@ -11506,7 +11589,7 @@
                   <a:tcPr marL="91440" marR="91440" marT="45720" marB="45720" anchor="ctr">
                     <a:lnL w="6350" cap="flat" cmpd="sng" algn="ctr">
                       <a:solidFill>
-                        <a:srgbClr val="E9E4DA"/>
+                        <a:srgbClr val="E6E1D8"/>
                       </a:solidFill>
                       <a:prstDash val="solid"/>
                       <a:round/>
@@ -11515,7 +11598,7 @@
                     </a:lnL>
                     <a:lnR w="6350" cap="flat" cmpd="sng" algn="ctr">
                       <a:solidFill>
-                        <a:srgbClr val="E9E4DA"/>
+                        <a:srgbClr val="E6E1D8"/>
                       </a:solidFill>
                       <a:prstDash val="solid"/>
                       <a:round/>
@@ -11524,7 +11607,7 @@
                     </a:lnR>
                     <a:lnT w="6350" cap="flat" cmpd="sng" algn="ctr">
                       <a:solidFill>
-                        <a:srgbClr val="E9E4DA"/>
+                        <a:srgbClr val="E6E1D8"/>
                       </a:solidFill>
                       <a:prstDash val="solid"/>
                       <a:round/>
@@ -11533,7 +11616,7 @@
                     </a:lnT>
                     <a:lnB w="6350" cap="flat" cmpd="sng" algn="ctr">
                       <a:solidFill>
-                        <a:srgbClr val="E9E4DA"/>
+                        <a:srgbClr val="E6E1D8"/>
                       </a:solidFill>
                       <a:prstDash val="solid"/>
                       <a:round/>
@@ -11541,7 +11624,7 @@
                       <a:tailEnd type="none" w="med" len="med"/>
                     </a:lnB>
                     <a:solidFill>
-                      <a:srgbClr val="F4F1EA"/>
+                      <a:srgbClr val="F4F1EB"/>
                     </a:solidFill>
                   </a:tcPr>
                 </a:tc>
@@ -11558,7 +11641,7 @@
                       <a:r>
                         <a:rPr lang="en-US" sz="1050" b="1" dirty="0">
                           <a:solidFill>
-                            <a:srgbClr val="0B0B0B"/>
+                            <a:srgbClr val="0E2238"/>
                           </a:solidFill>
                           <a:latin typeface="+mn-lt" pitchFamily="34" charset="0"/>
                           <a:ea typeface="+mn-lt" pitchFamily="34" charset="-122"/>
@@ -11576,7 +11659,7 @@
                   <a:tcPr marL="91440" marR="91440" marT="45720" marB="45720" anchor="ctr">
                     <a:lnL w="6350" cap="flat" cmpd="sng" algn="ctr">
                       <a:solidFill>
-                        <a:srgbClr val="E9E4DA"/>
+                        <a:srgbClr val="E6E1D8"/>
                       </a:solidFill>
                       <a:prstDash val="solid"/>
                       <a:round/>
@@ -11585,7 +11668,7 @@
                     </a:lnL>
                     <a:lnR w="6350" cap="flat" cmpd="sng" algn="ctr">
                       <a:solidFill>
-                        <a:srgbClr val="E9E4DA"/>
+                        <a:srgbClr val="E6E1D8"/>
                       </a:solidFill>
                       <a:prstDash val="solid"/>
                       <a:round/>
@@ -11594,7 +11677,7 @@
                     </a:lnR>
                     <a:lnT w="6350" cap="flat" cmpd="sng" algn="ctr">
                       <a:solidFill>
-                        <a:srgbClr val="E9E4DA"/>
+                        <a:srgbClr val="E6E1D8"/>
                       </a:solidFill>
                       <a:prstDash val="solid"/>
                       <a:round/>
@@ -11603,7 +11686,7 @@
                     </a:lnT>
                     <a:lnB w="6350" cap="flat" cmpd="sng" algn="ctr">
                       <a:solidFill>
-                        <a:srgbClr val="E9E4DA"/>
+                        <a:srgbClr val="E6E1D8"/>
                       </a:solidFill>
                       <a:prstDash val="solid"/>
                       <a:round/>
@@ -11626,7 +11709,7 @@
                       <a:r>
                         <a:rPr lang="en-US" sz="1050" dirty="0">
                           <a:solidFill>
-                            <a:srgbClr val="2A2D33"/>
+                            <a:srgbClr val="1F3A52"/>
                           </a:solidFill>
                           <a:latin typeface="+mn-lt" pitchFamily="34" charset="0"/>
                           <a:ea typeface="+mn-lt" pitchFamily="34" charset="-122"/>
@@ -11644,7 +11727,7 @@
                   <a:tcPr marL="91440" marR="91440" marT="45720" marB="45720" anchor="ctr">
                     <a:lnL w="6350" cap="flat" cmpd="sng" algn="ctr">
                       <a:solidFill>
-                        <a:srgbClr val="E9E4DA"/>
+                        <a:srgbClr val="E6E1D8"/>
                       </a:solidFill>
                       <a:prstDash val="solid"/>
                       <a:round/>
@@ -11653,7 +11736,7 @@
                     </a:lnL>
                     <a:lnR w="6350" cap="flat" cmpd="sng" algn="ctr">
                       <a:solidFill>
-                        <a:srgbClr val="E9E4DA"/>
+                        <a:srgbClr val="E6E1D8"/>
                       </a:solidFill>
                       <a:prstDash val="solid"/>
                       <a:round/>
@@ -11662,7 +11745,7 @@
                     </a:lnR>
                     <a:lnT w="6350" cap="flat" cmpd="sng" algn="ctr">
                       <a:solidFill>
-                        <a:srgbClr val="E9E4DA"/>
+                        <a:srgbClr val="E6E1D8"/>
                       </a:solidFill>
                       <a:prstDash val="solid"/>
                       <a:round/>
@@ -11671,7 +11754,7 @@
                     </a:lnT>
                     <a:lnB w="6350" cap="flat" cmpd="sng" algn="ctr">
                       <a:solidFill>
-                        <a:srgbClr val="E9E4DA"/>
+                        <a:srgbClr val="E6E1D8"/>
                       </a:solidFill>
                       <a:prstDash val="solid"/>
                       <a:round/>
@@ -11696,7 +11779,7 @@
                       <a:r>
                         <a:rPr lang="en-US" sz="1050" b="1" dirty="0">
                           <a:solidFill>
-                            <a:srgbClr val="0B0B0B"/>
+                            <a:srgbClr val="0E2238"/>
                           </a:solidFill>
                           <a:latin typeface="+mn-lt" pitchFamily="34" charset="0"/>
                           <a:ea typeface="+mn-lt" pitchFamily="34" charset="-122"/>
@@ -11714,7 +11797,7 @@
                   <a:tcPr marL="91440" marR="91440" marT="45720" marB="45720" anchor="ctr">
                     <a:lnL w="6350" cap="flat" cmpd="sng" algn="ctr">
                       <a:solidFill>
-                        <a:srgbClr val="E9E4DA"/>
+                        <a:srgbClr val="E6E1D8"/>
                       </a:solidFill>
                       <a:prstDash val="solid"/>
                       <a:round/>
@@ -11723,7 +11806,7 @@
                     </a:lnL>
                     <a:lnR w="6350" cap="flat" cmpd="sng" algn="ctr">
                       <a:solidFill>
-                        <a:srgbClr val="E9E4DA"/>
+                        <a:srgbClr val="E6E1D8"/>
                       </a:solidFill>
                       <a:prstDash val="solid"/>
                       <a:round/>
@@ -11732,7 +11815,7 @@
                     </a:lnR>
                     <a:lnT w="6350" cap="flat" cmpd="sng" algn="ctr">
                       <a:solidFill>
-                        <a:srgbClr val="E9E4DA"/>
+                        <a:srgbClr val="E6E1D8"/>
                       </a:solidFill>
                       <a:prstDash val="solid"/>
                       <a:round/>
@@ -11741,7 +11824,7 @@
                     </a:lnT>
                     <a:lnB w="6350" cap="flat" cmpd="sng" algn="ctr">
                       <a:solidFill>
-                        <a:srgbClr val="E9E4DA"/>
+                        <a:srgbClr val="E6E1D8"/>
                       </a:solidFill>
                       <a:prstDash val="solid"/>
                       <a:round/>
@@ -11749,7 +11832,7 @@
                       <a:tailEnd type="none" w="med" len="med"/>
                     </a:lnB>
                     <a:solidFill>
-                      <a:srgbClr val="F4F1EA"/>
+                      <a:srgbClr val="F4F1EB"/>
                     </a:solidFill>
                   </a:tcPr>
                 </a:tc>
@@ -11764,7 +11847,7 @@
                       <a:r>
                         <a:rPr lang="en-US" sz="1050" dirty="0">
                           <a:solidFill>
-                            <a:srgbClr val="2A2D33"/>
+                            <a:srgbClr val="1F3A52"/>
                           </a:solidFill>
                           <a:latin typeface="+mn-lt" pitchFamily="34" charset="0"/>
                           <a:ea typeface="+mn-lt" pitchFamily="34" charset="-122"/>
@@ -11782,7 +11865,7 @@
                   <a:tcPr marL="91440" marR="91440" marT="45720" marB="45720" anchor="ctr">
                     <a:lnL w="6350" cap="flat" cmpd="sng" algn="ctr">
                       <a:solidFill>
-                        <a:srgbClr val="E9E4DA"/>
+                        <a:srgbClr val="E6E1D8"/>
                       </a:solidFill>
                       <a:prstDash val="solid"/>
                       <a:round/>
@@ -11791,7 +11874,7 @@
                     </a:lnL>
                     <a:lnR w="6350" cap="flat" cmpd="sng" algn="ctr">
                       <a:solidFill>
-                        <a:srgbClr val="E9E4DA"/>
+                        <a:srgbClr val="E6E1D8"/>
                       </a:solidFill>
                       <a:prstDash val="solid"/>
                       <a:round/>
@@ -11800,7 +11883,7 @@
                     </a:lnR>
                     <a:lnT w="6350" cap="flat" cmpd="sng" algn="ctr">
                       <a:solidFill>
-                        <a:srgbClr val="E9E4DA"/>
+                        <a:srgbClr val="E6E1D8"/>
                       </a:solidFill>
                       <a:prstDash val="solid"/>
                       <a:round/>
@@ -11809,7 +11892,7 @@
                     </a:lnT>
                     <a:lnB w="6350" cap="flat" cmpd="sng" algn="ctr">
                       <a:solidFill>
-                        <a:srgbClr val="E9E4DA"/>
+                        <a:srgbClr val="E6E1D8"/>
                       </a:solidFill>
                       <a:prstDash val="solid"/>
                       <a:round/>
@@ -11817,7 +11900,7 @@
                       <a:tailEnd type="none" w="med" len="med"/>
                     </a:lnB>
                     <a:solidFill>
-                      <a:srgbClr val="F4F1EA"/>
+                      <a:srgbClr val="F4F1EB"/>
                     </a:solidFill>
                   </a:tcPr>
                 </a:tc>
@@ -11834,7 +11917,7 @@
                       <a:r>
                         <a:rPr lang="en-US" sz="1050" b="1" dirty="0">
                           <a:solidFill>
-                            <a:srgbClr val="0B0B0B"/>
+                            <a:srgbClr val="0E2238"/>
                           </a:solidFill>
                           <a:latin typeface="+mn-lt" pitchFamily="34" charset="0"/>
                           <a:ea typeface="+mn-lt" pitchFamily="34" charset="-122"/>
@@ -11852,7 +11935,7 @@
                   <a:tcPr marL="91440" marR="91440" marT="45720" marB="45720" anchor="ctr">
                     <a:lnL w="6350" cap="flat" cmpd="sng" algn="ctr">
                       <a:solidFill>
-                        <a:srgbClr val="E9E4DA"/>
+                        <a:srgbClr val="E6E1D8"/>
                       </a:solidFill>
                       <a:prstDash val="solid"/>
                       <a:round/>
@@ -11861,7 +11944,7 @@
                     </a:lnL>
                     <a:lnR w="6350" cap="flat" cmpd="sng" algn="ctr">
                       <a:solidFill>
-                        <a:srgbClr val="E9E4DA"/>
+                        <a:srgbClr val="E6E1D8"/>
                       </a:solidFill>
                       <a:prstDash val="solid"/>
                       <a:round/>
@@ -11870,7 +11953,7 @@
                     </a:lnR>
                     <a:lnT w="6350" cap="flat" cmpd="sng" algn="ctr">
                       <a:solidFill>
-                        <a:srgbClr val="E9E4DA"/>
+                        <a:srgbClr val="E6E1D8"/>
                       </a:solidFill>
                       <a:prstDash val="solid"/>
                       <a:round/>
@@ -11879,7 +11962,7 @@
                     </a:lnT>
                     <a:lnB w="6350" cap="flat" cmpd="sng" algn="ctr">
                       <a:solidFill>
-                        <a:srgbClr val="E9E4DA"/>
+                        <a:srgbClr val="E6E1D8"/>
                       </a:solidFill>
                       <a:prstDash val="solid"/>
                       <a:round/>
@@ -11902,7 +11985,7 @@
                       <a:r>
                         <a:rPr lang="en-US" sz="1050" dirty="0">
                           <a:solidFill>
-                            <a:srgbClr val="2A2D33"/>
+                            <a:srgbClr val="1F3A52"/>
                           </a:solidFill>
                           <a:latin typeface="+mn-lt" pitchFamily="34" charset="0"/>
                           <a:ea typeface="+mn-lt" pitchFamily="34" charset="-122"/>
@@ -11920,7 +12003,7 @@
                   <a:tcPr marL="91440" marR="91440" marT="45720" marB="45720" anchor="ctr">
                     <a:lnL w="6350" cap="flat" cmpd="sng" algn="ctr">
                       <a:solidFill>
-                        <a:srgbClr val="E9E4DA"/>
+                        <a:srgbClr val="E6E1D8"/>
                       </a:solidFill>
                       <a:prstDash val="solid"/>
                       <a:round/>
@@ -11929,7 +12012,7 @@
                     </a:lnL>
                     <a:lnR w="6350" cap="flat" cmpd="sng" algn="ctr">
                       <a:solidFill>
-                        <a:srgbClr val="E9E4DA"/>
+                        <a:srgbClr val="E6E1D8"/>
                       </a:solidFill>
                       <a:prstDash val="solid"/>
                       <a:round/>
@@ -11938,7 +12021,7 @@
                     </a:lnR>
                     <a:lnT w="6350" cap="flat" cmpd="sng" algn="ctr">
                       <a:solidFill>
-                        <a:srgbClr val="E9E4DA"/>
+                        <a:srgbClr val="E6E1D8"/>
                       </a:solidFill>
                       <a:prstDash val="solid"/>
                       <a:round/>
@@ -11947,7 +12030,7 @@
                     </a:lnT>
                     <a:lnB w="6350" cap="flat" cmpd="sng" algn="ctr">
                       <a:solidFill>
-                        <a:srgbClr val="E9E4DA"/>
+                        <a:srgbClr val="E6E1D8"/>
                       </a:solidFill>
                       <a:prstDash val="solid"/>
                       <a:round/>
@@ -11972,7 +12055,7 @@
                       <a:r>
                         <a:rPr lang="en-US" sz="1050" b="1" dirty="0">
                           <a:solidFill>
-                            <a:srgbClr val="0B0B0B"/>
+                            <a:srgbClr val="0E2238"/>
                           </a:solidFill>
                           <a:latin typeface="+mn-lt" pitchFamily="34" charset="0"/>
                           <a:ea typeface="+mn-lt" pitchFamily="34" charset="-122"/>
@@ -11990,7 +12073,7 @@
                   <a:tcPr marL="91440" marR="91440" marT="45720" marB="45720" anchor="ctr">
                     <a:lnL w="6350" cap="flat" cmpd="sng" algn="ctr">
                       <a:solidFill>
-                        <a:srgbClr val="E9E4DA"/>
+                        <a:srgbClr val="E6E1D8"/>
                       </a:solidFill>
                       <a:prstDash val="solid"/>
                       <a:round/>
@@ -11999,7 +12082,7 @@
                     </a:lnL>
                     <a:lnR w="6350" cap="flat" cmpd="sng" algn="ctr">
                       <a:solidFill>
-                        <a:srgbClr val="E9E4DA"/>
+                        <a:srgbClr val="E6E1D8"/>
                       </a:solidFill>
                       <a:prstDash val="solid"/>
                       <a:round/>
@@ -12008,7 +12091,7 @@
                     </a:lnR>
                     <a:lnT w="6350" cap="flat" cmpd="sng" algn="ctr">
                       <a:solidFill>
-                        <a:srgbClr val="E9E4DA"/>
+                        <a:srgbClr val="E6E1D8"/>
                       </a:solidFill>
                       <a:prstDash val="solid"/>
                       <a:round/>
@@ -12017,7 +12100,7 @@
                     </a:lnT>
                     <a:lnB w="6350" cap="flat" cmpd="sng" algn="ctr">
                       <a:solidFill>
-                        <a:srgbClr val="E9E4DA"/>
+                        <a:srgbClr val="E6E1D8"/>
                       </a:solidFill>
                       <a:prstDash val="solid"/>
                       <a:round/>
@@ -12025,7 +12108,7 @@
                       <a:tailEnd type="none" w="med" len="med"/>
                     </a:lnB>
                     <a:solidFill>
-                      <a:srgbClr val="F4F1EA"/>
+                      <a:srgbClr val="F4F1EB"/>
                     </a:solidFill>
                   </a:tcPr>
                 </a:tc>
@@ -12040,7 +12123,7 @@
                       <a:r>
                         <a:rPr lang="en-US" sz="1050" dirty="0">
                           <a:solidFill>
-                            <a:srgbClr val="2A2D33"/>
+                            <a:srgbClr val="1F3A52"/>
                           </a:solidFill>
                           <a:latin typeface="+mn-lt" pitchFamily="34" charset="0"/>
                           <a:ea typeface="+mn-lt" pitchFamily="34" charset="-122"/>
@@ -12058,7 +12141,7 @@
                   <a:tcPr marL="91440" marR="91440" marT="45720" marB="45720" anchor="ctr">
                     <a:lnL w="6350" cap="flat" cmpd="sng" algn="ctr">
                       <a:solidFill>
-                        <a:srgbClr val="E9E4DA"/>
+                        <a:srgbClr val="E6E1D8"/>
                       </a:solidFill>
                       <a:prstDash val="solid"/>
                       <a:round/>
@@ -12067,7 +12150,7 @@
                     </a:lnL>
                     <a:lnR w="6350" cap="flat" cmpd="sng" algn="ctr">
                       <a:solidFill>
-                        <a:srgbClr val="E9E4DA"/>
+                        <a:srgbClr val="E6E1D8"/>
                       </a:solidFill>
                       <a:prstDash val="solid"/>
                       <a:round/>
@@ -12076,7 +12159,7 @@
                     </a:lnR>
                     <a:lnT w="6350" cap="flat" cmpd="sng" algn="ctr">
                       <a:solidFill>
-                        <a:srgbClr val="E9E4DA"/>
+                        <a:srgbClr val="E6E1D8"/>
                       </a:solidFill>
                       <a:prstDash val="solid"/>
                       <a:round/>
@@ -12085,7 +12168,7 @@
                     </a:lnT>
                     <a:lnB w="6350" cap="flat" cmpd="sng" algn="ctr">
                       <a:solidFill>
-                        <a:srgbClr val="E9E4DA"/>
+                        <a:srgbClr val="E6E1D8"/>
                       </a:solidFill>
                       <a:prstDash val="solid"/>
                       <a:round/>
@@ -12093,7 +12176,7 @@
                       <a:tailEnd type="none" w="med" len="med"/>
                     </a:lnB>
                     <a:solidFill>
-                      <a:srgbClr val="F4F1EA"/>
+                      <a:srgbClr val="F4F1EB"/>
                     </a:solidFill>
                   </a:tcPr>
                 </a:tc>
@@ -12110,7 +12193,7 @@
                       <a:r>
                         <a:rPr lang="en-US" sz="1050" b="1" dirty="0">
                           <a:solidFill>
-                            <a:srgbClr val="0B0B0B"/>
+                            <a:srgbClr val="0E2238"/>
                           </a:solidFill>
                           <a:latin typeface="+mn-lt" pitchFamily="34" charset="0"/>
                           <a:ea typeface="+mn-lt" pitchFamily="34" charset="-122"/>
@@ -12128,7 +12211,7 @@
                   <a:tcPr marL="91440" marR="91440" marT="45720" marB="45720" anchor="ctr">
                     <a:lnL w="6350" cap="flat" cmpd="sng" algn="ctr">
                       <a:solidFill>
-                        <a:srgbClr val="E9E4DA"/>
+                        <a:srgbClr val="E6E1D8"/>
                       </a:solidFill>
                       <a:prstDash val="solid"/>
                       <a:round/>
@@ -12137,7 +12220,7 @@
                     </a:lnL>
                     <a:lnR w="6350" cap="flat" cmpd="sng" algn="ctr">
                       <a:solidFill>
-                        <a:srgbClr val="E9E4DA"/>
+                        <a:srgbClr val="E6E1D8"/>
                       </a:solidFill>
                       <a:prstDash val="solid"/>
                       <a:round/>
@@ -12146,7 +12229,7 @@
                     </a:lnR>
                     <a:lnT w="6350" cap="flat" cmpd="sng" algn="ctr">
                       <a:solidFill>
-                        <a:srgbClr val="E9E4DA"/>
+                        <a:srgbClr val="E6E1D8"/>
                       </a:solidFill>
                       <a:prstDash val="solid"/>
                       <a:round/>
@@ -12155,7 +12238,7 @@
                     </a:lnT>
                     <a:lnB w="6350" cap="flat" cmpd="sng" algn="ctr">
                       <a:solidFill>
-                        <a:srgbClr val="E9E4DA"/>
+                        <a:srgbClr val="E6E1D8"/>
                       </a:solidFill>
                       <a:prstDash val="solid"/>
                       <a:round/>
@@ -12178,7 +12261,7 @@
                       <a:r>
                         <a:rPr lang="en-US" sz="1050" dirty="0">
                           <a:solidFill>
-                            <a:srgbClr val="2A2D33"/>
+                            <a:srgbClr val="1F3A52"/>
                           </a:solidFill>
                           <a:latin typeface="+mn-lt" pitchFamily="34" charset="0"/>
                           <a:ea typeface="+mn-lt" pitchFamily="34" charset="-122"/>
@@ -12196,7 +12279,7 @@
                   <a:tcPr marL="91440" marR="91440" marT="45720" marB="45720" anchor="ctr">
                     <a:lnL w="6350" cap="flat" cmpd="sng" algn="ctr">
                       <a:solidFill>
-                        <a:srgbClr val="E9E4DA"/>
+                        <a:srgbClr val="E6E1D8"/>
                       </a:solidFill>
                       <a:prstDash val="solid"/>
                       <a:round/>
@@ -12205,7 +12288,7 @@
                     </a:lnL>
                     <a:lnR w="6350" cap="flat" cmpd="sng" algn="ctr">
                       <a:solidFill>
-                        <a:srgbClr val="E9E4DA"/>
+                        <a:srgbClr val="E6E1D8"/>
                       </a:solidFill>
                       <a:prstDash val="solid"/>
                       <a:round/>
@@ -12214,7 +12297,7 @@
                     </a:lnR>
                     <a:lnT w="6350" cap="flat" cmpd="sng" algn="ctr">
                       <a:solidFill>
-                        <a:srgbClr val="E9E4DA"/>
+                        <a:srgbClr val="E6E1D8"/>
                       </a:solidFill>
                       <a:prstDash val="solid"/>
                       <a:round/>
@@ -12223,7 +12306,7 @@
                     </a:lnT>
                     <a:lnB w="6350" cap="flat" cmpd="sng" algn="ctr">
                       <a:solidFill>
-                        <a:srgbClr val="E9E4DA"/>
+                        <a:srgbClr val="E6E1D8"/>
                       </a:solidFill>
                       <a:prstDash val="solid"/>
                       <a:round/>
@@ -12248,7 +12331,7 @@
                       <a:r>
                         <a:rPr lang="en-US" sz="1050" b="1" dirty="0">
                           <a:solidFill>
-                            <a:srgbClr val="0B0B0B"/>
+                            <a:srgbClr val="0E2238"/>
                           </a:solidFill>
                           <a:latin typeface="+mn-lt" pitchFamily="34" charset="0"/>
                           <a:ea typeface="+mn-lt" pitchFamily="34" charset="-122"/>
@@ -12266,7 +12349,7 @@
                   <a:tcPr marL="91440" marR="91440" marT="45720" marB="45720" anchor="ctr">
                     <a:lnL w="6350" cap="flat" cmpd="sng" algn="ctr">
                       <a:solidFill>
-                        <a:srgbClr val="E9E4DA"/>
+                        <a:srgbClr val="E6E1D8"/>
                       </a:solidFill>
                       <a:prstDash val="solid"/>
                       <a:round/>
@@ -12275,7 +12358,7 @@
                     </a:lnL>
                     <a:lnR w="6350" cap="flat" cmpd="sng" algn="ctr">
                       <a:solidFill>
-                        <a:srgbClr val="E9E4DA"/>
+                        <a:srgbClr val="E6E1D8"/>
                       </a:solidFill>
                       <a:prstDash val="solid"/>
                       <a:round/>
@@ -12284,7 +12367,7 @@
                     </a:lnR>
                     <a:lnT w="6350" cap="flat" cmpd="sng" algn="ctr">
                       <a:solidFill>
-                        <a:srgbClr val="E9E4DA"/>
+                        <a:srgbClr val="E6E1D8"/>
                       </a:solidFill>
                       <a:prstDash val="solid"/>
                       <a:round/>
@@ -12293,7 +12376,7 @@
                     </a:lnT>
                     <a:lnB w="6350" cap="flat" cmpd="sng" algn="ctr">
                       <a:solidFill>
-                        <a:srgbClr val="E9E4DA"/>
+                        <a:srgbClr val="E6E1D8"/>
                       </a:solidFill>
                       <a:prstDash val="solid"/>
                       <a:round/>
@@ -12301,7 +12384,7 @@
                       <a:tailEnd type="none" w="med" len="med"/>
                     </a:lnB>
                     <a:solidFill>
-                      <a:srgbClr val="F4F1EA"/>
+                      <a:srgbClr val="F4F1EB"/>
                     </a:solidFill>
                   </a:tcPr>
                 </a:tc>
@@ -12316,7 +12399,7 @@
                       <a:r>
                         <a:rPr lang="en-US" sz="1050" dirty="0">
                           <a:solidFill>
-                            <a:srgbClr val="2A2D33"/>
+                            <a:srgbClr val="1F3A52"/>
                           </a:solidFill>
                           <a:latin typeface="+mn-lt" pitchFamily="34" charset="0"/>
                           <a:ea typeface="+mn-lt" pitchFamily="34" charset="-122"/>
@@ -12334,7 +12417,7 @@
                   <a:tcPr marL="91440" marR="91440" marT="45720" marB="45720" anchor="ctr">
                     <a:lnL w="6350" cap="flat" cmpd="sng" algn="ctr">
                       <a:solidFill>
-                        <a:srgbClr val="E9E4DA"/>
+                        <a:srgbClr val="E6E1D8"/>
                       </a:solidFill>
                       <a:prstDash val="solid"/>
                       <a:round/>
@@ -12343,7 +12426,7 @@
                     </a:lnL>
                     <a:lnR w="6350" cap="flat" cmpd="sng" algn="ctr">
                       <a:solidFill>
-                        <a:srgbClr val="E9E4DA"/>
+                        <a:srgbClr val="E6E1D8"/>
                       </a:solidFill>
                       <a:prstDash val="solid"/>
                       <a:round/>
@@ -12352,7 +12435,7 @@
                     </a:lnR>
                     <a:lnT w="6350" cap="flat" cmpd="sng" algn="ctr">
                       <a:solidFill>
-                        <a:srgbClr val="E9E4DA"/>
+                        <a:srgbClr val="E6E1D8"/>
                       </a:solidFill>
                       <a:prstDash val="solid"/>
                       <a:round/>
@@ -12361,7 +12444,7 @@
                     </a:lnT>
                     <a:lnB w="6350" cap="flat" cmpd="sng" algn="ctr">
                       <a:solidFill>
-                        <a:srgbClr val="E9E4DA"/>
+                        <a:srgbClr val="E6E1D8"/>
                       </a:solidFill>
                       <a:prstDash val="solid"/>
                       <a:round/>
@@ -12369,7 +12452,7 @@
                       <a:tailEnd type="none" w="med" len="med"/>
                     </a:lnB>
                     <a:solidFill>
-                      <a:srgbClr val="F4F1EA"/>
+                      <a:srgbClr val="F4F1EB"/>
                     </a:solidFill>
                   </a:tcPr>
                 </a:tc>
@@ -12380,6 +12463,36 @@
       </p:graphicFrame>
       <p:sp>
         <p:nvSpPr>
+          <p:cNvPr id="5" name="Text 0"/>
+          <p:cNvSpPr/>
+          <p:nvPr>
+            <p:ph idx="101" type="title" hasCustomPrompt="1"/>
+          </p:nvPr>
+        </p:nvSpPr>
+        <p:spPr>
+          <a:xfrm>
+            <a:off x="457200" y="420624"/>
+            <a:ext cx="8229600" cy="731520"/>
+          </a:xfrm>
+          <a:prstGeom prst="rect">
+            <a:avLst/>
+          </a:prstGeom>
+          <a:noFill/>
+          <a:ln/>
+        </p:spPr>
+        <p:txBody>
+          <a:bodyPr wrap="square" lIns="0" tIns="0" rIns="0" bIns="0" rtlCol="0" anchor="t"/>
+          <a:lstStyle/>
+          <a:p>
+            <a:pPr algn="l" indent="0" marL="0">
+              <a:buNone/>
+            </a:pPr>
+            <a:endParaRPr lang="en-US" sz="2600" dirty="0"/>
+          </a:p>
+        </p:txBody>
+      </p:sp>
+      <p:sp>
+        <p:nvSpPr>
           <p:cNvPr id="25" name="Slide Number Placeholder 0"/>
           <p:cNvSpPr>
             <a:spLocks noGrp="1"/>
@@ -12408,7 +12521,7 @@
             <a:lvl1pPr>
               <a:defRPr sz="900">
                 <a:solidFill>
-                  <a:srgbClr val="6B6F76"/>
+                  <a:srgbClr val="6E7B88"/>
                 </a:solidFill>
               </a:defRPr>
             </a:lvl1pPr>
@@ -12450,16 +12563,14 @@
       </p:grpSpPr>
       <p:sp>
         <p:nvSpPr>
-          <p:cNvPr id="2" name="Text 3"/>
-          <p:cNvSpPr/>
-          <p:nvPr>
-            <p:ph idx="103" type="title" hasCustomPrompt="1"/>
-          </p:nvPr>
-        </p:nvSpPr>
-        <p:spPr>
-          <a:xfrm>
-            <a:off x="457200" y="347472"/>
-            <a:ext cx="8229600" cy="685800"/>
+          <p:cNvPr id="2" name="Text 0"/>
+          <p:cNvSpPr txBox="1"/>
+          <p:nvPr/>
+        </p:nvSpPr>
+        <p:spPr>
+          <a:xfrm>
+            <a:off x="457200" y="402336"/>
+            <a:ext cx="8229600" cy="749808"/>
           </a:xfrm>
           <a:prstGeom prst="rect">
             <a:avLst/>
@@ -12468,17 +12579,20 @@
           <a:ln/>
         </p:spPr>
         <p:txBody>
-          <a:bodyPr wrap="square" lIns="0" tIns="0" rIns="0" bIns="0" rtlCol="0" anchor="ctr"/>
-          <a:lstStyle/>
-          <a:p>
-            <a:pPr algn="l" indent="0" marL="0">
-              <a:buNone/>
-            </a:pPr>
-            <a:r>
-              <a:rPr lang="en-US" sz="2600" b="1" dirty="0">
-                <a:solidFill>
-                  <a:srgbClr val="0B0B0B"/>
-                </a:solidFill>
+          <a:bodyPr wrap="square" lIns="0" tIns="0" rIns="0" bIns="0" rtlCol="0" anchor="t"/>
+          <a:lstStyle/>
+          <a:p>
+            <a:pPr algn="l" indent="0" marL="0">
+              <a:buNone/>
+            </a:pPr>
+            <a:r>
+              <a:rPr lang="en-US" altLang="en-US" sz="2600" b="1" dirty="0">
+                <a:solidFill>
+                  <a:schemeClr val="tx1"/>
+                </a:solidFill>
+                <a:latin typeface="Cambria" pitchFamily="34" charset="0"/>
+                <a:ea typeface="Cambria" pitchFamily="34" charset="-122"/>
+                <a:cs typeface="Cambria" pitchFamily="34" charset="-120"/>
               </a:rPr>
               <a:t>Compliance and protecting both parties</a:t>
             </a:r>
@@ -12537,11 +12651,11 @@
             <a:avLst/>
           </a:prstGeom>
           <a:solidFill>
-            <a:srgbClr val="F4F1EA"/>
+            <a:srgbClr val="F4F1EB"/>
           </a:solidFill>
           <a:ln w="12700">
             <a:solidFill>
-              <a:srgbClr val="F4F1EA"/>
+              <a:srgbClr val="F4F1EB"/>
             </a:solidFill>
             <a:prstDash val="solid"/>
           </a:ln>
@@ -12642,11 +12756,11 @@
             <a:avLst/>
           </a:prstGeom>
           <a:solidFill>
-            <a:srgbClr val="F4F1EA"/>
+            <a:srgbClr val="F4F1EB"/>
           </a:solidFill>
           <a:ln w="12700">
             <a:solidFill>
-              <a:srgbClr val="F4F1EA"/>
+              <a:srgbClr val="F4F1EB"/>
             </a:solidFill>
             <a:prstDash val="solid"/>
           </a:ln>
@@ -12747,11 +12861,11 @@
             <a:avLst/>
           </a:prstGeom>
           <a:solidFill>
-            <a:srgbClr val="F4F1EA"/>
+            <a:srgbClr val="F4F1EB"/>
           </a:solidFill>
           <a:ln w="12700">
             <a:solidFill>
-              <a:srgbClr val="F4F1EA"/>
+              <a:srgbClr val="F4F1EB"/>
             </a:solidFill>
             <a:prstDash val="solid"/>
           </a:ln>
@@ -12852,11 +12966,11 @@
             <a:avLst/>
           </a:prstGeom>
           <a:solidFill>
-            <a:srgbClr val="F4F1EA"/>
+            <a:srgbClr val="F4F1EB"/>
           </a:solidFill>
           <a:ln w="12700">
             <a:solidFill>
-              <a:srgbClr val="F4F1EA"/>
+              <a:srgbClr val="F4F1EB"/>
             </a:solidFill>
             <a:prstDash val="solid"/>
           </a:ln>
@@ -12957,11 +13071,11 @@
             <a:avLst/>
           </a:prstGeom>
           <a:solidFill>
-            <a:srgbClr val="F4F1EA"/>
+            <a:srgbClr val="F4F1EB"/>
           </a:solidFill>
           <a:ln w="12700">
             <a:solidFill>
-              <a:srgbClr val="F4F1EA"/>
+              <a:srgbClr val="F4F1EB"/>
             </a:solidFill>
             <a:prstDash val="solid"/>
           </a:ln>
@@ -13049,6 +13163,36 @@
       </p:sp>
       <p:sp>
         <p:nvSpPr>
+          <p:cNvPr id="19" name="Text 0"/>
+          <p:cNvSpPr/>
+          <p:nvPr>
+            <p:ph idx="101" type="title" hasCustomPrompt="1"/>
+          </p:nvPr>
+        </p:nvSpPr>
+        <p:spPr>
+          <a:xfrm>
+            <a:off x="457200" y="420624"/>
+            <a:ext cx="8229600" cy="731520"/>
+          </a:xfrm>
+          <a:prstGeom prst="rect">
+            <a:avLst/>
+          </a:prstGeom>
+          <a:noFill/>
+          <a:ln/>
+        </p:spPr>
+        <p:txBody>
+          <a:bodyPr wrap="square" lIns="0" tIns="0" rIns="0" bIns="0" rtlCol="0" anchor="t"/>
+          <a:lstStyle/>
+          <a:p>
+            <a:pPr algn="l" indent="0" marL="0">
+              <a:buNone/>
+            </a:pPr>
+            <a:endParaRPr lang="en-US" sz="2600" dirty="0"/>
+          </a:p>
+        </p:txBody>
+      </p:sp>
+      <p:sp>
+        <p:nvSpPr>
           <p:cNvPr id="25" name="Slide Number Placeholder 0"/>
           <p:cNvSpPr>
             <a:spLocks noGrp="1"/>
@@ -13077,7 +13221,7 @@
             <a:lvl1pPr>
               <a:defRPr sz="900">
                 <a:solidFill>
-                  <a:srgbClr val="6B6F76"/>
+                  <a:srgbClr val="6E7B88"/>
                 </a:solidFill>
               </a:defRPr>
             </a:lvl1pPr>
@@ -13164,8 +13308,8 @@
         </p:nvSpPr>
         <p:spPr>
           <a:xfrm>
-            <a:off x="457200" y="2834640"/>
-            <a:ext cx="7772400" cy="731520"/>
+            <a:off x="457200" y="2743200"/>
+            <a:ext cx="7772400" cy="868680"/>
           </a:xfrm>
           <a:prstGeom prst="rect">
             <a:avLst/>
@@ -13174,7 +13318,7 @@
           <a:ln/>
         </p:spPr>
         <p:txBody>
-          <a:bodyPr wrap="square" lIns="0" tIns="0" rIns="0" bIns="0" rtlCol="0" anchor="t"/>
+          <a:bodyPr wrap="square" lIns="0" tIns="0" rIns="0" bIns="0" rtlCol="0" anchor="b"/>
           <a:lstStyle/>
           <a:p>
             <a:pPr algn="l" indent="0" marL="0">
@@ -13203,8 +13347,8 @@
         </p:nvSpPr>
         <p:spPr>
           <a:xfrm>
-            <a:off x="457200" y="3566160"/>
-            <a:ext cx="7772400" cy="548640"/>
+            <a:off x="457200" y="3675888"/>
+            <a:ext cx="7772400" cy="502920"/>
           </a:xfrm>
           <a:prstGeom prst="rect">
             <a:avLst/>
@@ -13213,7 +13357,7 @@
           <a:ln/>
         </p:spPr>
         <p:txBody>
-          <a:bodyPr wrap="square" lIns="0" tIns="0" rIns="0" bIns="0" rtlCol="0" anchor="ctr"/>
+          <a:bodyPr wrap="square" lIns="0" tIns="0" rIns="0" bIns="0" rtlCol="0" anchor="t"/>
           <a:lstStyle/>
           <a:p>
             <a:pPr algn="l" indent="0" marL="0">
@@ -13261,7 +13405,7 @@
             <a:lvl1pPr>
               <a:defRPr sz="900">
                 <a:solidFill>
-                  <a:srgbClr val="D8C39A"/>
+                  <a:srgbClr val="D9B38C"/>
                 </a:solidFill>
               </a:defRPr>
             </a:lvl1pPr>
@@ -13303,16 +13447,14 @@
       </p:grpSpPr>
       <p:sp>
         <p:nvSpPr>
-          <p:cNvPr id="2" name="Text 3"/>
-          <p:cNvSpPr/>
-          <p:nvPr>
-            <p:ph idx="103" type="title" hasCustomPrompt="1"/>
-          </p:nvPr>
-        </p:nvSpPr>
-        <p:spPr>
-          <a:xfrm>
-            <a:off x="457200" y="347472"/>
-            <a:ext cx="8229600" cy="685800"/>
+          <p:cNvPr id="2" name="Text 0"/>
+          <p:cNvSpPr txBox="1"/>
+          <p:nvPr/>
+        </p:nvSpPr>
+        <p:spPr>
+          <a:xfrm>
+            <a:off x="457200" y="402336"/>
+            <a:ext cx="8229600" cy="749808"/>
           </a:xfrm>
           <a:prstGeom prst="rect">
             <a:avLst/>
@@ -13321,17 +13463,20 @@
           <a:ln/>
         </p:spPr>
         <p:txBody>
-          <a:bodyPr wrap="square" lIns="0" tIns="0" rIns="0" bIns="0" rtlCol="0" anchor="ctr"/>
-          <a:lstStyle/>
-          <a:p>
-            <a:pPr algn="l" indent="0" marL="0">
-              <a:buNone/>
-            </a:pPr>
-            <a:r>
-              <a:rPr lang="en-US" sz="2600" b="1" dirty="0">
-                <a:solidFill>
-                  <a:srgbClr val="0B0B0B"/>
-                </a:solidFill>
+          <a:bodyPr wrap="square" lIns="0" tIns="0" rIns="0" bIns="0" rtlCol="0" anchor="t"/>
+          <a:lstStyle/>
+          <a:p>
+            <a:pPr algn="l" indent="0" marL="0">
+              <a:buNone/>
+            </a:pPr>
+            <a:r>
+              <a:rPr lang="en-US" altLang="en-US" sz="2600" b="1" dirty="0">
+                <a:solidFill>
+                  <a:schemeClr val="tx1"/>
+                </a:solidFill>
+                <a:latin typeface="Cambria" pitchFamily="34" charset="0"/>
+                <a:ea typeface="Cambria" pitchFamily="34" charset="-122"/>
+                <a:cs typeface="Cambria" pitchFamily="34" charset="-120"/>
               </a:rPr>
               <a:t>What we do with you</a:t>
             </a:r>
@@ -13390,11 +13535,11 @@
             <a:avLst/>
           </a:prstGeom>
           <a:solidFill>
-            <a:srgbClr val="F4F1EA"/>
+            <a:srgbClr val="F4F1EB"/>
           </a:solidFill>
           <a:ln w="12700">
             <a:solidFill>
-              <a:srgbClr val="F4F1EA"/>
+              <a:srgbClr val="F4F1EB"/>
             </a:solidFill>
             <a:prstDash val="solid"/>
           </a:ln>
@@ -13495,11 +13640,11 @@
             <a:avLst/>
           </a:prstGeom>
           <a:solidFill>
-            <a:srgbClr val="F4F1EA"/>
+            <a:srgbClr val="F4F1EB"/>
           </a:solidFill>
           <a:ln w="12700">
             <a:solidFill>
-              <a:srgbClr val="F4F1EA"/>
+              <a:srgbClr val="F4F1EB"/>
             </a:solidFill>
             <a:prstDash val="solid"/>
           </a:ln>
@@ -13600,11 +13745,11 @@
             <a:avLst/>
           </a:prstGeom>
           <a:solidFill>
-            <a:srgbClr val="F4F1EA"/>
+            <a:srgbClr val="F4F1EB"/>
           </a:solidFill>
           <a:ln w="12700">
             <a:solidFill>
-              <a:srgbClr val="F4F1EA"/>
+              <a:srgbClr val="F4F1EB"/>
             </a:solidFill>
             <a:prstDash val="solid"/>
           </a:ln>
@@ -13705,11 +13850,11 @@
             <a:avLst/>
           </a:prstGeom>
           <a:solidFill>
-            <a:srgbClr val="F4F1EA"/>
+            <a:srgbClr val="F4F1EB"/>
           </a:solidFill>
           <a:ln w="12700">
             <a:solidFill>
-              <a:srgbClr val="F4F1EA"/>
+              <a:srgbClr val="F4F1EB"/>
             </a:solidFill>
             <a:prstDash val="solid"/>
           </a:ln>
@@ -13810,11 +13955,11 @@
             <a:avLst/>
           </a:prstGeom>
           <a:solidFill>
-            <a:srgbClr val="F4F1EA"/>
+            <a:srgbClr val="F4F1EB"/>
           </a:solidFill>
           <a:ln w="12700">
             <a:solidFill>
-              <a:srgbClr val="F4F1EA"/>
+              <a:srgbClr val="F4F1EB"/>
             </a:solidFill>
             <a:prstDash val="solid"/>
           </a:ln>
@@ -13915,11 +14060,11 @@
             <a:avLst/>
           </a:prstGeom>
           <a:solidFill>
-            <a:srgbClr val="F4F1EA"/>
+            <a:srgbClr val="F4F1EB"/>
           </a:solidFill>
           <a:ln w="12700">
             <a:solidFill>
-              <a:srgbClr val="F4F1EA"/>
+              <a:srgbClr val="F4F1EB"/>
             </a:solidFill>
             <a:prstDash val="solid"/>
           </a:ln>
@@ -14007,6 +14152,36 @@
       </p:sp>
       <p:sp>
         <p:nvSpPr>
+          <p:cNvPr id="22" name="Text 0"/>
+          <p:cNvSpPr/>
+          <p:nvPr>
+            <p:ph idx="101" type="title" hasCustomPrompt="1"/>
+          </p:nvPr>
+        </p:nvSpPr>
+        <p:spPr>
+          <a:xfrm>
+            <a:off x="457200" y="420624"/>
+            <a:ext cx="8229600" cy="731520"/>
+          </a:xfrm>
+          <a:prstGeom prst="rect">
+            <a:avLst/>
+          </a:prstGeom>
+          <a:noFill/>
+          <a:ln/>
+        </p:spPr>
+        <p:txBody>
+          <a:bodyPr wrap="square" lIns="0" tIns="0" rIns="0" bIns="0" rtlCol="0" anchor="t"/>
+          <a:lstStyle/>
+          <a:p>
+            <a:pPr algn="l" indent="0" marL="0">
+              <a:buNone/>
+            </a:pPr>
+            <a:endParaRPr lang="en-US" sz="2600" dirty="0"/>
+          </a:p>
+        </p:txBody>
+      </p:sp>
+      <p:sp>
+        <p:nvSpPr>
           <p:cNvPr id="25" name="Slide Number Placeholder 0"/>
           <p:cNvSpPr>
             <a:spLocks noGrp="1"/>
@@ -14035,7 +14210,7 @@
             <a:lvl1pPr>
               <a:defRPr sz="900">
                 <a:solidFill>
-                  <a:srgbClr val="6B6F76"/>
+                  <a:srgbClr val="6E7B88"/>
                 </a:solidFill>
               </a:defRPr>
             </a:lvl1pPr>
@@ -14077,16 +14252,14 @@
       </p:grpSpPr>
       <p:sp>
         <p:nvSpPr>
-          <p:cNvPr id="2" name="Text 3"/>
-          <p:cNvSpPr/>
-          <p:nvPr>
-            <p:ph idx="103" type="title" hasCustomPrompt="1"/>
-          </p:nvPr>
-        </p:nvSpPr>
-        <p:spPr>
-          <a:xfrm>
-            <a:off x="457200" y="347472"/>
-            <a:ext cx="8229600" cy="685800"/>
+          <p:cNvPr id="2" name="Text 0"/>
+          <p:cNvSpPr txBox="1"/>
+          <p:nvPr/>
+        </p:nvSpPr>
+        <p:spPr>
+          <a:xfrm>
+            <a:off x="457200" y="402336"/>
+            <a:ext cx="8229600" cy="749808"/>
           </a:xfrm>
           <a:prstGeom prst="rect">
             <a:avLst/>
@@ -14095,17 +14268,20 @@
           <a:ln/>
         </p:spPr>
         <p:txBody>
-          <a:bodyPr wrap="square" lIns="0" tIns="0" rIns="0" bIns="0" rtlCol="0" anchor="ctr"/>
-          <a:lstStyle/>
-          <a:p>
-            <a:pPr algn="l" indent="0" marL="0">
-              <a:buNone/>
-            </a:pPr>
-            <a:r>
-              <a:rPr lang="en-US" sz="2600" b="1" dirty="0">
-                <a:solidFill>
-                  <a:srgbClr val="0B0B0B"/>
-                </a:solidFill>
+          <a:bodyPr wrap="square" lIns="0" tIns="0" rIns="0" bIns="0" rtlCol="0" anchor="t"/>
+          <a:lstStyle/>
+          <a:p>
+            <a:pPr algn="l" indent="0" marL="0">
+              <a:buNone/>
+            </a:pPr>
+            <a:r>
+              <a:rPr lang="en-US" altLang="en-US" sz="2600" b="1" dirty="0">
+                <a:solidFill>
+                  <a:schemeClr val="tx1"/>
+                </a:solidFill>
+                <a:latin typeface="Cambria" pitchFamily="34" charset="0"/>
+                <a:ea typeface="Cambria" pitchFamily="34" charset="-122"/>
+                <a:cs typeface="Cambria" pitchFamily="34" charset="-120"/>
               </a:rPr>
               <a:t>Up and running in three weeks</a:t>
             </a:r>
@@ -14164,11 +14340,11 @@
             <a:avLst/>
           </a:prstGeom>
           <a:solidFill>
-            <a:srgbClr val="0B0B0B"/>
+            <a:srgbClr val="0E2238"/>
           </a:solidFill>
           <a:ln w="12700">
             <a:solidFill>
-              <a:srgbClr val="0B0B0B"/>
+              <a:srgbClr val="0E2238"/>
             </a:solidFill>
             <a:prstDash val="solid"/>
           </a:ln>
@@ -14225,11 +14401,11 @@
             <a:avLst/>
           </a:prstGeom>
           <a:solidFill>
-            <a:srgbClr val="F4F1EA"/>
+            <a:srgbClr val="F4F1EB"/>
           </a:solidFill>
           <a:ln w="12700">
             <a:solidFill>
-              <a:srgbClr val="F4F1EA"/>
+              <a:srgbClr val="F4F1EB"/>
             </a:solidFill>
             <a:prstDash val="solid"/>
           </a:ln>
@@ -14362,11 +14538,11 @@
             <a:avLst/>
           </a:prstGeom>
           <a:solidFill>
-            <a:srgbClr val="0B0B0B"/>
+            <a:srgbClr val="0E2238"/>
           </a:solidFill>
           <a:ln w="12700">
             <a:solidFill>
-              <a:srgbClr val="0B0B0B"/>
+              <a:srgbClr val="0E2238"/>
             </a:solidFill>
             <a:prstDash val="solid"/>
           </a:ln>
@@ -14423,11 +14599,11 @@
             <a:avLst/>
           </a:prstGeom>
           <a:solidFill>
-            <a:srgbClr val="F4F1EA"/>
+            <a:srgbClr val="F4F1EB"/>
           </a:solidFill>
           <a:ln w="12700">
             <a:solidFill>
-              <a:srgbClr val="F4F1EA"/>
+              <a:srgbClr val="F4F1EB"/>
             </a:solidFill>
             <a:prstDash val="solid"/>
           </a:ln>
@@ -14560,11 +14736,11 @@
             <a:avLst/>
           </a:prstGeom>
           <a:solidFill>
-            <a:srgbClr val="0B0B0B"/>
+            <a:srgbClr val="0E2238"/>
           </a:solidFill>
           <a:ln w="12700">
             <a:solidFill>
-              <a:srgbClr val="0B0B0B"/>
+              <a:srgbClr val="0E2238"/>
             </a:solidFill>
             <a:prstDash val="solid"/>
           </a:ln>
@@ -14621,11 +14797,11 @@
             <a:avLst/>
           </a:prstGeom>
           <a:solidFill>
-            <a:srgbClr val="F4F1EA"/>
+            <a:srgbClr val="F4F1EB"/>
           </a:solidFill>
           <a:ln w="12700">
             <a:solidFill>
-              <a:srgbClr val="F4F1EA"/>
+              <a:srgbClr val="F4F1EB"/>
             </a:solidFill>
             <a:prstDash val="solid"/>
           </a:ln>
@@ -14740,6 +14916,36 @@
               <a:t>Weekly review during the first month</a:t>
             </a:r>
             <a:endParaRPr lang="en-US" sz="1050" dirty="0"/>
+          </a:p>
+        </p:txBody>
+      </p:sp>
+      <p:sp>
+        <p:nvSpPr>
+          <p:cNvPr id="19" name="Text 0"/>
+          <p:cNvSpPr/>
+          <p:nvPr>
+            <p:ph idx="101" type="title" hasCustomPrompt="1"/>
+          </p:nvPr>
+        </p:nvSpPr>
+        <p:spPr>
+          <a:xfrm>
+            <a:off x="457200" y="420624"/>
+            <a:ext cx="8229600" cy="731520"/>
+          </a:xfrm>
+          <a:prstGeom prst="rect">
+            <a:avLst/>
+          </a:prstGeom>
+          <a:noFill/>
+          <a:ln/>
+        </p:spPr>
+        <p:txBody>
+          <a:bodyPr wrap="square" lIns="0" tIns="0" rIns="0" bIns="0" rtlCol="0" anchor="t"/>
+          <a:lstStyle/>
+          <a:p>
+            <a:pPr algn="l" indent="0" marL="0">
+              <a:buNone/>
+            </a:pPr>
+            <a:endParaRPr lang="en-US" sz="2600" dirty="0"/>
           </a:p>
         </p:txBody>
       </p:sp>
@@ -14773,7 +14979,7 @@
             <a:lvl1pPr>
               <a:defRPr sz="900">
                 <a:solidFill>
-                  <a:srgbClr val="6B6F76"/>
+                  <a:srgbClr val="6E7B88"/>
                 </a:solidFill>
               </a:defRPr>
             </a:lvl1pPr>
@@ -14829,7 +15035,7 @@
           </a:prstGeom>
           <a:ln w="9525">
             <a:solidFill>
-              <a:srgbClr val="B08D57"/>
+              <a:srgbClr val="B5723B"/>
             </a:solidFill>
             <a:prstDash val="solid"/>
           </a:ln>
@@ -14979,7 +15185,7 @@
             <a:lvl1pPr>
               <a:defRPr sz="900">
                 <a:solidFill>
-                  <a:srgbClr val="D8C39A"/>
+                  <a:srgbClr val="D9B38C"/>
                 </a:solidFill>
               </a:defRPr>
             </a:lvl1pPr>
@@ -15035,7 +15241,7 @@
           </a:prstGeom>
           <a:ln w="9525">
             <a:solidFill>
-              <a:srgbClr val="B08D57"/>
+              <a:srgbClr val="B5723B"/>
             </a:solidFill>
             <a:prstDash val="solid"/>
           </a:ln>
@@ -15358,42 +15564,6 @@
       </p:sp>
       <p:sp>
         <p:nvSpPr>
-          <p:cNvPr id="13" name="Text 7"/>
-          <p:cNvSpPr txBox="1"/>
-          <p:nvPr/>
-        </p:nvSpPr>
-        <p:spPr>
-          <a:xfrm>
-            <a:off x="868680" y="4206240"/>
-            <a:ext cx="7406640" cy="365760"/>
-          </a:xfrm>
-          <a:prstGeom prst="rect">
-            <a:avLst/>
-          </a:prstGeom>
-          <a:noFill/>
-          <a:ln/>
-        </p:spPr>
-        <p:txBody>
-          <a:bodyPr wrap="square" lIns="0" tIns="0" rIns="0" bIns="0" rtlCol="0" anchor="ctr"/>
-          <a:lstStyle/>
-          <a:p>
-            <a:pPr algn="l" indent="0" marL="0">
-              <a:buNone/>
-            </a:pPr>
-            <a:r>
-              <a:rPr lang="en-US" altLang="en-US" sz="1000" dirty="0">
-                <a:solidFill>
-                  <a:schemeClr val="accent1"/>
-                </a:solidFill>
-              </a:rPr>
-              <a:t>Rashid Alkaitoob Advocates &amp; Legal Consultants</a:t>
-            </a:r>
-            <a:endParaRPr lang="en-US" sz="1000" dirty="0"/>
-          </a:p>
-        </p:txBody>
-      </p:sp>
-      <p:sp>
-        <p:nvSpPr>
           <p:cNvPr id="25" name="Slide Number Placeholder 0"/>
           <p:cNvSpPr>
             <a:spLocks noGrp="1"/>
@@ -15422,7 +15592,7 @@
             <a:lvl1pPr>
               <a:defRPr sz="900">
                 <a:solidFill>
-                  <a:srgbClr val="D8C39A"/>
+                  <a:srgbClr val="D9B38C"/>
                 </a:solidFill>
               </a:defRPr>
             </a:lvl1pPr>
@@ -15509,8 +15679,8 @@
         </p:nvSpPr>
         <p:spPr>
           <a:xfrm>
-            <a:off x="457200" y="2834640"/>
-            <a:ext cx="7772400" cy="731520"/>
+            <a:off x="457200" y="2743200"/>
+            <a:ext cx="7772400" cy="868680"/>
           </a:xfrm>
           <a:prstGeom prst="rect">
             <a:avLst/>
@@ -15519,7 +15689,7 @@
           <a:ln/>
         </p:spPr>
         <p:txBody>
-          <a:bodyPr wrap="square" lIns="0" tIns="0" rIns="0" bIns="0" rtlCol="0" anchor="t"/>
+          <a:bodyPr wrap="square" lIns="0" tIns="0" rIns="0" bIns="0" rtlCol="0" anchor="b"/>
           <a:lstStyle/>
           <a:p>
             <a:pPr algn="l" indent="0" marL="0">
@@ -15548,8 +15718,8 @@
         </p:nvSpPr>
         <p:spPr>
           <a:xfrm>
-            <a:off x="457200" y="3566160"/>
-            <a:ext cx="7772400" cy="548640"/>
+            <a:off x="457200" y="3675888"/>
+            <a:ext cx="7772400" cy="502920"/>
           </a:xfrm>
           <a:prstGeom prst="rect">
             <a:avLst/>
@@ -15558,7 +15728,7 @@
           <a:ln/>
         </p:spPr>
         <p:txBody>
-          <a:bodyPr wrap="square" lIns="0" tIns="0" rIns="0" bIns="0" rtlCol="0" anchor="ctr"/>
+          <a:bodyPr wrap="square" lIns="0" tIns="0" rIns="0" bIns="0" rtlCol="0" anchor="t"/>
           <a:lstStyle/>
           <a:p>
             <a:pPr algn="l" indent="0" marL="0">
@@ -15606,7 +15776,7 @@
             <a:lvl1pPr>
               <a:defRPr sz="900">
                 <a:solidFill>
-                  <a:srgbClr val="D8C39A"/>
+                  <a:srgbClr val="D9B38C"/>
                 </a:solidFill>
               </a:defRPr>
             </a:lvl1pPr>
@@ -15648,16 +15818,14 @@
       </p:grpSpPr>
       <p:sp>
         <p:nvSpPr>
-          <p:cNvPr id="2" name="Text 3"/>
-          <p:cNvSpPr/>
-          <p:nvPr>
-            <p:ph idx="103" type="title" hasCustomPrompt="1"/>
-          </p:nvPr>
-        </p:nvSpPr>
-        <p:spPr>
-          <a:xfrm>
-            <a:off x="457200" y="347472"/>
-            <a:ext cx="8229600" cy="685800"/>
+          <p:cNvPr id="2" name="Text 0"/>
+          <p:cNvSpPr txBox="1"/>
+          <p:nvPr/>
+        </p:nvSpPr>
+        <p:spPr>
+          <a:xfrm>
+            <a:off x="457200" y="402336"/>
+            <a:ext cx="8229600" cy="749808"/>
           </a:xfrm>
           <a:prstGeom prst="rect">
             <a:avLst/>
@@ -15666,17 +15834,20 @@
           <a:ln/>
         </p:spPr>
         <p:txBody>
-          <a:bodyPr wrap="square" lIns="0" tIns="0" rIns="0" bIns="0" rtlCol="0" anchor="ctr"/>
-          <a:lstStyle/>
-          <a:p>
-            <a:pPr algn="l" indent="0" marL="0">
-              <a:buNone/>
-            </a:pPr>
-            <a:r>
-              <a:rPr lang="en-US" sz="2600" b="1" dirty="0">
-                <a:solidFill>
-                  <a:srgbClr val="0B0B0B"/>
-                </a:solidFill>
+          <a:bodyPr wrap="square" lIns="0" tIns="0" rIns="0" bIns="0" rtlCol="0" anchor="t"/>
+          <a:lstStyle/>
+          <a:p>
+            <a:pPr algn="l" indent="0" marL="0">
+              <a:buNone/>
+            </a:pPr>
+            <a:r>
+              <a:rPr lang="en-US" altLang="en-US" sz="2600" b="1" dirty="0">
+                <a:solidFill>
+                  <a:schemeClr val="tx1"/>
+                </a:solidFill>
+                <a:latin typeface="Cambria" pitchFamily="34" charset="0"/>
+                <a:ea typeface="Cambria" pitchFamily="34" charset="-122"/>
+                <a:cs typeface="Cambria" pitchFamily="34" charset="-120"/>
               </a:rPr>
               <a:t>Who we are</a:t>
             </a:r>
@@ -15735,11 +15906,11 @@
             <a:avLst/>
           </a:prstGeom>
           <a:solidFill>
-            <a:srgbClr val="F4F1EA"/>
+            <a:srgbClr val="F4F1EB"/>
           </a:solidFill>
           <a:ln w="12700">
             <a:solidFill>
-              <a:srgbClr val="F4F1EA"/>
+              <a:srgbClr val="F4F1EB"/>
             </a:solidFill>
             <a:prstDash val="solid"/>
           </a:ln>
@@ -15840,11 +16011,11 @@
             <a:avLst/>
           </a:prstGeom>
           <a:solidFill>
-            <a:srgbClr val="F4F1EA"/>
+            <a:srgbClr val="F4F1EB"/>
           </a:solidFill>
           <a:ln w="12700">
             <a:solidFill>
-              <a:srgbClr val="F4F1EA"/>
+              <a:srgbClr val="F4F1EB"/>
             </a:solidFill>
             <a:prstDash val="solid"/>
           </a:ln>
@@ -15945,11 +16116,11 @@
             <a:avLst/>
           </a:prstGeom>
           <a:solidFill>
-            <a:srgbClr val="F4F1EA"/>
+            <a:srgbClr val="F4F1EB"/>
           </a:solidFill>
           <a:ln w="12700">
             <a:solidFill>
-              <a:srgbClr val="F4F1EA"/>
+              <a:srgbClr val="F4F1EB"/>
             </a:solidFill>
             <a:prstDash val="solid"/>
           </a:ln>
@@ -16050,11 +16221,11 @@
             <a:avLst/>
           </a:prstGeom>
           <a:solidFill>
-            <a:srgbClr val="F4F1EA"/>
+            <a:srgbClr val="F4F1EB"/>
           </a:solidFill>
           <a:ln w="12700">
             <a:solidFill>
-              <a:srgbClr val="F4F1EA"/>
+              <a:srgbClr val="F4F1EB"/>
             </a:solidFill>
             <a:prstDash val="solid"/>
           </a:ln>
@@ -16155,11 +16326,11 @@
             <a:avLst/>
           </a:prstGeom>
           <a:solidFill>
-            <a:srgbClr val="F4F1EA"/>
+            <a:srgbClr val="F4F1EB"/>
           </a:solidFill>
           <a:ln w="12700">
             <a:solidFill>
-              <a:srgbClr val="F4F1EA"/>
+              <a:srgbClr val="F4F1EB"/>
             </a:solidFill>
             <a:prstDash val="solid"/>
           </a:ln>
@@ -16260,11 +16431,11 @@
             <a:avLst/>
           </a:prstGeom>
           <a:solidFill>
-            <a:srgbClr val="F4F1EA"/>
+            <a:srgbClr val="F4F1EB"/>
           </a:solidFill>
           <a:ln w="12700">
             <a:solidFill>
-              <a:srgbClr val="F4F1EA"/>
+              <a:srgbClr val="F4F1EB"/>
             </a:solidFill>
             <a:prstDash val="solid"/>
           </a:ln>
@@ -16352,6 +16523,36 @@
       </p:sp>
       <p:sp>
         <p:nvSpPr>
+          <p:cNvPr id="22" name="Text 0"/>
+          <p:cNvSpPr/>
+          <p:nvPr>
+            <p:ph idx="101" type="title" hasCustomPrompt="1"/>
+          </p:nvPr>
+        </p:nvSpPr>
+        <p:spPr>
+          <a:xfrm>
+            <a:off x="457200" y="420624"/>
+            <a:ext cx="8229600" cy="731520"/>
+          </a:xfrm>
+          <a:prstGeom prst="rect">
+            <a:avLst/>
+          </a:prstGeom>
+          <a:noFill/>
+          <a:ln/>
+        </p:spPr>
+        <p:txBody>
+          <a:bodyPr wrap="square" lIns="0" tIns="0" rIns="0" bIns="0" rtlCol="0" anchor="t"/>
+          <a:lstStyle/>
+          <a:p>
+            <a:pPr algn="l" indent="0" marL="0">
+              <a:buNone/>
+            </a:pPr>
+            <a:endParaRPr lang="en-US" sz="2600" dirty="0"/>
+          </a:p>
+        </p:txBody>
+      </p:sp>
+      <p:sp>
+        <p:nvSpPr>
           <p:cNvPr id="25" name="Slide Number Placeholder 0"/>
           <p:cNvSpPr>
             <a:spLocks noGrp="1"/>
@@ -16380,7 +16581,7 @@
             <a:lvl1pPr>
               <a:defRPr sz="900">
                 <a:solidFill>
-                  <a:srgbClr val="6B6F76"/>
+                  <a:srgbClr val="6E7B88"/>
                 </a:solidFill>
               </a:defRPr>
             </a:lvl1pPr>
@@ -16422,16 +16623,14 @@
       </p:grpSpPr>
       <p:sp>
         <p:nvSpPr>
-          <p:cNvPr id="2" name="Text 3"/>
-          <p:cNvSpPr/>
-          <p:nvPr>
-            <p:ph idx="103" type="title" hasCustomPrompt="1"/>
-          </p:nvPr>
-        </p:nvSpPr>
-        <p:spPr>
-          <a:xfrm>
-            <a:off x="457200" y="347472"/>
-            <a:ext cx="8229600" cy="685800"/>
+          <p:cNvPr id="2" name="Text 0"/>
+          <p:cNvSpPr txBox="1"/>
+          <p:nvPr/>
+        </p:nvSpPr>
+        <p:spPr>
+          <a:xfrm>
+            <a:off x="457200" y="402336"/>
+            <a:ext cx="8229600" cy="749808"/>
           </a:xfrm>
           <a:prstGeom prst="rect">
             <a:avLst/>
@@ -16440,21 +16639,24 @@
           <a:ln/>
         </p:spPr>
         <p:txBody>
-          <a:bodyPr wrap="square" lIns="0" tIns="0" rIns="0" bIns="0" rtlCol="0" anchor="ctr"/>
-          <a:lstStyle/>
-          <a:p>
-            <a:pPr algn="l" indent="0" marL="0">
-              <a:buNone/>
-            </a:pPr>
-            <a:r>
-              <a:rPr lang="en-US" sz="2600" b="1" dirty="0">
-                <a:solidFill>
-                  <a:srgbClr val="0B0B0B"/>
-                </a:solidFill>
+          <a:bodyPr wrap="square" lIns="0" tIns="0" rIns="0" bIns="0" rtlCol="0" anchor="t"/>
+          <a:lstStyle/>
+          <a:p>
+            <a:pPr algn="l" indent="0" marL="0">
+              <a:buNone/>
+            </a:pPr>
+            <a:r>
+              <a:rPr lang="en-US" altLang="en-US" sz="2100" b="1" dirty="0">
+                <a:solidFill>
+                  <a:schemeClr val="tx1"/>
+                </a:solidFill>
+                <a:latin typeface="Cambria" pitchFamily="34" charset="0"/>
+                <a:ea typeface="Cambria" pitchFamily="34" charset="-122"/>
+                <a:cs typeface="Cambria" pitchFamily="34" charset="-120"/>
               </a:rPr>
               <a:t>What happens to your client without legal planning</a:t>
             </a:r>
-            <a:endParaRPr lang="en-US" sz="2600" dirty="0"/>
+            <a:endParaRPr lang="en-US" sz="2100" dirty="0"/>
           </a:p>
         </p:txBody>
       </p:sp>
@@ -16509,11 +16711,11 @@
             <a:avLst/>
           </a:prstGeom>
           <a:solidFill>
-            <a:srgbClr val="F4F1EA"/>
+            <a:srgbClr val="F4F1EB"/>
           </a:solidFill>
           <a:ln w="12700">
             <a:solidFill>
-              <a:srgbClr val="F4F1EA"/>
+              <a:srgbClr val="F4F1EB"/>
             </a:solidFill>
             <a:prstDash val="solid"/>
           </a:ln>
@@ -16614,11 +16816,11 @@
             <a:avLst/>
           </a:prstGeom>
           <a:solidFill>
-            <a:srgbClr val="F4F1EA"/>
+            <a:srgbClr val="F4F1EB"/>
           </a:solidFill>
           <a:ln w="12700">
             <a:solidFill>
-              <a:srgbClr val="F4F1EA"/>
+              <a:srgbClr val="F4F1EB"/>
             </a:solidFill>
             <a:prstDash val="solid"/>
           </a:ln>
@@ -16719,11 +16921,11 @@
             <a:avLst/>
           </a:prstGeom>
           <a:solidFill>
-            <a:srgbClr val="F4F1EA"/>
+            <a:srgbClr val="F4F1EB"/>
           </a:solidFill>
           <a:ln w="12700">
             <a:solidFill>
-              <a:srgbClr val="F4F1EA"/>
+              <a:srgbClr val="F4F1EB"/>
             </a:solidFill>
             <a:prstDash val="solid"/>
           </a:ln>
@@ -16824,11 +17026,11 @@
             <a:avLst/>
           </a:prstGeom>
           <a:solidFill>
-            <a:srgbClr val="F4F1EA"/>
+            <a:srgbClr val="F4F1EB"/>
           </a:solidFill>
           <a:ln w="12700">
             <a:solidFill>
-              <a:srgbClr val="F4F1EA"/>
+              <a:srgbClr val="F4F1EB"/>
             </a:solidFill>
             <a:prstDash val="solid"/>
           </a:ln>
@@ -16929,11 +17131,11 @@
             <a:avLst/>
           </a:prstGeom>
           <a:solidFill>
-            <a:srgbClr val="0B0B0B"/>
+            <a:srgbClr val="0E2238"/>
           </a:solidFill>
           <a:ln w="12700">
             <a:solidFill>
-              <a:srgbClr val="0B0B0B"/>
+              <a:srgbClr val="0E2238"/>
             </a:solidFill>
             <a:prstDash val="solid"/>
           </a:ln>
@@ -16955,7 +17157,7 @@
           </a:prstGeom>
           <a:ln w="9525">
             <a:solidFill>
-              <a:srgbClr val="B08D57"/>
+              <a:srgbClr val="B5723B"/>
             </a:solidFill>
             <a:prstDash val="solid"/>
           </a:ln>
@@ -17033,6 +17235,36 @@
               <a:t>Most foreign buyers do not know UAE inheritance rules, and buy property worth millions of dirhams with no will and no legal structure.</a:t>
             </a:r>
             <a:endParaRPr lang="en-US" sz="1150" dirty="0"/>
+          </a:p>
+        </p:txBody>
+      </p:sp>
+      <p:sp>
+        <p:nvSpPr>
+          <p:cNvPr id="20" name="Text 0"/>
+          <p:cNvSpPr/>
+          <p:nvPr>
+            <p:ph idx="101" type="title" hasCustomPrompt="1"/>
+          </p:nvPr>
+        </p:nvSpPr>
+        <p:spPr>
+          <a:xfrm>
+            <a:off x="457200" y="420624"/>
+            <a:ext cx="8229600" cy="731520"/>
+          </a:xfrm>
+          <a:prstGeom prst="rect">
+            <a:avLst/>
+          </a:prstGeom>
+          <a:noFill/>
+          <a:ln/>
+        </p:spPr>
+        <p:txBody>
+          <a:bodyPr wrap="square" lIns="0" tIns="0" rIns="0" bIns="0" rtlCol="0" anchor="t"/>
+          <a:lstStyle/>
+          <a:p>
+            <a:pPr algn="l" indent="0" marL="0">
+              <a:buNone/>
+            </a:pPr>
+            <a:endParaRPr lang="en-US" sz="2600" dirty="0"/>
           </a:p>
         </p:txBody>
       </p:sp>
@@ -17066,7 +17298,7 @@
             <a:lvl1pPr>
               <a:defRPr sz="900">
                 <a:solidFill>
-                  <a:srgbClr val="6B6F76"/>
+                  <a:srgbClr val="6E7B88"/>
                 </a:solidFill>
               </a:defRPr>
             </a:lvl1pPr>
@@ -17153,8 +17385,8 @@
         </p:nvSpPr>
         <p:spPr>
           <a:xfrm>
-            <a:off x="457200" y="2834640"/>
-            <a:ext cx="7772400" cy="731520"/>
+            <a:off x="457200" y="2743200"/>
+            <a:ext cx="7772400" cy="868680"/>
           </a:xfrm>
           <a:prstGeom prst="rect">
             <a:avLst/>
@@ -17163,7 +17395,7 @@
           <a:ln/>
         </p:spPr>
         <p:txBody>
-          <a:bodyPr wrap="square" lIns="0" tIns="0" rIns="0" bIns="0" rtlCol="0" anchor="t"/>
+          <a:bodyPr wrap="square" lIns="0" tIns="0" rIns="0" bIns="0" rtlCol="0" anchor="b"/>
           <a:lstStyle/>
           <a:p>
             <a:pPr algn="l" indent="0" marL="0">
@@ -17192,8 +17424,8 @@
         </p:nvSpPr>
         <p:spPr>
           <a:xfrm>
-            <a:off x="457200" y="3566160"/>
-            <a:ext cx="7772400" cy="548640"/>
+            <a:off x="457200" y="3675888"/>
+            <a:ext cx="7772400" cy="502920"/>
           </a:xfrm>
           <a:prstGeom prst="rect">
             <a:avLst/>
@@ -17202,7 +17434,7 @@
           <a:ln/>
         </p:spPr>
         <p:txBody>
-          <a:bodyPr wrap="square" lIns="0" tIns="0" rIns="0" bIns="0" rtlCol="0" anchor="ctr"/>
+          <a:bodyPr wrap="square" lIns="0" tIns="0" rIns="0" bIns="0" rtlCol="0" anchor="t"/>
           <a:lstStyle/>
           <a:p>
             <a:pPr algn="l" indent="0" marL="0">
@@ -17250,7 +17482,7 @@
             <a:lvl1pPr>
               <a:defRPr sz="900">
                 <a:solidFill>
-                  <a:srgbClr val="D8C39A"/>
+                  <a:srgbClr val="D9B38C"/>
                 </a:solidFill>
               </a:defRPr>
             </a:lvl1pPr>
@@ -17292,16 +17524,14 @@
       </p:grpSpPr>
       <p:sp>
         <p:nvSpPr>
-          <p:cNvPr id="2" name="Text 3"/>
-          <p:cNvSpPr/>
-          <p:nvPr>
-            <p:ph idx="103" type="title" hasCustomPrompt="1"/>
-          </p:nvPr>
-        </p:nvSpPr>
-        <p:spPr>
-          <a:xfrm>
-            <a:off x="457200" y="347472"/>
-            <a:ext cx="8229600" cy="685800"/>
+          <p:cNvPr id="2" name="Text 0"/>
+          <p:cNvSpPr txBox="1"/>
+          <p:nvPr/>
+        </p:nvSpPr>
+        <p:spPr>
+          <a:xfrm>
+            <a:off x="457200" y="402336"/>
+            <a:ext cx="8229600" cy="749808"/>
           </a:xfrm>
           <a:prstGeom prst="rect">
             <a:avLst/>
@@ -17310,17 +17540,20 @@
           <a:ln/>
         </p:spPr>
         <p:txBody>
-          <a:bodyPr wrap="square" lIns="0" tIns="0" rIns="0" bIns="0" rtlCol="0" anchor="ctr"/>
-          <a:lstStyle/>
-          <a:p>
-            <a:pPr algn="l" indent="0" marL="0">
-              <a:buNone/>
-            </a:pPr>
-            <a:r>
-              <a:rPr lang="en-US" sz="2600" b="1" dirty="0">
-                <a:solidFill>
-                  <a:srgbClr val="0B0B0B"/>
-                </a:solidFill>
+          <a:bodyPr wrap="square" lIns="0" tIns="0" rIns="0" bIns="0" rtlCol="0" anchor="t"/>
+          <a:lstStyle/>
+          <a:p>
+            <a:pPr algn="l" indent="0" marL="0">
+              <a:buNone/>
+            </a:pPr>
+            <a:r>
+              <a:rPr lang="en-US" altLang="en-US" sz="2600" b="1" dirty="0">
+                <a:solidFill>
+                  <a:schemeClr val="tx1"/>
+                </a:solidFill>
+                <a:latin typeface="Cambria" pitchFamily="34" charset="0"/>
+                <a:ea typeface="Cambria" pitchFamily="34" charset="-122"/>
+                <a:cs typeface="Cambria" pitchFamily="34" charset="-120"/>
               </a:rPr>
               <a:t>Our asset protection and estate services</a:t>
             </a:r>
@@ -17379,11 +17612,11 @@
             <a:avLst/>
           </a:prstGeom>
           <a:solidFill>
-            <a:srgbClr val="F4F1EA"/>
+            <a:srgbClr val="F4F1EB"/>
           </a:solidFill>
           <a:ln w="12700">
             <a:solidFill>
-              <a:srgbClr val="F4F1EA"/>
+              <a:srgbClr val="F4F1EB"/>
             </a:solidFill>
             <a:prstDash val="solid"/>
           </a:ln>
@@ -17484,11 +17717,11 @@
             <a:avLst/>
           </a:prstGeom>
           <a:solidFill>
-            <a:srgbClr val="F4F1EA"/>
+            <a:srgbClr val="F4F1EB"/>
           </a:solidFill>
           <a:ln w="12700">
             <a:solidFill>
-              <a:srgbClr val="F4F1EA"/>
+              <a:srgbClr val="F4F1EB"/>
             </a:solidFill>
             <a:prstDash val="solid"/>
           </a:ln>
@@ -17589,11 +17822,11 @@
             <a:avLst/>
           </a:prstGeom>
           <a:solidFill>
-            <a:srgbClr val="F4F1EA"/>
+            <a:srgbClr val="F4F1EB"/>
           </a:solidFill>
           <a:ln w="12700">
             <a:solidFill>
-              <a:srgbClr val="F4F1EA"/>
+              <a:srgbClr val="F4F1EB"/>
             </a:solidFill>
             <a:prstDash val="solid"/>
           </a:ln>
@@ -17694,11 +17927,11 @@
             <a:avLst/>
           </a:prstGeom>
           <a:solidFill>
-            <a:srgbClr val="F4F1EA"/>
+            <a:srgbClr val="F4F1EB"/>
           </a:solidFill>
           <a:ln w="12700">
             <a:solidFill>
-              <a:srgbClr val="F4F1EA"/>
+              <a:srgbClr val="F4F1EB"/>
             </a:solidFill>
             <a:prstDash val="solid"/>
           </a:ln>
@@ -17799,11 +18032,11 @@
             <a:avLst/>
           </a:prstGeom>
           <a:solidFill>
-            <a:srgbClr val="F4F1EA"/>
+            <a:srgbClr val="F4F1EB"/>
           </a:solidFill>
           <a:ln w="12700">
             <a:solidFill>
-              <a:srgbClr val="F4F1EA"/>
+              <a:srgbClr val="F4F1EB"/>
             </a:solidFill>
             <a:prstDash val="solid"/>
           </a:ln>
@@ -17904,11 +18137,11 @@
             <a:avLst/>
           </a:prstGeom>
           <a:solidFill>
-            <a:srgbClr val="F4F1EA"/>
+            <a:srgbClr val="F4F1EB"/>
           </a:solidFill>
           <a:ln w="12700">
             <a:solidFill>
-              <a:srgbClr val="F4F1EA"/>
+              <a:srgbClr val="F4F1EB"/>
             </a:solidFill>
             <a:prstDash val="solid"/>
           </a:ln>
@@ -18009,11 +18242,11 @@
             <a:avLst/>
           </a:prstGeom>
           <a:solidFill>
-            <a:srgbClr val="F4F1EA"/>
+            <a:srgbClr val="F4F1EB"/>
           </a:solidFill>
           <a:ln w="12700">
             <a:solidFill>
-              <a:srgbClr val="F4F1EA"/>
+              <a:srgbClr val="F4F1EB"/>
             </a:solidFill>
             <a:prstDash val="solid"/>
           </a:ln>
@@ -18114,11 +18347,11 @@
             <a:avLst/>
           </a:prstGeom>
           <a:solidFill>
-            <a:srgbClr val="F4F1EA"/>
+            <a:srgbClr val="F4F1EB"/>
           </a:solidFill>
           <a:ln w="12700">
             <a:solidFill>
-              <a:srgbClr val="F4F1EA"/>
+              <a:srgbClr val="F4F1EB"/>
             </a:solidFill>
             <a:prstDash val="solid"/>
           </a:ln>
@@ -18206,6 +18439,36 @@
       </p:sp>
       <p:sp>
         <p:nvSpPr>
+          <p:cNvPr id="28" name="Text 0"/>
+          <p:cNvSpPr/>
+          <p:nvPr>
+            <p:ph idx="101" type="title" hasCustomPrompt="1"/>
+          </p:nvPr>
+        </p:nvSpPr>
+        <p:spPr>
+          <a:xfrm>
+            <a:off x="457200" y="420624"/>
+            <a:ext cx="8229600" cy="731520"/>
+          </a:xfrm>
+          <a:prstGeom prst="rect">
+            <a:avLst/>
+          </a:prstGeom>
+          <a:noFill/>
+          <a:ln/>
+        </p:spPr>
+        <p:txBody>
+          <a:bodyPr wrap="square" lIns="0" tIns="0" rIns="0" bIns="0" rtlCol="0" anchor="t"/>
+          <a:lstStyle/>
+          <a:p>
+            <a:pPr algn="l" indent="0" marL="0">
+              <a:buNone/>
+            </a:pPr>
+            <a:endParaRPr lang="en-US" sz="2600" dirty="0"/>
+          </a:p>
+        </p:txBody>
+      </p:sp>
+      <p:sp>
+        <p:nvSpPr>
           <p:cNvPr id="25" name="Slide Number Placeholder 0"/>
           <p:cNvSpPr>
             <a:spLocks noGrp="1"/>
@@ -18234,7 +18497,7 @@
             <a:lvl1pPr>
               <a:defRPr sz="900">
                 <a:solidFill>
-                  <a:srgbClr val="6B6F76"/>
+                  <a:srgbClr val="6E7B88"/>
                 </a:solidFill>
               </a:defRPr>
             </a:lvl1pPr>
@@ -18276,16 +18539,14 @@
       </p:grpSpPr>
       <p:sp>
         <p:nvSpPr>
-          <p:cNvPr id="2" name="Text 3"/>
-          <p:cNvSpPr/>
-          <p:nvPr>
-            <p:ph idx="103" type="title" hasCustomPrompt="1"/>
-          </p:nvPr>
-        </p:nvSpPr>
-        <p:spPr>
-          <a:xfrm>
-            <a:off x="457200" y="347472"/>
-            <a:ext cx="8229600" cy="685800"/>
+          <p:cNvPr id="2" name="Text 0"/>
+          <p:cNvSpPr txBox="1"/>
+          <p:nvPr/>
+        </p:nvSpPr>
+        <p:spPr>
+          <a:xfrm>
+            <a:off x="457200" y="402336"/>
+            <a:ext cx="8229600" cy="749808"/>
           </a:xfrm>
           <a:prstGeom prst="rect">
             <a:avLst/>
@@ -18294,17 +18555,20 @@
           <a:ln/>
         </p:spPr>
         <p:txBody>
-          <a:bodyPr wrap="square" lIns="0" tIns="0" rIns="0" bIns="0" rtlCol="0" anchor="ctr"/>
-          <a:lstStyle/>
-          <a:p>
-            <a:pPr algn="l" indent="0" marL="0">
-              <a:buNone/>
-            </a:pPr>
-            <a:r>
-              <a:rPr lang="en-US" sz="2600" b="1" dirty="0">
-                <a:solidFill>
-                  <a:srgbClr val="0B0B0B"/>
-                </a:solidFill>
+          <a:bodyPr wrap="square" lIns="0" tIns="0" rIns="0" bIns="0" rtlCol="0" anchor="t"/>
+          <a:lstStyle/>
+          <a:p>
+            <a:pPr algn="l" indent="0" marL="0">
+              <a:buNone/>
+            </a:pPr>
+            <a:r>
+              <a:rPr lang="en-US" altLang="en-US" sz="2600" b="1" dirty="0">
+                <a:solidFill>
+                  <a:schemeClr val="tx1"/>
+                </a:solidFill>
+                <a:latin typeface="Cambria" pitchFamily="34" charset="0"/>
+                <a:ea typeface="Cambria" pitchFamily="34" charset="-122"/>
+                <a:cs typeface="Cambria" pitchFamily="34" charset="-120"/>
               </a:rPr>
               <a:t>Registration routes in the UAE</a:t>
             </a:r>
@@ -18387,7 +18651,7 @@
                       <a:r>
                         <a:rPr lang="en-US" sz="1100" b="1" dirty="0">
                           <a:solidFill>
-                            <a:srgbClr val="D8C39A"/>
+                            <a:srgbClr val="D9B38C"/>
                           </a:solidFill>
                           <a:latin typeface="+mn-lt" pitchFamily="34" charset="0"/>
                           <a:ea typeface="+mn-lt" pitchFamily="34" charset="-122"/>
@@ -18405,7 +18669,7 @@
                   <a:tcPr marL="91440" marR="91440" marT="45720" marB="45720" anchor="ctr">
                     <a:lnL w="6350" cap="flat" cmpd="sng" algn="ctr">
                       <a:solidFill>
-                        <a:srgbClr val="E9E4DA"/>
+                        <a:srgbClr val="E6E1D8"/>
                       </a:solidFill>
                       <a:prstDash val="solid"/>
                       <a:round/>
@@ -18414,7 +18678,7 @@
                     </a:lnL>
                     <a:lnR w="6350" cap="flat" cmpd="sng" algn="ctr">
                       <a:solidFill>
-                        <a:srgbClr val="E9E4DA"/>
+                        <a:srgbClr val="E6E1D8"/>
                       </a:solidFill>
                       <a:prstDash val="solid"/>
                       <a:round/>
@@ -18423,7 +18687,7 @@
                     </a:lnR>
                     <a:lnT w="6350" cap="flat" cmpd="sng" algn="ctr">
                       <a:solidFill>
-                        <a:srgbClr val="E9E4DA"/>
+                        <a:srgbClr val="E6E1D8"/>
                       </a:solidFill>
                       <a:prstDash val="solid"/>
                       <a:round/>
@@ -18432,7 +18696,7 @@
                     </a:lnT>
                     <a:lnB w="6350" cap="flat" cmpd="sng" algn="ctr">
                       <a:solidFill>
-                        <a:srgbClr val="E9E4DA"/>
+                        <a:srgbClr val="E6E1D8"/>
                       </a:solidFill>
                       <a:prstDash val="solid"/>
                       <a:round/>
@@ -18440,7 +18704,7 @@
                       <a:tailEnd type="none" w="med" len="med"/>
                     </a:lnB>
                     <a:solidFill>
-                      <a:srgbClr val="0B0B0B"/>
+                      <a:srgbClr val="0E2238"/>
                     </a:solidFill>
                   </a:tcPr>
                 </a:tc>
@@ -18455,7 +18719,7 @@
                       <a:r>
                         <a:rPr lang="en-US" sz="1100" b="1" dirty="0">
                           <a:solidFill>
-                            <a:srgbClr val="D8C39A"/>
+                            <a:srgbClr val="D9B38C"/>
                           </a:solidFill>
                           <a:latin typeface="+mn-lt" pitchFamily="34" charset="0"/>
                           <a:ea typeface="+mn-lt" pitchFamily="34" charset="-122"/>
@@ -18473,7 +18737,7 @@
                   <a:tcPr marL="91440" marR="91440" marT="45720" marB="45720" anchor="ctr">
                     <a:lnL w="6350" cap="flat" cmpd="sng" algn="ctr">
                       <a:solidFill>
-                        <a:srgbClr val="E9E4DA"/>
+                        <a:srgbClr val="E6E1D8"/>
                       </a:solidFill>
                       <a:prstDash val="solid"/>
                       <a:round/>
@@ -18482,7 +18746,7 @@
                     </a:lnL>
                     <a:lnR w="6350" cap="flat" cmpd="sng" algn="ctr">
                       <a:solidFill>
-                        <a:srgbClr val="E9E4DA"/>
+                        <a:srgbClr val="E6E1D8"/>
                       </a:solidFill>
                       <a:prstDash val="solid"/>
                       <a:round/>
@@ -18491,7 +18755,7 @@
                     </a:lnR>
                     <a:lnT w="6350" cap="flat" cmpd="sng" algn="ctr">
                       <a:solidFill>
-                        <a:srgbClr val="E9E4DA"/>
+                        <a:srgbClr val="E6E1D8"/>
                       </a:solidFill>
                       <a:prstDash val="solid"/>
                       <a:round/>
@@ -18500,7 +18764,7 @@
                     </a:lnT>
                     <a:lnB w="6350" cap="flat" cmpd="sng" algn="ctr">
                       <a:solidFill>
-                        <a:srgbClr val="E9E4DA"/>
+                        <a:srgbClr val="E6E1D8"/>
                       </a:solidFill>
                       <a:prstDash val="solid"/>
                       <a:round/>
@@ -18508,7 +18772,7 @@
                       <a:tailEnd type="none" w="med" len="med"/>
                     </a:lnB>
                     <a:solidFill>
-                      <a:srgbClr val="0B0B0B"/>
+                      <a:srgbClr val="0E2238"/>
                     </a:solidFill>
                   </a:tcPr>
                 </a:tc>
@@ -18523,7 +18787,7 @@
                       <a:r>
                         <a:rPr lang="en-US" sz="1100" b="1" dirty="0">
                           <a:solidFill>
-                            <a:srgbClr val="D8C39A"/>
+                            <a:srgbClr val="D9B38C"/>
                           </a:solidFill>
                           <a:latin typeface="+mn-lt" pitchFamily="34" charset="0"/>
                           <a:ea typeface="+mn-lt" pitchFamily="34" charset="-122"/>
@@ -18541,7 +18805,7 @@
                   <a:tcPr marL="91440" marR="91440" marT="45720" marB="45720" anchor="ctr">
                     <a:lnL w="6350" cap="flat" cmpd="sng" algn="ctr">
                       <a:solidFill>
-                        <a:srgbClr val="E9E4DA"/>
+                        <a:srgbClr val="E6E1D8"/>
                       </a:solidFill>
                       <a:prstDash val="solid"/>
                       <a:round/>
@@ -18550,7 +18814,7 @@
                     </a:lnL>
                     <a:lnR w="6350" cap="flat" cmpd="sng" algn="ctr">
                       <a:solidFill>
-                        <a:srgbClr val="E9E4DA"/>
+                        <a:srgbClr val="E6E1D8"/>
                       </a:solidFill>
                       <a:prstDash val="solid"/>
                       <a:round/>
@@ -18559,7 +18823,7 @@
                     </a:lnR>
                     <a:lnT w="6350" cap="flat" cmpd="sng" algn="ctr">
                       <a:solidFill>
-                        <a:srgbClr val="E9E4DA"/>
+                        <a:srgbClr val="E6E1D8"/>
                       </a:solidFill>
                       <a:prstDash val="solid"/>
                       <a:round/>
@@ -18568,7 +18832,7 @@
                     </a:lnT>
                     <a:lnB w="6350" cap="flat" cmpd="sng" algn="ctr">
                       <a:solidFill>
-                        <a:srgbClr val="E9E4DA"/>
+                        <a:srgbClr val="E6E1D8"/>
                       </a:solidFill>
                       <a:prstDash val="solid"/>
                       <a:round/>
@@ -18576,7 +18840,7 @@
                       <a:tailEnd type="none" w="med" len="med"/>
                     </a:lnB>
                     <a:solidFill>
-                      <a:srgbClr val="0B0B0B"/>
+                      <a:srgbClr val="0E2238"/>
                     </a:solidFill>
                   </a:tcPr>
                 </a:tc>
@@ -18593,7 +18857,7 @@
                       <a:r>
                         <a:rPr lang="en-US" sz="1050" b="1" dirty="0">
                           <a:solidFill>
-                            <a:srgbClr val="0B0B0B"/>
+                            <a:srgbClr val="0E2238"/>
                           </a:solidFill>
                           <a:latin typeface="+mn-lt" pitchFamily="34" charset="0"/>
                           <a:ea typeface="+mn-lt" pitchFamily="34" charset="-122"/>
@@ -18611,7 +18875,7 @@
                   <a:tcPr marL="91440" marR="91440" marT="45720" marB="45720" anchor="ctr">
                     <a:lnL w="6350" cap="flat" cmpd="sng" algn="ctr">
                       <a:solidFill>
-                        <a:srgbClr val="E9E4DA"/>
+                        <a:srgbClr val="E6E1D8"/>
                       </a:solidFill>
                       <a:prstDash val="solid"/>
                       <a:round/>
@@ -18620,7 +18884,7 @@
                     </a:lnL>
                     <a:lnR w="6350" cap="flat" cmpd="sng" algn="ctr">
                       <a:solidFill>
-                        <a:srgbClr val="E9E4DA"/>
+                        <a:srgbClr val="E6E1D8"/>
                       </a:solidFill>
                       <a:prstDash val="solid"/>
                       <a:round/>
@@ -18629,7 +18893,7 @@
                     </a:lnR>
                     <a:lnT w="6350" cap="flat" cmpd="sng" algn="ctr">
                       <a:solidFill>
-                        <a:srgbClr val="E9E4DA"/>
+                        <a:srgbClr val="E6E1D8"/>
                       </a:solidFill>
                       <a:prstDash val="solid"/>
                       <a:round/>
@@ -18638,7 +18902,7 @@
                     </a:lnT>
                     <a:lnB w="6350" cap="flat" cmpd="sng" algn="ctr">
                       <a:solidFill>
-                        <a:srgbClr val="E9E4DA"/>
+                        <a:srgbClr val="E6E1D8"/>
                       </a:solidFill>
                       <a:prstDash val="solid"/>
                       <a:round/>
@@ -18646,7 +18910,7 @@
                       <a:tailEnd type="none" w="med" len="med"/>
                     </a:lnB>
                     <a:solidFill>
-                      <a:srgbClr val="F4F1EA"/>
+                      <a:srgbClr val="F4F1EB"/>
                     </a:solidFill>
                   </a:tcPr>
                 </a:tc>
@@ -18661,7 +18925,7 @@
                       <a:r>
                         <a:rPr lang="en-US" sz="1050" dirty="0">
                           <a:solidFill>
-                            <a:srgbClr val="2A2D33"/>
+                            <a:srgbClr val="1F3A52"/>
                           </a:solidFill>
                           <a:latin typeface="+mn-lt" pitchFamily="34" charset="0"/>
                           <a:ea typeface="+mn-lt" pitchFamily="34" charset="-122"/>
@@ -18679,7 +18943,7 @@
                   <a:tcPr marL="91440" marR="91440" marT="45720" marB="45720" anchor="ctr">
                     <a:lnL w="6350" cap="flat" cmpd="sng" algn="ctr">
                       <a:solidFill>
-                        <a:srgbClr val="E9E4DA"/>
+                        <a:srgbClr val="E6E1D8"/>
                       </a:solidFill>
                       <a:prstDash val="solid"/>
                       <a:round/>
@@ -18688,7 +18952,7 @@
                     </a:lnL>
                     <a:lnR w="6350" cap="flat" cmpd="sng" algn="ctr">
                       <a:solidFill>
-                        <a:srgbClr val="E9E4DA"/>
+                        <a:srgbClr val="E6E1D8"/>
                       </a:solidFill>
                       <a:prstDash val="solid"/>
                       <a:round/>
@@ -18697,7 +18961,7 @@
                     </a:lnR>
                     <a:lnT w="6350" cap="flat" cmpd="sng" algn="ctr">
                       <a:solidFill>
-                        <a:srgbClr val="E9E4DA"/>
+                        <a:srgbClr val="E6E1D8"/>
                       </a:solidFill>
                       <a:prstDash val="solid"/>
                       <a:round/>
@@ -18706,7 +18970,7 @@
                     </a:lnT>
                     <a:lnB w="6350" cap="flat" cmpd="sng" algn="ctr">
                       <a:solidFill>
-                        <a:srgbClr val="E9E4DA"/>
+                        <a:srgbClr val="E6E1D8"/>
                       </a:solidFill>
                       <a:prstDash val="solid"/>
                       <a:round/>
@@ -18714,7 +18978,7 @@
                       <a:tailEnd type="none" w="med" len="med"/>
                     </a:lnB>
                     <a:solidFill>
-                      <a:srgbClr val="F4F1EA"/>
+                      <a:srgbClr val="F4F1EB"/>
                     </a:solidFill>
                   </a:tcPr>
                 </a:tc>
@@ -18729,7 +18993,7 @@
                       <a:r>
                         <a:rPr lang="en-US" sz="1050" dirty="0">
                           <a:solidFill>
-                            <a:srgbClr val="2A2D33"/>
+                            <a:srgbClr val="1F3A52"/>
                           </a:solidFill>
                           <a:latin typeface="+mn-lt" pitchFamily="34" charset="0"/>
                           <a:ea typeface="+mn-lt" pitchFamily="34" charset="-122"/>
@@ -18747,7 +19011,7 @@
                   <a:tcPr marL="91440" marR="91440" marT="45720" marB="45720" anchor="ctr">
                     <a:lnL w="6350" cap="flat" cmpd="sng" algn="ctr">
                       <a:solidFill>
-                        <a:srgbClr val="E9E4DA"/>
+                        <a:srgbClr val="E6E1D8"/>
                       </a:solidFill>
                       <a:prstDash val="solid"/>
                       <a:round/>
@@ -18756,7 +19020,7 @@
                     </a:lnL>
                     <a:lnR w="6350" cap="flat" cmpd="sng" algn="ctr">
                       <a:solidFill>
-                        <a:srgbClr val="E9E4DA"/>
+                        <a:srgbClr val="E6E1D8"/>
                       </a:solidFill>
                       <a:prstDash val="solid"/>
                       <a:round/>
@@ -18765,7 +19029,7 @@
                     </a:lnR>
                     <a:lnT w="6350" cap="flat" cmpd="sng" algn="ctr">
                       <a:solidFill>
-                        <a:srgbClr val="E9E4DA"/>
+                        <a:srgbClr val="E6E1D8"/>
                       </a:solidFill>
                       <a:prstDash val="solid"/>
                       <a:round/>
@@ -18774,7 +19038,7 @@
                     </a:lnT>
                     <a:lnB w="6350" cap="flat" cmpd="sng" algn="ctr">
                       <a:solidFill>
-                        <a:srgbClr val="E9E4DA"/>
+                        <a:srgbClr val="E6E1D8"/>
                       </a:solidFill>
                       <a:prstDash val="solid"/>
                       <a:round/>
@@ -18782,7 +19046,7 @@
                       <a:tailEnd type="none" w="med" len="med"/>
                     </a:lnB>
                     <a:solidFill>
-                      <a:srgbClr val="F4F1EA"/>
+                      <a:srgbClr val="F4F1EB"/>
                     </a:solidFill>
                   </a:tcPr>
                 </a:tc>
@@ -18799,7 +19063,7 @@
                       <a:r>
                         <a:rPr lang="en-US" sz="1050" b="1" dirty="0">
                           <a:solidFill>
-                            <a:srgbClr val="0B0B0B"/>
+                            <a:srgbClr val="0E2238"/>
                           </a:solidFill>
                           <a:latin typeface="+mn-lt" pitchFamily="34" charset="0"/>
                           <a:ea typeface="+mn-lt" pitchFamily="34" charset="-122"/>
@@ -18817,7 +19081,7 @@
                   <a:tcPr marL="91440" marR="91440" marT="45720" marB="45720" anchor="ctr">
                     <a:lnL w="6350" cap="flat" cmpd="sng" algn="ctr">
                       <a:solidFill>
-                        <a:srgbClr val="E9E4DA"/>
+                        <a:srgbClr val="E6E1D8"/>
                       </a:solidFill>
                       <a:prstDash val="solid"/>
                       <a:round/>
@@ -18826,7 +19090,7 @@
                     </a:lnL>
                     <a:lnR w="6350" cap="flat" cmpd="sng" algn="ctr">
                       <a:solidFill>
-                        <a:srgbClr val="E9E4DA"/>
+                        <a:srgbClr val="E6E1D8"/>
                       </a:solidFill>
                       <a:prstDash val="solid"/>
                       <a:round/>
@@ -18835,7 +19099,7 @@
                     </a:lnR>
                     <a:lnT w="6350" cap="flat" cmpd="sng" algn="ctr">
                       <a:solidFill>
-                        <a:srgbClr val="E9E4DA"/>
+                        <a:srgbClr val="E6E1D8"/>
                       </a:solidFill>
                       <a:prstDash val="solid"/>
                       <a:round/>
@@ -18844,7 +19108,7 @@
                     </a:lnT>
                     <a:lnB w="6350" cap="flat" cmpd="sng" algn="ctr">
                       <a:solidFill>
-                        <a:srgbClr val="E9E4DA"/>
+                        <a:srgbClr val="E6E1D8"/>
                       </a:solidFill>
                       <a:prstDash val="solid"/>
                       <a:round/>
@@ -18867,7 +19131,7 @@
                       <a:r>
                         <a:rPr lang="en-US" sz="1050" dirty="0">
                           <a:solidFill>
-                            <a:srgbClr val="2A2D33"/>
+                            <a:srgbClr val="1F3A52"/>
                           </a:solidFill>
                           <a:latin typeface="+mn-lt" pitchFamily="34" charset="0"/>
                           <a:ea typeface="+mn-lt" pitchFamily="34" charset="-122"/>
@@ -18885,7 +19149,7 @@
                   <a:tcPr marL="91440" marR="91440" marT="45720" marB="45720" anchor="ctr">
                     <a:lnL w="6350" cap="flat" cmpd="sng" algn="ctr">
                       <a:solidFill>
-                        <a:srgbClr val="E9E4DA"/>
+                        <a:srgbClr val="E6E1D8"/>
                       </a:solidFill>
                       <a:prstDash val="solid"/>
                       <a:round/>
@@ -18894,7 +19158,7 @@
                     </a:lnL>
                     <a:lnR w="6350" cap="flat" cmpd="sng" algn="ctr">
                       <a:solidFill>
-                        <a:srgbClr val="E9E4DA"/>
+                        <a:srgbClr val="E6E1D8"/>
                       </a:solidFill>
                       <a:prstDash val="solid"/>
                       <a:round/>
@@ -18903,7 +19167,7 @@
                     </a:lnR>
                     <a:lnT w="6350" cap="flat" cmpd="sng" algn="ctr">
                       <a:solidFill>
-                        <a:srgbClr val="E9E4DA"/>
+                        <a:srgbClr val="E6E1D8"/>
                       </a:solidFill>
                       <a:prstDash val="solid"/>
                       <a:round/>
@@ -18912,7 +19176,7 @@
                     </a:lnT>
                     <a:lnB w="6350" cap="flat" cmpd="sng" algn="ctr">
                       <a:solidFill>
-                        <a:srgbClr val="E9E4DA"/>
+                        <a:srgbClr val="E6E1D8"/>
                       </a:solidFill>
                       <a:prstDash val="solid"/>
                       <a:round/>
@@ -18935,7 +19199,7 @@
                       <a:r>
                         <a:rPr lang="en-US" sz="1050" dirty="0">
                           <a:solidFill>
-                            <a:srgbClr val="2A2D33"/>
+                            <a:srgbClr val="1F3A52"/>
                           </a:solidFill>
                           <a:latin typeface="+mn-lt" pitchFamily="34" charset="0"/>
                           <a:ea typeface="+mn-lt" pitchFamily="34" charset="-122"/>
@@ -18953,7 +19217,7 @@
                   <a:tcPr marL="91440" marR="91440" marT="45720" marB="45720" anchor="ctr">
                     <a:lnL w="6350" cap="flat" cmpd="sng" algn="ctr">
                       <a:solidFill>
-                        <a:srgbClr val="E9E4DA"/>
+                        <a:srgbClr val="E6E1D8"/>
                       </a:solidFill>
                       <a:prstDash val="solid"/>
                       <a:round/>
@@ -18962,7 +19226,7 @@
                     </a:lnL>
                     <a:lnR w="6350" cap="flat" cmpd="sng" algn="ctr">
                       <a:solidFill>
-                        <a:srgbClr val="E9E4DA"/>
+                        <a:srgbClr val="E6E1D8"/>
                       </a:solidFill>
                       <a:prstDash val="solid"/>
                       <a:round/>
@@ -18971,7 +19235,7 @@
                     </a:lnR>
                     <a:lnT w="6350" cap="flat" cmpd="sng" algn="ctr">
                       <a:solidFill>
-                        <a:srgbClr val="E9E4DA"/>
+                        <a:srgbClr val="E6E1D8"/>
                       </a:solidFill>
                       <a:prstDash val="solid"/>
                       <a:round/>
@@ -18980,7 +19244,7 @@
                     </a:lnT>
                     <a:lnB w="6350" cap="flat" cmpd="sng" algn="ctr">
                       <a:solidFill>
-                        <a:srgbClr val="E9E4DA"/>
+                        <a:srgbClr val="E6E1D8"/>
                       </a:solidFill>
                       <a:prstDash val="solid"/>
                       <a:round/>
@@ -19005,7 +19269,7 @@
                       <a:r>
                         <a:rPr lang="en-US" sz="1050" b="1" dirty="0">
                           <a:solidFill>
-                            <a:srgbClr val="0B0B0B"/>
+                            <a:srgbClr val="0E2238"/>
                           </a:solidFill>
                           <a:latin typeface="+mn-lt" pitchFamily="34" charset="0"/>
                           <a:ea typeface="+mn-lt" pitchFamily="34" charset="-122"/>
@@ -19023,7 +19287,7 @@
                   <a:tcPr marL="91440" marR="91440" marT="45720" marB="45720" anchor="ctr">
                     <a:lnL w="6350" cap="flat" cmpd="sng" algn="ctr">
                       <a:solidFill>
-                        <a:srgbClr val="E9E4DA"/>
+                        <a:srgbClr val="E6E1D8"/>
                       </a:solidFill>
                       <a:prstDash val="solid"/>
                       <a:round/>
@@ -19032,7 +19296,7 @@
                     </a:lnL>
                     <a:lnR w="6350" cap="flat" cmpd="sng" algn="ctr">
                       <a:solidFill>
-                        <a:srgbClr val="E9E4DA"/>
+                        <a:srgbClr val="E6E1D8"/>
                       </a:solidFill>
                       <a:prstDash val="solid"/>
                       <a:round/>
@@ -19041,7 +19305,7 @@
                     </a:lnR>
                     <a:lnT w="6350" cap="flat" cmpd="sng" algn="ctr">
                       <a:solidFill>
-                        <a:srgbClr val="E9E4DA"/>
+                        <a:srgbClr val="E6E1D8"/>
                       </a:solidFill>
                       <a:prstDash val="solid"/>
                       <a:round/>
@@ -19050,7 +19314,7 @@
                     </a:lnT>
                     <a:lnB w="6350" cap="flat" cmpd="sng" algn="ctr">
                       <a:solidFill>
-                        <a:srgbClr val="E9E4DA"/>
+                        <a:srgbClr val="E6E1D8"/>
                       </a:solidFill>
                       <a:prstDash val="solid"/>
                       <a:round/>
@@ -19058,7 +19322,7 @@
                       <a:tailEnd type="none" w="med" len="med"/>
                     </a:lnB>
                     <a:solidFill>
-                      <a:srgbClr val="F4F1EA"/>
+                      <a:srgbClr val="F4F1EB"/>
                     </a:solidFill>
                   </a:tcPr>
                 </a:tc>
@@ -19073,7 +19337,7 @@
                       <a:r>
                         <a:rPr lang="en-US" sz="1050" dirty="0">
                           <a:solidFill>
-                            <a:srgbClr val="2A2D33"/>
+                            <a:srgbClr val="1F3A52"/>
                           </a:solidFill>
                           <a:latin typeface="+mn-lt" pitchFamily="34" charset="0"/>
                           <a:ea typeface="+mn-lt" pitchFamily="34" charset="-122"/>
@@ -19091,7 +19355,7 @@
                   <a:tcPr marL="91440" marR="91440" marT="45720" marB="45720" anchor="ctr">
                     <a:lnL w="6350" cap="flat" cmpd="sng" algn="ctr">
                       <a:solidFill>
-                        <a:srgbClr val="E9E4DA"/>
+                        <a:srgbClr val="E6E1D8"/>
                       </a:solidFill>
                       <a:prstDash val="solid"/>
                       <a:round/>
@@ -19100,7 +19364,7 @@
                     </a:lnL>
                     <a:lnR w="6350" cap="flat" cmpd="sng" algn="ctr">
                       <a:solidFill>
-                        <a:srgbClr val="E9E4DA"/>
+                        <a:srgbClr val="E6E1D8"/>
                       </a:solidFill>
                       <a:prstDash val="solid"/>
                       <a:round/>
@@ -19109,7 +19373,7 @@
                     </a:lnR>
                     <a:lnT w="6350" cap="flat" cmpd="sng" algn="ctr">
                       <a:solidFill>
-                        <a:srgbClr val="E9E4DA"/>
+                        <a:srgbClr val="E6E1D8"/>
                       </a:solidFill>
                       <a:prstDash val="solid"/>
                       <a:round/>
@@ -19118,7 +19382,7 @@
                     </a:lnT>
                     <a:lnB w="6350" cap="flat" cmpd="sng" algn="ctr">
                       <a:solidFill>
-                        <a:srgbClr val="E9E4DA"/>
+                        <a:srgbClr val="E6E1D8"/>
                       </a:solidFill>
                       <a:prstDash val="solid"/>
                       <a:round/>
@@ -19126,7 +19390,7 @@
                       <a:tailEnd type="none" w="med" len="med"/>
                     </a:lnB>
                     <a:solidFill>
-                      <a:srgbClr val="F4F1EA"/>
+                      <a:srgbClr val="F4F1EB"/>
                     </a:solidFill>
                   </a:tcPr>
                 </a:tc>
@@ -19141,7 +19405,7 @@
                       <a:r>
                         <a:rPr lang="en-US" sz="1050" dirty="0">
                           <a:solidFill>
-                            <a:srgbClr val="2A2D33"/>
+                            <a:srgbClr val="1F3A52"/>
                           </a:solidFill>
                           <a:latin typeface="+mn-lt" pitchFamily="34" charset="0"/>
                           <a:ea typeface="+mn-lt" pitchFamily="34" charset="-122"/>
@@ -19159,7 +19423,7 @@
                   <a:tcPr marL="91440" marR="91440" marT="45720" marB="45720" anchor="ctr">
                     <a:lnL w="6350" cap="flat" cmpd="sng" algn="ctr">
                       <a:solidFill>
-                        <a:srgbClr val="E9E4DA"/>
+                        <a:srgbClr val="E6E1D8"/>
                       </a:solidFill>
                       <a:prstDash val="solid"/>
                       <a:round/>
@@ -19168,7 +19432,7 @@
                     </a:lnL>
                     <a:lnR w="6350" cap="flat" cmpd="sng" algn="ctr">
                       <a:solidFill>
-                        <a:srgbClr val="E9E4DA"/>
+                        <a:srgbClr val="E6E1D8"/>
                       </a:solidFill>
                       <a:prstDash val="solid"/>
                       <a:round/>
@@ -19177,7 +19441,7 @@
                     </a:lnR>
                     <a:lnT w="6350" cap="flat" cmpd="sng" algn="ctr">
                       <a:solidFill>
-                        <a:srgbClr val="E9E4DA"/>
+                        <a:srgbClr val="E6E1D8"/>
                       </a:solidFill>
                       <a:prstDash val="solid"/>
                       <a:round/>
@@ -19186,7 +19450,7 @@
                     </a:lnT>
                     <a:lnB w="6350" cap="flat" cmpd="sng" algn="ctr">
                       <a:solidFill>
-                        <a:srgbClr val="E9E4DA"/>
+                        <a:srgbClr val="E6E1D8"/>
                       </a:solidFill>
                       <a:prstDash val="solid"/>
                       <a:round/>
@@ -19194,7 +19458,7 @@
                       <a:tailEnd type="none" w="med" len="med"/>
                     </a:lnB>
                     <a:solidFill>
-                      <a:srgbClr val="F4F1EA"/>
+                      <a:srgbClr val="F4F1EB"/>
                     </a:solidFill>
                   </a:tcPr>
                 </a:tc>
@@ -19211,7 +19475,7 @@
                       <a:r>
                         <a:rPr lang="en-US" sz="1050" b="1" dirty="0">
                           <a:solidFill>
-                            <a:srgbClr val="0B0B0B"/>
+                            <a:srgbClr val="0E2238"/>
                           </a:solidFill>
                           <a:latin typeface="+mn-lt" pitchFamily="34" charset="0"/>
                           <a:ea typeface="+mn-lt" pitchFamily="34" charset="-122"/>
@@ -19229,7 +19493,7 @@
                   <a:tcPr marL="91440" marR="91440" marT="45720" marB="45720" anchor="ctr">
                     <a:lnL w="6350" cap="flat" cmpd="sng" algn="ctr">
                       <a:solidFill>
-                        <a:srgbClr val="E9E4DA"/>
+                        <a:srgbClr val="E6E1D8"/>
                       </a:solidFill>
                       <a:prstDash val="solid"/>
                       <a:round/>
@@ -19238,7 +19502,7 @@
                     </a:lnL>
                     <a:lnR w="6350" cap="flat" cmpd="sng" algn="ctr">
                       <a:solidFill>
-                        <a:srgbClr val="E9E4DA"/>
+                        <a:srgbClr val="E6E1D8"/>
                       </a:solidFill>
                       <a:prstDash val="solid"/>
                       <a:round/>
@@ -19247,7 +19511,7 @@
                     </a:lnR>
                     <a:lnT w="6350" cap="flat" cmpd="sng" algn="ctr">
                       <a:solidFill>
-                        <a:srgbClr val="E9E4DA"/>
+                        <a:srgbClr val="E6E1D8"/>
                       </a:solidFill>
                       <a:prstDash val="solid"/>
                       <a:round/>
@@ -19256,7 +19520,7 @@
                     </a:lnT>
                     <a:lnB w="6350" cap="flat" cmpd="sng" algn="ctr">
                       <a:solidFill>
-                        <a:srgbClr val="E9E4DA"/>
+                        <a:srgbClr val="E6E1D8"/>
                       </a:solidFill>
                       <a:prstDash val="solid"/>
                       <a:round/>
@@ -19279,7 +19543,7 @@
                       <a:r>
                         <a:rPr lang="en-US" sz="1050" dirty="0">
                           <a:solidFill>
-                            <a:srgbClr val="2A2D33"/>
+                            <a:srgbClr val="1F3A52"/>
                           </a:solidFill>
                           <a:latin typeface="+mn-lt" pitchFamily="34" charset="0"/>
                           <a:ea typeface="+mn-lt" pitchFamily="34" charset="-122"/>
@@ -19297,7 +19561,7 @@
                   <a:tcPr marL="91440" marR="91440" marT="45720" marB="45720" anchor="ctr">
                     <a:lnL w="6350" cap="flat" cmpd="sng" algn="ctr">
                       <a:solidFill>
-                        <a:srgbClr val="E9E4DA"/>
+                        <a:srgbClr val="E6E1D8"/>
                       </a:solidFill>
                       <a:prstDash val="solid"/>
                       <a:round/>
@@ -19306,7 +19570,7 @@
                     </a:lnL>
                     <a:lnR w="6350" cap="flat" cmpd="sng" algn="ctr">
                       <a:solidFill>
-                        <a:srgbClr val="E9E4DA"/>
+                        <a:srgbClr val="E6E1D8"/>
                       </a:solidFill>
                       <a:prstDash val="solid"/>
                       <a:round/>
@@ -19315,7 +19579,7 @@
                     </a:lnR>
                     <a:lnT w="6350" cap="flat" cmpd="sng" algn="ctr">
                       <a:solidFill>
-                        <a:srgbClr val="E9E4DA"/>
+                        <a:srgbClr val="E6E1D8"/>
                       </a:solidFill>
                       <a:prstDash val="solid"/>
                       <a:round/>
@@ -19324,7 +19588,7 @@
                     </a:lnT>
                     <a:lnB w="6350" cap="flat" cmpd="sng" algn="ctr">
                       <a:solidFill>
-                        <a:srgbClr val="E9E4DA"/>
+                        <a:srgbClr val="E6E1D8"/>
                       </a:solidFill>
                       <a:prstDash val="solid"/>
                       <a:round/>
@@ -19347,7 +19611,7 @@
                       <a:r>
                         <a:rPr lang="en-US" sz="1050" dirty="0">
                           <a:solidFill>
-                            <a:srgbClr val="2A2D33"/>
+                            <a:srgbClr val="1F3A52"/>
                           </a:solidFill>
                           <a:latin typeface="+mn-lt" pitchFamily="34" charset="0"/>
                           <a:ea typeface="+mn-lt" pitchFamily="34" charset="-122"/>
@@ -19365,7 +19629,7 @@
                   <a:tcPr marL="91440" marR="91440" marT="45720" marB="45720" anchor="ctr">
                     <a:lnL w="6350" cap="flat" cmpd="sng" algn="ctr">
                       <a:solidFill>
-                        <a:srgbClr val="E9E4DA"/>
+                        <a:srgbClr val="E6E1D8"/>
                       </a:solidFill>
                       <a:prstDash val="solid"/>
                       <a:round/>
@@ -19374,7 +19638,7 @@
                     </a:lnL>
                     <a:lnR w="6350" cap="flat" cmpd="sng" algn="ctr">
                       <a:solidFill>
-                        <a:srgbClr val="E9E4DA"/>
+                        <a:srgbClr val="E6E1D8"/>
                       </a:solidFill>
                       <a:prstDash val="solid"/>
                       <a:round/>
@@ -19383,7 +19647,7 @@
                     </a:lnR>
                     <a:lnT w="6350" cap="flat" cmpd="sng" algn="ctr">
                       <a:solidFill>
-                        <a:srgbClr val="E9E4DA"/>
+                        <a:srgbClr val="E6E1D8"/>
                       </a:solidFill>
                       <a:prstDash val="solid"/>
                       <a:round/>
@@ -19392,7 +19656,7 @@
                     </a:lnT>
                     <a:lnB w="6350" cap="flat" cmpd="sng" algn="ctr">
                       <a:solidFill>
-                        <a:srgbClr val="E9E4DA"/>
+                        <a:srgbClr val="E6E1D8"/>
                       </a:solidFill>
                       <a:prstDash val="solid"/>
                       <a:round/>
@@ -19417,7 +19681,7 @@
                       <a:r>
                         <a:rPr lang="en-US" sz="1050" b="1" dirty="0">
                           <a:solidFill>
-                            <a:srgbClr val="0B0B0B"/>
+                            <a:srgbClr val="0E2238"/>
                           </a:solidFill>
                           <a:latin typeface="+mn-lt" pitchFamily="34" charset="0"/>
                           <a:ea typeface="+mn-lt" pitchFamily="34" charset="-122"/>
@@ -19435,7 +19699,7 @@
                   <a:tcPr marL="91440" marR="91440" marT="45720" marB="45720" anchor="ctr">
                     <a:lnL w="6350" cap="flat" cmpd="sng" algn="ctr">
                       <a:solidFill>
-                        <a:srgbClr val="E9E4DA"/>
+                        <a:srgbClr val="E6E1D8"/>
                       </a:solidFill>
                       <a:prstDash val="solid"/>
                       <a:round/>
@@ -19444,7 +19708,7 @@
                     </a:lnL>
                     <a:lnR w="6350" cap="flat" cmpd="sng" algn="ctr">
                       <a:solidFill>
-                        <a:srgbClr val="E9E4DA"/>
+                        <a:srgbClr val="E6E1D8"/>
                       </a:solidFill>
                       <a:prstDash val="solid"/>
                       <a:round/>
@@ -19453,7 +19717,7 @@
                     </a:lnR>
                     <a:lnT w="6350" cap="flat" cmpd="sng" algn="ctr">
                       <a:solidFill>
-                        <a:srgbClr val="E9E4DA"/>
+                        <a:srgbClr val="E6E1D8"/>
                       </a:solidFill>
                       <a:prstDash val="solid"/>
                       <a:round/>
@@ -19462,7 +19726,7 @@
                     </a:lnT>
                     <a:lnB w="6350" cap="flat" cmpd="sng" algn="ctr">
                       <a:solidFill>
-                        <a:srgbClr val="E9E4DA"/>
+                        <a:srgbClr val="E6E1D8"/>
                       </a:solidFill>
                       <a:prstDash val="solid"/>
                       <a:round/>
@@ -19470,7 +19734,7 @@
                       <a:tailEnd type="none" w="med" len="med"/>
                     </a:lnB>
                     <a:solidFill>
-                      <a:srgbClr val="F4F1EA"/>
+                      <a:srgbClr val="F4F1EB"/>
                     </a:solidFill>
                   </a:tcPr>
                 </a:tc>
@@ -19485,7 +19749,7 @@
                       <a:r>
                         <a:rPr lang="en-US" sz="1050" dirty="0">
                           <a:solidFill>
-                            <a:srgbClr val="2A2D33"/>
+                            <a:srgbClr val="1F3A52"/>
                           </a:solidFill>
                           <a:latin typeface="+mn-lt" pitchFamily="34" charset="0"/>
                           <a:ea typeface="+mn-lt" pitchFamily="34" charset="-122"/>
@@ -19503,7 +19767,7 @@
                   <a:tcPr marL="91440" marR="91440" marT="45720" marB="45720" anchor="ctr">
                     <a:lnL w="6350" cap="flat" cmpd="sng" algn="ctr">
                       <a:solidFill>
-                        <a:srgbClr val="E9E4DA"/>
+                        <a:srgbClr val="E6E1D8"/>
                       </a:solidFill>
                       <a:prstDash val="solid"/>
                       <a:round/>
@@ -19512,7 +19776,7 @@
                     </a:lnL>
                     <a:lnR w="6350" cap="flat" cmpd="sng" algn="ctr">
                       <a:solidFill>
-                        <a:srgbClr val="E9E4DA"/>
+                        <a:srgbClr val="E6E1D8"/>
                       </a:solidFill>
                       <a:prstDash val="solid"/>
                       <a:round/>
@@ -19521,7 +19785,7 @@
                     </a:lnR>
                     <a:lnT w="6350" cap="flat" cmpd="sng" algn="ctr">
                       <a:solidFill>
-                        <a:srgbClr val="E9E4DA"/>
+                        <a:srgbClr val="E6E1D8"/>
                       </a:solidFill>
                       <a:prstDash val="solid"/>
                       <a:round/>
@@ -19530,7 +19794,7 @@
                     </a:lnT>
                     <a:lnB w="6350" cap="flat" cmpd="sng" algn="ctr">
                       <a:solidFill>
-                        <a:srgbClr val="E9E4DA"/>
+                        <a:srgbClr val="E6E1D8"/>
                       </a:solidFill>
                       <a:prstDash val="solid"/>
                       <a:round/>
@@ -19538,7 +19802,7 @@
                       <a:tailEnd type="none" w="med" len="med"/>
                     </a:lnB>
                     <a:solidFill>
-                      <a:srgbClr val="F4F1EA"/>
+                      <a:srgbClr val="F4F1EB"/>
                     </a:solidFill>
                   </a:tcPr>
                 </a:tc>
@@ -19553,7 +19817,7 @@
                       <a:r>
                         <a:rPr lang="en-US" sz="1050" dirty="0">
                           <a:solidFill>
-                            <a:srgbClr val="2A2D33"/>
+                            <a:srgbClr val="1F3A52"/>
                           </a:solidFill>
                           <a:latin typeface="+mn-lt" pitchFamily="34" charset="0"/>
                           <a:ea typeface="+mn-lt" pitchFamily="34" charset="-122"/>
@@ -19571,7 +19835,7 @@
                   <a:tcPr marL="91440" marR="91440" marT="45720" marB="45720" anchor="ctr">
                     <a:lnL w="6350" cap="flat" cmpd="sng" algn="ctr">
                       <a:solidFill>
-                        <a:srgbClr val="E9E4DA"/>
+                        <a:srgbClr val="E6E1D8"/>
                       </a:solidFill>
                       <a:prstDash val="solid"/>
                       <a:round/>
@@ -19580,7 +19844,7 @@
                     </a:lnL>
                     <a:lnR w="6350" cap="flat" cmpd="sng" algn="ctr">
                       <a:solidFill>
-                        <a:srgbClr val="E9E4DA"/>
+                        <a:srgbClr val="E6E1D8"/>
                       </a:solidFill>
                       <a:prstDash val="solid"/>
                       <a:round/>
@@ -19589,7 +19853,7 @@
                     </a:lnR>
                     <a:lnT w="6350" cap="flat" cmpd="sng" algn="ctr">
                       <a:solidFill>
-                        <a:srgbClr val="E9E4DA"/>
+                        <a:srgbClr val="E6E1D8"/>
                       </a:solidFill>
                       <a:prstDash val="solid"/>
                       <a:round/>
@@ -19598,7 +19862,7 @@
                     </a:lnT>
                     <a:lnB w="6350" cap="flat" cmpd="sng" algn="ctr">
                       <a:solidFill>
-                        <a:srgbClr val="E9E4DA"/>
+                        <a:srgbClr val="E6E1D8"/>
                       </a:solidFill>
                       <a:prstDash val="solid"/>
                       <a:round/>
@@ -19606,7 +19870,7 @@
                       <a:tailEnd type="none" w="med" len="med"/>
                     </a:lnB>
                     <a:solidFill>
-                      <a:srgbClr val="F4F1EA"/>
+                      <a:srgbClr val="F4F1EB"/>
                     </a:solidFill>
                   </a:tcPr>
                 </a:tc>
@@ -19653,6 +19917,36 @@
       </p:sp>
       <p:sp>
         <p:nvSpPr>
+          <p:cNvPr id="6" name="Text 0"/>
+          <p:cNvSpPr/>
+          <p:nvPr>
+            <p:ph idx="101" type="title" hasCustomPrompt="1"/>
+          </p:nvPr>
+        </p:nvSpPr>
+        <p:spPr>
+          <a:xfrm>
+            <a:off x="457200" y="420624"/>
+            <a:ext cx="8229600" cy="731520"/>
+          </a:xfrm>
+          <a:prstGeom prst="rect">
+            <a:avLst/>
+          </a:prstGeom>
+          <a:noFill/>
+          <a:ln/>
+        </p:spPr>
+        <p:txBody>
+          <a:bodyPr wrap="square" lIns="0" tIns="0" rIns="0" bIns="0" rtlCol="0" anchor="t"/>
+          <a:lstStyle/>
+          <a:p>
+            <a:pPr algn="l" indent="0" marL="0">
+              <a:buNone/>
+            </a:pPr>
+            <a:endParaRPr lang="en-US" sz="2600" dirty="0"/>
+          </a:p>
+        </p:txBody>
+      </p:sp>
+      <p:sp>
+        <p:nvSpPr>
           <p:cNvPr id="25" name="Slide Number Placeholder 0"/>
           <p:cNvSpPr>
             <a:spLocks noGrp="1"/>
@@ -19681,7 +19975,7 @@
             <a:lvl1pPr>
               <a:defRPr sz="900">
                 <a:solidFill>
-                  <a:srgbClr val="6B6F76"/>
+                  <a:srgbClr val="6E7B88"/>
                 </a:solidFill>
               </a:defRPr>
             </a:lvl1pPr>
@@ -19723,16 +20017,14 @@
       </p:grpSpPr>
       <p:sp>
         <p:nvSpPr>
-          <p:cNvPr id="2" name="Text 3"/>
-          <p:cNvSpPr/>
-          <p:nvPr>
-            <p:ph idx="103" type="title" hasCustomPrompt="1"/>
-          </p:nvPr>
-        </p:nvSpPr>
-        <p:spPr>
-          <a:xfrm>
-            <a:off x="457200" y="347472"/>
-            <a:ext cx="8229600" cy="685800"/>
+          <p:cNvPr id="2" name="Text 0"/>
+          <p:cNvSpPr txBox="1"/>
+          <p:nvPr/>
+        </p:nvSpPr>
+        <p:spPr>
+          <a:xfrm>
+            <a:off x="457200" y="402336"/>
+            <a:ext cx="8229600" cy="749808"/>
           </a:xfrm>
           <a:prstGeom prst="rect">
             <a:avLst/>
@@ -19741,17 +20033,20 @@
           <a:ln/>
         </p:spPr>
         <p:txBody>
-          <a:bodyPr wrap="square" lIns="0" tIns="0" rIns="0" bIns="0" rtlCol="0" anchor="ctr"/>
-          <a:lstStyle/>
-          <a:p>
-            <a:pPr algn="l" indent="0" marL="0">
-              <a:buNone/>
-            </a:pPr>
-            <a:r>
-              <a:rPr lang="en-US" sz="2600" b="1" dirty="0">
-                <a:solidFill>
-                  <a:srgbClr val="0B0B0B"/>
-                </a:solidFill>
+          <a:bodyPr wrap="square" lIns="0" tIns="0" rIns="0" bIns="0" rtlCol="0" anchor="t"/>
+          <a:lstStyle/>
+          <a:p>
+            <a:pPr algn="l" indent="0" marL="0">
+              <a:buNone/>
+            </a:pPr>
+            <a:r>
+              <a:rPr lang="en-US" altLang="en-US" sz="2600" b="1" dirty="0">
+                <a:solidFill>
+                  <a:schemeClr val="tx1"/>
+                </a:solidFill>
+                <a:latin typeface="Cambria" pitchFamily="34" charset="0"/>
+                <a:ea typeface="Cambria" pitchFamily="34" charset="-122"/>
+                <a:cs typeface="Cambria" pitchFamily="34" charset="-120"/>
               </a:rPr>
               <a:t>Service types</a:t>
             </a:r>
@@ -19810,11 +20105,11 @@
             <a:avLst/>
           </a:prstGeom>
           <a:solidFill>
-            <a:srgbClr val="F4F1EA"/>
+            <a:srgbClr val="F4F1EB"/>
           </a:solidFill>
           <a:ln w="12700">
             <a:solidFill>
-              <a:srgbClr val="F4F1EA"/>
+              <a:srgbClr val="F4F1EB"/>
             </a:solidFill>
             <a:prstDash val="solid"/>
           </a:ln>
@@ -19915,11 +20210,11 @@
             <a:avLst/>
           </a:prstGeom>
           <a:solidFill>
-            <a:srgbClr val="F4F1EA"/>
+            <a:srgbClr val="F4F1EB"/>
           </a:solidFill>
           <a:ln w="12700">
             <a:solidFill>
-              <a:srgbClr val="F4F1EA"/>
+              <a:srgbClr val="F4F1EB"/>
             </a:solidFill>
             <a:prstDash val="solid"/>
           </a:ln>
@@ -20020,11 +20315,11 @@
             <a:avLst/>
           </a:prstGeom>
           <a:solidFill>
-            <a:srgbClr val="F4F1EA"/>
+            <a:srgbClr val="F4F1EB"/>
           </a:solidFill>
           <a:ln w="12700">
             <a:solidFill>
-              <a:srgbClr val="F4F1EA"/>
+              <a:srgbClr val="F4F1EB"/>
             </a:solidFill>
             <a:prstDash val="solid"/>
           </a:ln>
@@ -20125,11 +20420,11 @@
             <a:avLst/>
           </a:prstGeom>
           <a:solidFill>
-            <a:srgbClr val="F4F1EA"/>
+            <a:srgbClr val="F4F1EB"/>
           </a:solidFill>
           <a:ln w="12700">
             <a:solidFill>
-              <a:srgbClr val="F4F1EA"/>
+              <a:srgbClr val="F4F1EB"/>
             </a:solidFill>
             <a:prstDash val="solid"/>
           </a:ln>
@@ -20230,11 +20525,11 @@
             <a:avLst/>
           </a:prstGeom>
           <a:solidFill>
-            <a:srgbClr val="F4F1EA"/>
+            <a:srgbClr val="F4F1EB"/>
           </a:solidFill>
           <a:ln w="12700">
             <a:solidFill>
-              <a:srgbClr val="F4F1EA"/>
+              <a:srgbClr val="F4F1EB"/>
             </a:solidFill>
             <a:prstDash val="solid"/>
           </a:ln>
@@ -20335,11 +20630,11 @@
             <a:avLst/>
           </a:prstGeom>
           <a:solidFill>
-            <a:srgbClr val="F4F1EA"/>
+            <a:srgbClr val="F4F1EB"/>
           </a:solidFill>
           <a:ln w="12700">
             <a:solidFill>
-              <a:srgbClr val="F4F1EA"/>
+              <a:srgbClr val="F4F1EB"/>
             </a:solidFill>
             <a:prstDash val="solid"/>
           </a:ln>
@@ -20427,6 +20722,36 @@
       </p:sp>
       <p:sp>
         <p:nvSpPr>
+          <p:cNvPr id="22" name="Text 0"/>
+          <p:cNvSpPr/>
+          <p:nvPr>
+            <p:ph idx="101" type="title" hasCustomPrompt="1"/>
+          </p:nvPr>
+        </p:nvSpPr>
+        <p:spPr>
+          <a:xfrm>
+            <a:off x="457200" y="420624"/>
+            <a:ext cx="8229600" cy="731520"/>
+          </a:xfrm>
+          <a:prstGeom prst="rect">
+            <a:avLst/>
+          </a:prstGeom>
+          <a:noFill/>
+          <a:ln/>
+        </p:spPr>
+        <p:txBody>
+          <a:bodyPr wrap="square" lIns="0" tIns="0" rIns="0" bIns="0" rtlCol="0" anchor="t"/>
+          <a:lstStyle/>
+          <a:p>
+            <a:pPr algn="l" indent="0" marL="0">
+              <a:buNone/>
+            </a:pPr>
+            <a:endParaRPr lang="en-US" sz="2600" dirty="0"/>
+          </a:p>
+        </p:txBody>
+      </p:sp>
+      <p:sp>
+        <p:nvSpPr>
           <p:cNvPr id="25" name="Slide Number Placeholder 0"/>
           <p:cNvSpPr>
             <a:spLocks noGrp="1"/>
@@ -20455,7 +20780,7 @@
             <a:lvl1pPr>
               <a:defRPr sz="900">
                 <a:solidFill>
-                  <a:srgbClr val="6B6F76"/>
+                  <a:srgbClr val="6E7B88"/>
                 </a:solidFill>
               </a:defRPr>
             </a:lvl1pPr>
@@ -20479,47 +20804,47 @@
 </file>
 
 <file path=ppt/theme/theme1.xml><?xml version="1.0" encoding="utf-8"?>
-<a:theme xmlns:a="http://schemas.openxmlformats.org/drawingml/2006/main" name="RK Advocates">
+<a:theme xmlns:a="http://schemas.openxmlformats.org/drawingml/2006/main" name="Midnight Copper">
   <a:themeElements>
-    <a:clrScheme name="RK Advocates">
+    <a:clrScheme name="Midnight Copper">
       <a:dk1>
-        <a:srgbClr val="0B0B0B"/>
+        <a:srgbClr val="0E2238"/>
       </a:dk1>
       <a:lt1>
         <a:srgbClr val="FFFFFF"/>
       </a:lt1>
       <a:dk2>
-        <a:srgbClr val="2A2D33"/>
+        <a:srgbClr val="1F3A52"/>
       </a:dk2>
       <a:lt2>
-        <a:srgbClr val="F4F1EA"/>
+        <a:srgbClr val="F4F1EB"/>
       </a:lt2>
       <a:accent1>
-        <a:srgbClr val="B08D57"/>
+        <a:srgbClr val="B5723B"/>
       </a:accent1>
       <a:accent2>
-        <a:srgbClr val="D8C39A"/>
+        <a:srgbClr val="D9B38C"/>
       </a:accent2>
       <a:accent3>
-        <a:srgbClr val="6B6F76"/>
+        <a:srgbClr val="6E7B88"/>
       </a:accent3>
       <a:accent4>
-        <a:srgbClr val="8A6D3B"/>
+        <a:srgbClr val="8C5527"/>
       </a:accent4>
       <a:accent5>
-        <a:srgbClr val="E9E4DA"/>
+        <a:srgbClr val="E6E1D8"/>
       </a:accent5>
       <a:accent6>
-        <a:srgbClr val="15171B"/>
+        <a:srgbClr val="5B7A8C"/>
       </a:accent6>
       <a:hlink>
-        <a:srgbClr val="B08D57"/>
+        <a:srgbClr val="B5723B"/>
       </a:hlink>
       <a:folHlink>
-        <a:srgbClr val="8A6D3B"/>
+        <a:srgbClr val="8C5527"/>
       </a:folHlink>
     </a:clrScheme>
-    <a:fontScheme name="RK Advocates">
+    <a:fontScheme name="Midnight Copper">
       <a:majorFont>
         <a:latin typeface="Cambria"/>
         <a:ea typeface=""/>
